--- a/examples/demo.pptx
+++ b/examples/demo.pptx
@@ -3495,7 +3495,7 @@
         <p:spPr>
           <a:xfrm>
             <a:off x="400050" y="247650"/>
-            <a:ext cx="10839450" cy="381000"/>
+            <a:ext cx="10839450" cy="428625"/>
           </a:xfrm>
           <a:prstGeom prst="rect">
             <a:avLst/>
@@ -3511,7 +3511,7 @@
               <a:buNone/>
             </a:pPr>
             <a:r>
-              <a:rPr lang="en-US" sz="3000" b="1" dirty="0">
+              <a:rPr lang="en-US" sz="3200" b="1" dirty="0">
                 <a:solidFill>
                   <a:srgbClr val="EAEAEA"/>
                 </a:solidFill>
@@ -3521,7 +3521,7 @@
               </a:rPr>
               <a:t>Q1 Results</a:t>
             </a:r>
-            <a:endParaRPr lang="en-US" sz="3000" dirty="0"/>
+            <a:endParaRPr lang="en-US" sz="3200" dirty="0"/>
           </a:p>
         </p:txBody>
       </p:sp>
@@ -3533,8 +3533,8 @@
         </p:nvSpPr>
         <p:spPr>
           <a:xfrm>
-            <a:off x="400050" y="800100"/>
-            <a:ext cx="10648950" cy="266700"/>
+            <a:off x="400050" y="942975"/>
+            <a:ext cx="10648950" cy="285750"/>
           </a:xfrm>
           <a:prstGeom prst="rect">
             <a:avLst/>
@@ -3751,8 +3751,8 @@
         </p:nvSpPr>
         <p:spPr>
           <a:xfrm>
-            <a:off x="1524000" y="2190750"/>
-            <a:ext cx="9144000" cy="1047750"/>
+            <a:off x="1524000" y="2552700"/>
+            <a:ext cx="9144000" cy="609600"/>
           </a:xfrm>
           <a:prstGeom prst="rect">
             <a:avLst/>
@@ -3790,8 +3790,8 @@
         </p:nvSpPr>
         <p:spPr>
           <a:xfrm>
-            <a:off x="1524000" y="3381375"/>
-            <a:ext cx="9144000" cy="428625"/>
+            <a:off x="1524000" y="3467100"/>
+            <a:ext cx="9144000" cy="457200"/>
           </a:xfrm>
           <a:prstGeom prst="rect">
             <a:avLst/>
@@ -3970,7 +3970,7 @@
         <p:spPr>
           <a:xfrm>
             <a:off x="400050" y="247650"/>
-            <a:ext cx="10839450" cy="381000"/>
+            <a:ext cx="10839450" cy="428625"/>
           </a:xfrm>
           <a:prstGeom prst="rect">
             <a:avLst/>
@@ -3986,7 +3986,7 @@
               <a:buNone/>
             </a:pPr>
             <a:r>
-              <a:rPr lang="en-US" sz="3000" b="1" dirty="0">
+              <a:rPr lang="en-US" sz="3200" b="1" dirty="0">
                 <a:solidFill>
                   <a:srgbClr val="EAEAEA"/>
                 </a:solidFill>
@@ -3996,7 +3996,7 @@
               </a:rPr>
               <a:t>Every release should make the next decision sharper</a:t>
             </a:r>
-            <a:endParaRPr lang="en-US" sz="3000" dirty="0"/>
+            <a:endParaRPr lang="en-US" sz="3200" dirty="0"/>
           </a:p>
         </p:txBody>
       </p:sp>
@@ -4008,8 +4008,8 @@
         </p:nvSpPr>
         <p:spPr>
           <a:xfrm>
-            <a:off x="400050" y="800100"/>
-            <a:ext cx="10648950" cy="266700"/>
+            <a:off x="400050" y="942975"/>
+            <a:ext cx="10648950" cy="285750"/>
           </a:xfrm>
           <a:prstGeom prst="rect">
             <a:avLst/>
@@ -4125,12 +4125,12 @@
         </p:nvSpPr>
         <p:spPr>
           <a:xfrm>
-            <a:off x="400050" y="1219200"/>
-            <a:ext cx="5695950" cy="5105400"/>
+            <a:off x="400050" y="1457325"/>
+            <a:ext cx="5695950" cy="4867275"/>
           </a:xfrm>
           <a:prstGeom prst="roundRect">
             <a:avLst>
-              <a:gd name="adj" fmla="val 1791"/>
+              <a:gd name="adj" fmla="val 1879"/>
             </a:avLst>
           </a:prstGeom>
           <a:solidFill>
@@ -4152,7 +4152,7 @@
         </p:nvSpPr>
         <p:spPr>
           <a:xfrm>
-            <a:off x="400050" y="1219200"/>
+            <a:off x="400050" y="1457325"/>
             <a:ext cx="5695950" cy="76200"/>
           </a:xfrm>
           <a:prstGeom prst="rect">
@@ -4177,7 +4177,7 @@
         </p:nvSpPr>
         <p:spPr>
           <a:xfrm>
-            <a:off x="609600" y="1447800"/>
+            <a:off x="609600" y="1685925"/>
             <a:ext cx="5276850" cy="171450"/>
           </a:xfrm>
           <a:prstGeom prst="rect">
@@ -4216,7 +4216,7 @@
         </p:nvSpPr>
         <p:spPr>
           <a:xfrm>
-            <a:off x="609600" y="1743075"/>
+            <a:off x="609600" y="1981200"/>
             <a:ext cx="5276850" cy="476250"/>
           </a:xfrm>
           <a:prstGeom prst="rect">
@@ -4255,7 +4255,7 @@
         </p:nvSpPr>
         <p:spPr>
           <a:xfrm>
-            <a:off x="609600" y="2505075"/>
+            <a:off x="609600" y="2828925"/>
             <a:ext cx="66675" cy="66675"/>
           </a:xfrm>
           <a:prstGeom prst="roundRect">
@@ -4282,17 +4282,17 @@
         </p:nvSpPr>
         <p:spPr>
           <a:xfrm>
-            <a:off x="800100" y="2419350"/>
-            <a:ext cx="5086350" cy="342900"/>
-          </a:xfrm>
-          <a:prstGeom prst="rect">
-            <a:avLst/>
-          </a:prstGeom>
-          <a:noFill/>
-          <a:ln/>
-        </p:spPr>
-        <p:txBody>
-          <a:bodyPr wrap="square" lIns="0" tIns="0" rIns="0" bIns="0" rtlCol="0" anchor="t"/>
+            <a:off x="800100" y="2657475"/>
+            <a:ext cx="5086350" cy="419100"/>
+          </a:xfrm>
+          <a:prstGeom prst="rect">
+            <a:avLst/>
+          </a:prstGeom>
+          <a:noFill/>
+          <a:ln/>
+        </p:spPr>
+        <p:txBody>
+          <a:bodyPr wrap="square" lIns="0" tIns="0" rIns="0" bIns="0" rtlCol="0" anchor="ctr"/>
           <a:lstStyle/>
           <a:p>
             <a:pPr algn="l" indent="0" marL="0">
@@ -4321,7 +4321,7 @@
         </p:nvSpPr>
         <p:spPr>
           <a:xfrm>
-            <a:off x="609600" y="3038475"/>
+            <a:off x="609600" y="3286125"/>
             <a:ext cx="66675" cy="66675"/>
           </a:xfrm>
           <a:prstGeom prst="roundRect">
@@ -4348,17 +4348,17 @@
         </p:nvSpPr>
         <p:spPr>
           <a:xfrm>
-            <a:off x="800100" y="2952750"/>
-            <a:ext cx="5086350" cy="342900"/>
-          </a:xfrm>
-          <a:prstGeom prst="rect">
-            <a:avLst/>
-          </a:prstGeom>
-          <a:noFill/>
-          <a:ln/>
-        </p:spPr>
-        <p:txBody>
-          <a:bodyPr wrap="square" lIns="0" tIns="0" rIns="0" bIns="0" rtlCol="0" anchor="t"/>
+            <a:off x="800100" y="3114675"/>
+            <a:ext cx="5086350" cy="419100"/>
+          </a:xfrm>
+          <a:prstGeom prst="rect">
+            <a:avLst/>
+          </a:prstGeom>
+          <a:noFill/>
+          <a:ln/>
+        </p:spPr>
+        <p:txBody>
+          <a:bodyPr wrap="square" lIns="0" tIns="0" rIns="0" bIns="0" rtlCol="0" anchor="ctr"/>
           <a:lstStyle/>
           <a:p>
             <a:pPr algn="l" indent="0" marL="0">
@@ -4387,7 +4387,7 @@
         </p:nvSpPr>
         <p:spPr>
           <a:xfrm>
-            <a:off x="609600" y="3571875"/>
+            <a:off x="609600" y="3743325"/>
             <a:ext cx="66675" cy="66675"/>
           </a:xfrm>
           <a:prstGeom prst="roundRect">
@@ -4414,17 +4414,17 @@
         </p:nvSpPr>
         <p:spPr>
           <a:xfrm>
-            <a:off x="800100" y="3486150"/>
-            <a:ext cx="5086350" cy="342900"/>
-          </a:xfrm>
-          <a:prstGeom prst="rect">
-            <a:avLst/>
-          </a:prstGeom>
-          <a:noFill/>
-          <a:ln/>
-        </p:spPr>
-        <p:txBody>
-          <a:bodyPr wrap="square" lIns="0" tIns="0" rIns="0" bIns="0" rtlCol="0" anchor="t"/>
+            <a:off x="800100" y="3571875"/>
+            <a:ext cx="5086350" cy="419100"/>
+          </a:xfrm>
+          <a:prstGeom prst="rect">
+            <a:avLst/>
+          </a:prstGeom>
+          <a:noFill/>
+          <a:ln/>
+        </p:spPr>
+        <p:txBody>
+          <a:bodyPr wrap="square" lIns="0" tIns="0" rIns="0" bIns="0" rtlCol="0" anchor="ctr"/>
           <a:lstStyle/>
           <a:p>
             <a:pPr algn="l" indent="0" marL="0">
@@ -4453,12 +4453,12 @@
         </p:nvSpPr>
         <p:spPr>
           <a:xfrm>
-            <a:off x="6324600" y="1219200"/>
-            <a:ext cx="5467350" cy="5105400"/>
+            <a:off x="6324600" y="1457325"/>
+            <a:ext cx="5467350" cy="4867275"/>
           </a:xfrm>
           <a:prstGeom prst="roundRect">
             <a:avLst>
-              <a:gd name="adj" fmla="val 1791"/>
+              <a:gd name="adj" fmla="val 1879"/>
             </a:avLst>
           </a:prstGeom>
           <a:solidFill>
@@ -4480,7 +4480,7 @@
         </p:nvSpPr>
         <p:spPr>
           <a:xfrm>
-            <a:off x="6324600" y="1219200"/>
+            <a:off x="6324600" y="1457325"/>
             <a:ext cx="5467350" cy="76200"/>
           </a:xfrm>
           <a:prstGeom prst="rect">
@@ -4505,7 +4505,7 @@
         </p:nvSpPr>
         <p:spPr>
           <a:xfrm>
-            <a:off x="6534150" y="1447800"/>
+            <a:off x="6534150" y="1685925"/>
             <a:ext cx="5048250" cy="171450"/>
           </a:xfrm>
           <a:prstGeom prst="rect">
@@ -4544,7 +4544,7 @@
         </p:nvSpPr>
         <p:spPr>
           <a:xfrm>
-            <a:off x="6534150" y="1743075"/>
+            <a:off x="6534150" y="1981200"/>
             <a:ext cx="5048250" cy="476250"/>
           </a:xfrm>
           <a:prstGeom prst="rect">
@@ -4583,7 +4583,7 @@
         </p:nvSpPr>
         <p:spPr>
           <a:xfrm>
-            <a:off x="6534150" y="2505075"/>
+            <a:off x="6534150" y="2828925"/>
             <a:ext cx="66675" cy="66675"/>
           </a:xfrm>
           <a:prstGeom prst="roundRect">
@@ -4610,17 +4610,17 @@
         </p:nvSpPr>
         <p:spPr>
           <a:xfrm>
-            <a:off x="6724650" y="2419350"/>
-            <a:ext cx="4857750" cy="342900"/>
-          </a:xfrm>
-          <a:prstGeom prst="rect">
-            <a:avLst/>
-          </a:prstGeom>
-          <a:noFill/>
-          <a:ln/>
-        </p:spPr>
-        <p:txBody>
-          <a:bodyPr wrap="square" lIns="0" tIns="0" rIns="0" bIns="0" rtlCol="0" anchor="t"/>
+            <a:off x="6724650" y="2657475"/>
+            <a:ext cx="4857750" cy="419100"/>
+          </a:xfrm>
+          <a:prstGeom prst="rect">
+            <a:avLst/>
+          </a:prstGeom>
+          <a:noFill/>
+          <a:ln/>
+        </p:spPr>
+        <p:txBody>
+          <a:bodyPr wrap="square" lIns="0" tIns="0" rIns="0" bIns="0" rtlCol="0" anchor="ctr"/>
           <a:lstStyle/>
           <a:p>
             <a:pPr algn="l" indent="0" marL="0">
@@ -4649,7 +4649,7 @@
         </p:nvSpPr>
         <p:spPr>
           <a:xfrm>
-            <a:off x="6534150" y="3038475"/>
+            <a:off x="6534150" y="3286125"/>
             <a:ext cx="66675" cy="66675"/>
           </a:xfrm>
           <a:prstGeom prst="roundRect">
@@ -4676,17 +4676,17 @@
         </p:nvSpPr>
         <p:spPr>
           <a:xfrm>
-            <a:off x="6724650" y="2952750"/>
-            <a:ext cx="4857750" cy="342900"/>
-          </a:xfrm>
-          <a:prstGeom prst="rect">
-            <a:avLst/>
-          </a:prstGeom>
-          <a:noFill/>
-          <a:ln/>
-        </p:spPr>
-        <p:txBody>
-          <a:bodyPr wrap="square" lIns="0" tIns="0" rIns="0" bIns="0" rtlCol="0" anchor="t"/>
+            <a:off x="6724650" y="3114675"/>
+            <a:ext cx="4857750" cy="419100"/>
+          </a:xfrm>
+          <a:prstGeom prst="rect">
+            <a:avLst/>
+          </a:prstGeom>
+          <a:noFill/>
+          <a:ln/>
+        </p:spPr>
+        <p:txBody>
+          <a:bodyPr wrap="square" lIns="0" tIns="0" rIns="0" bIns="0" rtlCol="0" anchor="ctr"/>
           <a:lstStyle/>
           <a:p>
             <a:pPr algn="l" indent="0" marL="0">
@@ -4715,7 +4715,7 @@
         </p:nvSpPr>
         <p:spPr>
           <a:xfrm>
-            <a:off x="6534150" y="3571875"/>
+            <a:off x="6534150" y="3743325"/>
             <a:ext cx="66675" cy="66675"/>
           </a:xfrm>
           <a:prstGeom prst="roundRect">
@@ -4742,17 +4742,17 @@
         </p:nvSpPr>
         <p:spPr>
           <a:xfrm>
-            <a:off x="6724650" y="3486150"/>
-            <a:ext cx="4857750" cy="342900"/>
-          </a:xfrm>
-          <a:prstGeom prst="rect">
-            <a:avLst/>
-          </a:prstGeom>
-          <a:noFill/>
-          <a:ln/>
-        </p:spPr>
-        <p:txBody>
-          <a:bodyPr wrap="square" lIns="0" tIns="0" rIns="0" bIns="0" rtlCol="0" anchor="t"/>
+            <a:off x="6724650" y="3571875"/>
+            <a:ext cx="4857750" cy="419100"/>
+          </a:xfrm>
+          <a:prstGeom prst="rect">
+            <a:avLst/>
+          </a:prstGeom>
+          <a:noFill/>
+          <a:ln/>
+        </p:spPr>
+        <p:txBody>
+          <a:bodyPr wrap="square" lIns="0" tIns="0" rIns="0" bIns="0" rtlCol="0" anchor="ctr"/>
           <a:lstStyle/>
           <a:p>
             <a:pPr algn="l" indent="0" marL="0">
@@ -4844,7 +4844,7 @@
         <p:spPr>
           <a:xfrm>
             <a:off x="400050" y="247650"/>
-            <a:ext cx="10839450" cy="381000"/>
+            <a:ext cx="10839450" cy="428625"/>
           </a:xfrm>
           <a:prstGeom prst="rect">
             <a:avLst/>
@@ -4860,7 +4860,7 @@
               <a:buNone/>
             </a:pPr>
             <a:r>
-              <a:rPr lang="en-US" sz="3000" b="1" dirty="0">
+              <a:rPr lang="en-US" sz="3200" b="1" dirty="0">
                 <a:solidFill>
                   <a:srgbClr val="EAEAEA"/>
                 </a:solidFill>
@@ -4870,7 +4870,7 @@
               </a:rPr>
               <a:t>Prioritize use cases that compound across the journey</a:t>
             </a:r>
-            <a:endParaRPr lang="en-US" sz="3000" dirty="0"/>
+            <a:endParaRPr lang="en-US" sz="3200" dirty="0"/>
           </a:p>
         </p:txBody>
       </p:sp>
@@ -4882,8 +4882,8 @@
         </p:nvSpPr>
         <p:spPr>
           <a:xfrm>
-            <a:off x="400050" y="800100"/>
-            <a:ext cx="10648950" cy="266700"/>
+            <a:off x="400050" y="942975"/>
+            <a:ext cx="10648950" cy="285750"/>
           </a:xfrm>
           <a:prstGeom prst="rect">
             <a:avLst/>
@@ -4999,8 +4999,8 @@
         </p:nvSpPr>
         <p:spPr>
           <a:xfrm>
-            <a:off x="400050" y="1219200"/>
-            <a:ext cx="2705100" cy="5105400"/>
+            <a:off x="400050" y="1457325"/>
+            <a:ext cx="2705100" cy="4867275"/>
           </a:xfrm>
           <a:prstGeom prst="roundRect">
             <a:avLst>
@@ -5026,8 +5026,8 @@
         </p:nvSpPr>
         <p:spPr>
           <a:xfrm>
-            <a:off x="400050" y="1219200"/>
-            <a:ext cx="57150" cy="5105400"/>
+            <a:off x="400050" y="1457325"/>
+            <a:ext cx="57150" cy="4867275"/>
           </a:xfrm>
           <a:prstGeom prst="rect">
             <a:avLst/>
@@ -5051,7 +5051,7 @@
         </p:nvSpPr>
         <p:spPr>
           <a:xfrm>
-            <a:off x="571500" y="1371600"/>
+            <a:off x="571500" y="1571625"/>
             <a:ext cx="2362200" cy="171450"/>
           </a:xfrm>
           <a:prstGeom prst="rect">
@@ -5090,8 +5090,8 @@
         </p:nvSpPr>
         <p:spPr>
           <a:xfrm>
-            <a:off x="571500" y="1638300"/>
-            <a:ext cx="2362200" cy="4533900"/>
+            <a:off x="571500" y="1838325"/>
+            <a:ext cx="2362200" cy="4371975"/>
           </a:xfrm>
           <a:prstGeom prst="rect">
             <a:avLst/>
@@ -5107,7 +5107,7 @@
               <a:buNone/>
             </a:pPr>
             <a:r>
-              <a:rPr lang="en-US" sz="1800" b="1" dirty="0">
+              <a:rPr lang="en-US" sz="1600" b="1" dirty="0">
                 <a:solidFill>
                   <a:srgbClr val="EAEAEA"/>
                 </a:solidFill>
@@ -5117,7 +5117,7 @@
               </a:rPr>
               <a:t>Audience insight · Opportunity sizing</a:t>
             </a:r>
-            <a:endParaRPr lang="en-US" sz="1800" dirty="0"/>
+            <a:endParaRPr lang="en-US" sz="1600" dirty="0"/>
           </a:p>
         </p:txBody>
       </p:sp>
@@ -5129,8 +5129,8 @@
         </p:nvSpPr>
         <p:spPr>
           <a:xfrm>
-            <a:off x="3295650" y="1219200"/>
-            <a:ext cx="2705100" cy="5105400"/>
+            <a:off x="3295650" y="1457325"/>
+            <a:ext cx="2705100" cy="4867275"/>
           </a:xfrm>
           <a:prstGeom prst="roundRect">
             <a:avLst>
@@ -5156,8 +5156,8 @@
         </p:nvSpPr>
         <p:spPr>
           <a:xfrm>
-            <a:off x="3295650" y="1219200"/>
-            <a:ext cx="57150" cy="5105400"/>
+            <a:off x="3295650" y="1457325"/>
+            <a:ext cx="57150" cy="4867275"/>
           </a:xfrm>
           <a:prstGeom prst="rect">
             <a:avLst/>
@@ -5181,7 +5181,7 @@
         </p:nvSpPr>
         <p:spPr>
           <a:xfrm>
-            <a:off x="3467100" y="1371600"/>
+            <a:off x="3467100" y="1571625"/>
             <a:ext cx="2362200" cy="171450"/>
           </a:xfrm>
           <a:prstGeom prst="rect">
@@ -5220,8 +5220,8 @@
         </p:nvSpPr>
         <p:spPr>
           <a:xfrm>
-            <a:off x="3467100" y="1638300"/>
-            <a:ext cx="2362200" cy="4533900"/>
+            <a:off x="3467100" y="1838325"/>
+            <a:ext cx="2362200" cy="4371975"/>
           </a:xfrm>
           <a:prstGeom prst="rect">
             <a:avLst/>
@@ -5237,7 +5237,7 @@
               <a:buNone/>
             </a:pPr>
             <a:r>
-              <a:rPr lang="en-US" sz="1800" b="1" dirty="0">
+              <a:rPr lang="en-US" sz="1600" b="1" dirty="0">
                 <a:solidFill>
                   <a:srgbClr val="EAEAEA"/>
                 </a:solidFill>
@@ -5247,7 +5247,7 @@
               </a:rPr>
               <a:t>Personalized content · Fit / intent scoring</a:t>
             </a:r>
-            <a:endParaRPr lang="en-US" sz="1800" dirty="0"/>
+            <a:endParaRPr lang="en-US" sz="1600" dirty="0"/>
           </a:p>
         </p:txBody>
       </p:sp>
@@ -5259,8 +5259,8 @@
         </p:nvSpPr>
         <p:spPr>
           <a:xfrm>
-            <a:off x="6191250" y="1219200"/>
-            <a:ext cx="2705100" cy="5105400"/>
+            <a:off x="6191250" y="1457325"/>
+            <a:ext cx="2705100" cy="4867275"/>
           </a:xfrm>
           <a:prstGeom prst="roundRect">
             <a:avLst>
@@ -5286,8 +5286,8 @@
         </p:nvSpPr>
         <p:spPr>
           <a:xfrm>
-            <a:off x="6191250" y="1219200"/>
-            <a:ext cx="57150" cy="5105400"/>
+            <a:off x="6191250" y="1457325"/>
+            <a:ext cx="57150" cy="4867275"/>
           </a:xfrm>
           <a:prstGeom prst="rect">
             <a:avLst/>
@@ -5311,7 +5311,7 @@
         </p:nvSpPr>
         <p:spPr>
           <a:xfrm>
-            <a:off x="6362700" y="1371600"/>
+            <a:off x="6362700" y="1571625"/>
             <a:ext cx="2362200" cy="171450"/>
           </a:xfrm>
           <a:prstGeom prst="rect">
@@ -5350,8 +5350,8 @@
         </p:nvSpPr>
         <p:spPr>
           <a:xfrm>
-            <a:off x="6362700" y="1638300"/>
-            <a:ext cx="2362200" cy="4533900"/>
+            <a:off x="6362700" y="1838325"/>
+            <a:ext cx="2362200" cy="4371975"/>
           </a:xfrm>
           <a:prstGeom prst="rect">
             <a:avLst/>
@@ -5367,7 +5367,7 @@
               <a:buNone/>
             </a:pPr>
             <a:r>
-              <a:rPr lang="en-US" sz="1800" b="1" dirty="0">
+              <a:rPr lang="en-US" sz="1600" b="1" dirty="0">
                 <a:solidFill>
                   <a:srgbClr val="EAEAEA"/>
                 </a:solidFill>
@@ -5377,7 +5377,7 @@
               </a:rPr>
               <a:t>Next-best offer · In-product guidance</a:t>
             </a:r>
-            <a:endParaRPr lang="en-US" sz="1800" dirty="0"/>
+            <a:endParaRPr lang="en-US" sz="1600" dirty="0"/>
           </a:p>
         </p:txBody>
       </p:sp>
@@ -5389,8 +5389,8 @@
         </p:nvSpPr>
         <p:spPr>
           <a:xfrm>
-            <a:off x="9086850" y="1219200"/>
-            <a:ext cx="2705100" cy="5105400"/>
+            <a:off x="9086850" y="1457325"/>
+            <a:ext cx="2705100" cy="4867275"/>
           </a:xfrm>
           <a:prstGeom prst="roundRect">
             <a:avLst>
@@ -5416,8 +5416,8 @@
         </p:nvSpPr>
         <p:spPr>
           <a:xfrm>
-            <a:off x="9086850" y="1219200"/>
-            <a:ext cx="57150" cy="5105400"/>
+            <a:off x="9086850" y="1457325"/>
+            <a:ext cx="57150" cy="4867275"/>
           </a:xfrm>
           <a:prstGeom prst="rect">
             <a:avLst/>
@@ -5441,7 +5441,7 @@
         </p:nvSpPr>
         <p:spPr>
           <a:xfrm>
-            <a:off x="9258300" y="1371600"/>
+            <a:off x="9258300" y="1571625"/>
             <a:ext cx="2362200" cy="171450"/>
           </a:xfrm>
           <a:prstGeom prst="rect">
@@ -5480,8 +5480,8 @@
         </p:nvSpPr>
         <p:spPr>
           <a:xfrm>
-            <a:off x="9258300" y="1638300"/>
-            <a:ext cx="2362200" cy="4533900"/>
+            <a:off x="9258300" y="1838325"/>
+            <a:ext cx="2362200" cy="4371975"/>
           </a:xfrm>
           <a:prstGeom prst="rect">
             <a:avLst/>
@@ -5497,7 +5497,7 @@
               <a:buNone/>
             </a:pPr>
             <a:r>
-              <a:rPr lang="en-US" sz="1800" b="1" dirty="0">
+              <a:rPr lang="en-US" sz="1600" b="1" dirty="0">
                 <a:solidFill>
                   <a:srgbClr val="EAEAEA"/>
                 </a:solidFill>
@@ -5507,7 +5507,7 @@
               </a:rPr>
               <a:t>Churn early warning · Expansion plays</a:t>
             </a:r>
-            <a:endParaRPr lang="en-US" sz="1800" dirty="0"/>
+            <a:endParaRPr lang="en-US" sz="1600" dirty="0"/>
           </a:p>
         </p:txBody>
       </p:sp>
@@ -5582,7 +5582,7 @@
         <p:spPr>
           <a:xfrm>
             <a:off x="400050" y="247650"/>
-            <a:ext cx="10839450" cy="381000"/>
+            <a:ext cx="10839450" cy="428625"/>
           </a:xfrm>
           <a:prstGeom prst="rect">
             <a:avLst/>
@@ -5598,7 +5598,7 @@
               <a:buNone/>
             </a:pPr>
             <a:r>
-              <a:rPr lang="en-US" sz="3000" b="1" dirty="0">
+              <a:rPr lang="en-US" sz="3200" b="1" dirty="0">
                 <a:solidFill>
                   <a:srgbClr val="EAEAEA"/>
                 </a:solidFill>
@@ -5608,7 +5608,7 @@
               </a:rPr>
               <a:t>Pilot readouts and next moves</a:t>
             </a:r>
-            <a:endParaRPr lang="en-US" sz="3000" dirty="0"/>
+            <a:endParaRPr lang="en-US" sz="3200" dirty="0"/>
           </a:p>
         </p:txBody>
       </p:sp>
@@ -5698,7 +5698,7 @@
         </p:nvSpPr>
         <p:spPr>
           <a:xfrm>
-            <a:off x="400050" y="819150"/>
+            <a:off x="400050" y="962025"/>
             <a:ext cx="11391900" cy="171450"/>
           </a:xfrm>
           <a:prstGeom prst="rect">
@@ -5737,12 +5737,12 @@
         </p:nvSpPr>
         <p:spPr>
           <a:xfrm>
-            <a:off x="400050" y="1028700"/>
-            <a:ext cx="3638550" cy="2095500"/>
+            <a:off x="400050" y="1228725"/>
+            <a:ext cx="3705225" cy="1238250"/>
           </a:xfrm>
           <a:prstGeom prst="roundRect">
             <a:avLst>
-              <a:gd name="adj" fmla="val 4364"/>
+              <a:gd name="adj" fmla="val 7385"/>
             </a:avLst>
           </a:prstGeom>
           <a:solidFill>
@@ -5764,8 +5764,8 @@
         </p:nvSpPr>
         <p:spPr>
           <a:xfrm>
-            <a:off x="400050" y="1028700"/>
-            <a:ext cx="3638550" cy="76200"/>
+            <a:off x="400050" y="1228725"/>
+            <a:ext cx="3705225" cy="76200"/>
           </a:xfrm>
           <a:prstGeom prst="rect">
             <a:avLst/>
@@ -5789,8 +5789,8 @@
         </p:nvSpPr>
         <p:spPr>
           <a:xfrm>
-            <a:off x="590550" y="1276350"/>
-            <a:ext cx="3257550" cy="171450"/>
+            <a:off x="571500" y="1438275"/>
+            <a:ext cx="3362325" cy="171450"/>
           </a:xfrm>
           <a:prstGeom prst="rect">
             <a:avLst/>
@@ -5828,8 +5828,8 @@
         </p:nvSpPr>
         <p:spPr>
           <a:xfrm>
-            <a:off x="590550" y="1676400"/>
-            <a:ext cx="3257550" cy="762000"/>
+            <a:off x="571500" y="1762125"/>
+            <a:ext cx="3362325" cy="381000"/>
           </a:xfrm>
           <a:prstGeom prst="rect">
             <a:avLst/>
@@ -5867,8 +5867,8 @@
         </p:nvSpPr>
         <p:spPr>
           <a:xfrm>
-            <a:off x="590550" y="2571750"/>
-            <a:ext cx="3257550" cy="381000"/>
+            <a:off x="571500" y="1990725"/>
+            <a:ext cx="3362325" cy="342900"/>
           </a:xfrm>
           <a:prstGeom prst="rect">
             <a:avLst/>
@@ -5884,7 +5884,7 @@
               <a:buNone/>
             </a:pPr>
             <a:r>
-              <a:rPr lang="en-US" sz="1300" dirty="0">
+              <a:rPr lang="en-US" sz="1200" dirty="0">
                 <a:solidFill>
                   <a:srgbClr val="6C6C8A"/>
                 </a:solidFill>
@@ -5894,7 +5894,7 @@
               </a:rPr>
               <a:t>Incremental reactivation</a:t>
             </a:r>
-            <a:endParaRPr lang="en-US" sz="1300" dirty="0"/>
+            <a:endParaRPr lang="en-US" sz="1200" dirty="0"/>
           </a:p>
         </p:txBody>
       </p:sp>
@@ -5906,12 +5906,12 @@
         </p:nvSpPr>
         <p:spPr>
           <a:xfrm>
-            <a:off x="4267200" y="1028700"/>
-            <a:ext cx="3638550" cy="2095500"/>
+            <a:off x="4238625" y="1228725"/>
+            <a:ext cx="3705225" cy="1238250"/>
           </a:xfrm>
           <a:prstGeom prst="roundRect">
             <a:avLst>
-              <a:gd name="adj" fmla="val 4364"/>
+              <a:gd name="adj" fmla="val 7385"/>
             </a:avLst>
           </a:prstGeom>
           <a:solidFill>
@@ -5933,8 +5933,8 @@
         </p:nvSpPr>
         <p:spPr>
           <a:xfrm>
-            <a:off x="4267200" y="1028700"/>
-            <a:ext cx="3638550" cy="76200"/>
+            <a:off x="4238625" y="1228725"/>
+            <a:ext cx="3705225" cy="76200"/>
           </a:xfrm>
           <a:prstGeom prst="rect">
             <a:avLst/>
@@ -5958,8 +5958,8 @@
         </p:nvSpPr>
         <p:spPr>
           <a:xfrm>
-            <a:off x="4457700" y="1276350"/>
-            <a:ext cx="3257550" cy="171450"/>
+            <a:off x="4410075" y="1438275"/>
+            <a:ext cx="3362325" cy="171450"/>
           </a:xfrm>
           <a:prstGeom prst="rect">
             <a:avLst/>
@@ -5997,8 +5997,8 @@
         </p:nvSpPr>
         <p:spPr>
           <a:xfrm>
-            <a:off x="4457700" y="1676400"/>
-            <a:ext cx="3257550" cy="762000"/>
+            <a:off x="4410075" y="1762125"/>
+            <a:ext cx="3362325" cy="381000"/>
           </a:xfrm>
           <a:prstGeom prst="rect">
             <a:avLst/>
@@ -6036,8 +6036,8 @@
         </p:nvSpPr>
         <p:spPr>
           <a:xfrm>
-            <a:off x="4457700" y="2571750"/>
-            <a:ext cx="3257550" cy="381000"/>
+            <a:off x="4410075" y="1990725"/>
+            <a:ext cx="3362325" cy="342900"/>
           </a:xfrm>
           <a:prstGeom prst="rect">
             <a:avLst/>
@@ -6053,7 +6053,7 @@
               <a:buNone/>
             </a:pPr>
             <a:r>
-              <a:rPr lang="en-US" sz="1300" dirty="0">
+              <a:rPr lang="en-US" sz="1200" dirty="0">
                 <a:solidFill>
                   <a:srgbClr val="6C6C8A"/>
                 </a:solidFill>
@@ -6063,7 +6063,7 @@
               </a:rPr>
               <a:t>Idea → live holdout</a:t>
             </a:r>
-            <a:endParaRPr lang="en-US" sz="1300" dirty="0"/>
+            <a:endParaRPr lang="en-US" sz="1200" dirty="0"/>
           </a:p>
         </p:txBody>
       </p:sp>
@@ -6075,12 +6075,12 @@
         </p:nvSpPr>
         <p:spPr>
           <a:xfrm>
-            <a:off x="8134350" y="1028700"/>
-            <a:ext cx="3638550" cy="2095500"/>
+            <a:off x="8077200" y="1228725"/>
+            <a:ext cx="3705225" cy="1238250"/>
           </a:xfrm>
           <a:prstGeom prst="roundRect">
             <a:avLst>
-              <a:gd name="adj" fmla="val 4364"/>
+              <a:gd name="adj" fmla="val 7385"/>
             </a:avLst>
           </a:prstGeom>
           <a:solidFill>
@@ -6102,8 +6102,8 @@
         </p:nvSpPr>
         <p:spPr>
           <a:xfrm>
-            <a:off x="8134350" y="1028700"/>
-            <a:ext cx="3638550" cy="76200"/>
+            <a:off x="8077200" y="1228725"/>
+            <a:ext cx="3705225" cy="76200"/>
           </a:xfrm>
           <a:prstGeom prst="rect">
             <a:avLst/>
@@ -6127,8 +6127,8 @@
         </p:nvSpPr>
         <p:spPr>
           <a:xfrm>
-            <a:off x="8324850" y="1276350"/>
-            <a:ext cx="3257550" cy="171450"/>
+            <a:off x="8248650" y="1438275"/>
+            <a:ext cx="3362325" cy="171450"/>
           </a:xfrm>
           <a:prstGeom prst="rect">
             <a:avLst/>
@@ -6166,8 +6166,8 @@
         </p:nvSpPr>
         <p:spPr>
           <a:xfrm>
-            <a:off x="8324850" y="1676400"/>
-            <a:ext cx="3257550" cy="762000"/>
+            <a:off x="8248650" y="1762125"/>
+            <a:ext cx="3362325" cy="381000"/>
           </a:xfrm>
           <a:prstGeom prst="rect">
             <a:avLst/>
@@ -6205,8 +6205,8 @@
         </p:nvSpPr>
         <p:spPr>
           <a:xfrm>
-            <a:off x="8324850" y="2571750"/>
-            <a:ext cx="3257550" cy="381000"/>
+            <a:off x="8248650" y="1990725"/>
+            <a:ext cx="3362325" cy="342900"/>
           </a:xfrm>
           <a:prstGeom prst="rect">
             <a:avLst/>
@@ -6222,7 +6222,7 @@
               <a:buNone/>
             </a:pPr>
             <a:r>
-              <a:rPr lang="en-US" sz="1300" dirty="0">
+              <a:rPr lang="en-US" sz="1200" dirty="0">
                 <a:solidFill>
                   <a:srgbClr val="6C6C8A"/>
                 </a:solidFill>
@@ -6232,7 +6232,7 @@
               </a:rPr>
               <a:t>Low-margin offers</a:t>
             </a:r>
-            <a:endParaRPr lang="en-US" sz="1300" dirty="0"/>
+            <a:endParaRPr lang="en-US" sz="1200" dirty="0"/>
           </a:p>
         </p:txBody>
       </p:sp>
@@ -6244,7 +6244,7 @@
         </p:nvSpPr>
         <p:spPr>
           <a:xfrm>
-            <a:off x="400050" y="2771775"/>
+            <a:off x="400050" y="2914650"/>
             <a:ext cx="11391900" cy="171450"/>
           </a:xfrm>
           <a:prstGeom prst="rect">
@@ -6283,7 +6283,7 @@
         </p:nvSpPr>
         <p:spPr>
           <a:xfrm>
-            <a:off x="400050" y="3514725"/>
+            <a:off x="400050" y="3609975"/>
             <a:ext cx="3714750" cy="800100"/>
           </a:xfrm>
           <a:prstGeom prst="chevron">
@@ -6308,7 +6308,7 @@
         </p:nvSpPr>
         <p:spPr>
           <a:xfrm>
-            <a:off x="666750" y="3514725"/>
+            <a:off x="666750" y="3609975"/>
             <a:ext cx="3028950" cy="800100"/>
           </a:xfrm>
           <a:prstGeom prst="rect">
@@ -6347,7 +6347,7 @@
         </p:nvSpPr>
         <p:spPr>
           <a:xfrm>
-            <a:off x="400050" y="4467225"/>
+            <a:off x="400050" y="4562475"/>
             <a:ext cx="3714750" cy="1333500"/>
           </a:xfrm>
           <a:prstGeom prst="roundRect">
@@ -6374,7 +6374,7 @@
         </p:nvSpPr>
         <p:spPr>
           <a:xfrm>
-            <a:off x="400050" y="4467225"/>
+            <a:off x="400050" y="4562475"/>
             <a:ext cx="47625" cy="1333500"/>
           </a:xfrm>
           <a:prstGeom prst="rect">
@@ -6399,7 +6399,7 @@
         </p:nvSpPr>
         <p:spPr>
           <a:xfrm>
-            <a:off x="533400" y="4562475"/>
+            <a:off x="533400" y="4657725"/>
             <a:ext cx="3486150" cy="1143000"/>
           </a:xfrm>
           <a:prstGeom prst="rect">
@@ -6438,7 +6438,7 @@
         </p:nvSpPr>
         <p:spPr>
           <a:xfrm>
-            <a:off x="4229100" y="3514725"/>
+            <a:off x="4229100" y="3609975"/>
             <a:ext cx="3714750" cy="800100"/>
           </a:xfrm>
           <a:prstGeom prst="chevron">
@@ -6463,7 +6463,7 @@
         </p:nvSpPr>
         <p:spPr>
           <a:xfrm>
-            <a:off x="4495800" y="3514725"/>
+            <a:off x="4495800" y="3609975"/>
             <a:ext cx="3028950" cy="800100"/>
           </a:xfrm>
           <a:prstGeom prst="rect">
@@ -6502,7 +6502,7 @@
         </p:nvSpPr>
         <p:spPr>
           <a:xfrm>
-            <a:off x="4229100" y="4467225"/>
+            <a:off x="4229100" y="4562475"/>
             <a:ext cx="3714750" cy="1333500"/>
           </a:xfrm>
           <a:prstGeom prst="roundRect">
@@ -6529,7 +6529,7 @@
         </p:nvSpPr>
         <p:spPr>
           <a:xfrm>
-            <a:off x="4229100" y="4467225"/>
+            <a:off x="4229100" y="4562475"/>
             <a:ext cx="47625" cy="1333500"/>
           </a:xfrm>
           <a:prstGeom prst="rect">
@@ -6554,7 +6554,7 @@
         </p:nvSpPr>
         <p:spPr>
           <a:xfrm>
-            <a:off x="4362450" y="4562475"/>
+            <a:off x="4362450" y="4657725"/>
             <a:ext cx="3486150" cy="1143000"/>
           </a:xfrm>
           <a:prstGeom prst="rect">
@@ -6593,7 +6593,7 @@
         </p:nvSpPr>
         <p:spPr>
           <a:xfrm>
-            <a:off x="8058150" y="3514725"/>
+            <a:off x="8058150" y="3609975"/>
             <a:ext cx="3714750" cy="800100"/>
           </a:xfrm>
           <a:prstGeom prst="chevron">
@@ -6618,7 +6618,7 @@
         </p:nvSpPr>
         <p:spPr>
           <a:xfrm>
-            <a:off x="8324850" y="3514725"/>
+            <a:off x="8324850" y="3609975"/>
             <a:ext cx="3028950" cy="800100"/>
           </a:xfrm>
           <a:prstGeom prst="rect">
@@ -6657,7 +6657,7 @@
         </p:nvSpPr>
         <p:spPr>
           <a:xfrm>
-            <a:off x="8058150" y="4467225"/>
+            <a:off x="8058150" y="4562475"/>
             <a:ext cx="3714750" cy="1333500"/>
           </a:xfrm>
           <a:prstGeom prst="roundRect">
@@ -6684,7 +6684,7 @@
         </p:nvSpPr>
         <p:spPr>
           <a:xfrm>
-            <a:off x="8058150" y="4467225"/>
+            <a:off x="8058150" y="4562475"/>
             <a:ext cx="47625" cy="1333500"/>
           </a:xfrm>
           <a:prstGeom prst="rect">
@@ -6709,7 +6709,7 @@
         </p:nvSpPr>
         <p:spPr>
           <a:xfrm>
-            <a:off x="8191500" y="4562475"/>
+            <a:off x="8191500" y="4657725"/>
             <a:ext cx="3486150" cy="1143000"/>
           </a:xfrm>
           <a:prstGeom prst="rect">
@@ -6811,7 +6811,7 @@
         <p:spPr>
           <a:xfrm>
             <a:off x="400050" y="247650"/>
-            <a:ext cx="10839450" cy="381000"/>
+            <a:ext cx="10839450" cy="428625"/>
           </a:xfrm>
           <a:prstGeom prst="rect">
             <a:avLst/>
@@ -6827,7 +6827,7 @@
               <a:buNone/>
             </a:pPr>
             <a:r>
-              <a:rPr lang="en-US" sz="3000" b="1" dirty="0">
+              <a:rPr lang="en-US" sz="3200" b="1" dirty="0">
                 <a:solidFill>
                   <a:srgbClr val="EAEAEA"/>
                 </a:solidFill>
@@ -6837,7 +6837,7 @@
               </a:rPr>
               <a:t>Revenue concentration still favors NA</a:t>
             </a:r>
-            <a:endParaRPr lang="en-US" sz="3000" dirty="0"/>
+            <a:endParaRPr lang="en-US" sz="3200" dirty="0"/>
           </a:p>
         </p:txBody>
       </p:sp>
@@ -6849,8 +6849,8 @@
         </p:nvSpPr>
         <p:spPr>
           <a:xfrm>
-            <a:off x="400050" y="800100"/>
-            <a:ext cx="10648950" cy="266700"/>
+            <a:off x="400050" y="942975"/>
+            <a:ext cx="10648950" cy="285750"/>
           </a:xfrm>
           <a:prstGeom prst="rect">
             <a:avLst/>
@@ -6966,7 +6966,7 @@
         </p:nvSpPr>
         <p:spPr>
           <a:xfrm>
-            <a:off x="400050" y="1304925"/>
+            <a:off x="400050" y="1628775"/>
             <a:ext cx="66675" cy="66675"/>
           </a:xfrm>
           <a:prstGeom prst="roundRect">
@@ -6993,17 +6993,17 @@
         </p:nvSpPr>
         <p:spPr>
           <a:xfrm>
-            <a:off x="590550" y="1219200"/>
-            <a:ext cx="5048250" cy="342900"/>
-          </a:xfrm>
-          <a:prstGeom prst="rect">
-            <a:avLst/>
-          </a:prstGeom>
-          <a:noFill/>
-          <a:ln/>
-        </p:spPr>
-        <p:txBody>
-          <a:bodyPr wrap="square" lIns="0" tIns="0" rIns="0" bIns="0" rtlCol="0" anchor="t"/>
+            <a:off x="590550" y="1457325"/>
+            <a:ext cx="5048250" cy="419100"/>
+          </a:xfrm>
+          <a:prstGeom prst="rect">
+            <a:avLst/>
+          </a:prstGeom>
+          <a:noFill/>
+          <a:ln/>
+        </p:spPr>
+        <p:txBody>
+          <a:bodyPr wrap="square" lIns="0" tIns="0" rIns="0" bIns="0" rtlCol="0" anchor="ctr"/>
           <a:lstStyle/>
           <a:p>
             <a:pPr algn="l" indent="0" marL="0">
@@ -7032,7 +7032,7 @@
         </p:nvSpPr>
         <p:spPr>
           <a:xfrm>
-            <a:off x="400050" y="1838325"/>
+            <a:off x="400050" y="2085975"/>
             <a:ext cx="66675" cy="66675"/>
           </a:xfrm>
           <a:prstGeom prst="roundRect">
@@ -7059,17 +7059,17 @@
         </p:nvSpPr>
         <p:spPr>
           <a:xfrm>
-            <a:off x="590550" y="1752600"/>
-            <a:ext cx="5048250" cy="342900"/>
-          </a:xfrm>
-          <a:prstGeom prst="rect">
-            <a:avLst/>
-          </a:prstGeom>
-          <a:noFill/>
-          <a:ln/>
-        </p:spPr>
-        <p:txBody>
-          <a:bodyPr wrap="square" lIns="0" tIns="0" rIns="0" bIns="0" rtlCol="0" anchor="t"/>
+            <a:off x="590550" y="1914525"/>
+            <a:ext cx="5048250" cy="419100"/>
+          </a:xfrm>
+          <a:prstGeom prst="rect">
+            <a:avLst/>
+          </a:prstGeom>
+          <a:noFill/>
+          <a:ln/>
+        </p:spPr>
+        <p:txBody>
+          <a:bodyPr wrap="square" lIns="0" tIns="0" rIns="0" bIns="0" rtlCol="0" anchor="ctr"/>
           <a:lstStyle/>
           <a:p>
             <a:pPr algn="l" indent="0" marL="0">
@@ -7098,7 +7098,7 @@
         </p:nvSpPr>
         <p:spPr>
           <a:xfrm>
-            <a:off x="400050" y="2371725"/>
+            <a:off x="400050" y="2543175"/>
             <a:ext cx="66675" cy="66675"/>
           </a:xfrm>
           <a:prstGeom prst="roundRect">
@@ -7125,17 +7125,17 @@
         </p:nvSpPr>
         <p:spPr>
           <a:xfrm>
-            <a:off x="590550" y="2286000"/>
-            <a:ext cx="5048250" cy="342900"/>
-          </a:xfrm>
-          <a:prstGeom prst="rect">
-            <a:avLst/>
-          </a:prstGeom>
-          <a:noFill/>
-          <a:ln/>
-        </p:spPr>
-        <p:txBody>
-          <a:bodyPr wrap="square" lIns="0" tIns="0" rIns="0" bIns="0" rtlCol="0" anchor="t"/>
+            <a:off x="590550" y="2371725"/>
+            <a:ext cx="5048250" cy="419100"/>
+          </a:xfrm>
+          <a:prstGeom prst="rect">
+            <a:avLst/>
+          </a:prstGeom>
+          <a:noFill/>
+          <a:ln/>
+        </p:spPr>
+        <p:txBody>
+          <a:bodyPr wrap="square" lIns="0" tIns="0" rIns="0" bIns="0" rtlCol="0" anchor="ctr"/>
           <a:lstStyle/>
           <a:p>
             <a:pPr algn="l" indent="0" marL="0">
@@ -7164,12 +7164,12 @@
         </p:nvSpPr>
         <p:spPr>
           <a:xfrm>
-            <a:off x="5943600" y="1219200"/>
-            <a:ext cx="5848350" cy="5105400"/>
+            <a:off x="5943600" y="1457325"/>
+            <a:ext cx="5848350" cy="4867275"/>
           </a:xfrm>
           <a:prstGeom prst="roundRect">
             <a:avLst>
-              <a:gd name="adj" fmla="val 1791"/>
+              <a:gd name="adj" fmla="val 1879"/>
             </a:avLst>
           </a:prstGeom>
           <a:solidFill>
@@ -7199,7 +7199,7 @@
         </p:blipFill>
         <p:spPr>
           <a:xfrm>
-            <a:off x="6096000" y="2514600"/>
+            <a:off x="6096000" y="2628900"/>
             <a:ext cx="5543550" cy="2524125"/>
           </a:xfrm>
           <a:prstGeom prst="rect">
@@ -7278,7 +7278,7 @@
         <p:spPr>
           <a:xfrm>
             <a:off x="400050" y="247650"/>
-            <a:ext cx="10839450" cy="381000"/>
+            <a:ext cx="10839450" cy="428625"/>
           </a:xfrm>
           <a:prstGeom prst="rect">
             <a:avLst/>
@@ -7294,7 +7294,7 @@
               <a:buNone/>
             </a:pPr>
             <a:r>
-              <a:rPr lang="en-US" sz="3000" b="1" dirty="0">
+              <a:rPr lang="en-US" sz="3200" b="1" dirty="0">
                 <a:solidFill>
                   <a:srgbClr val="EAEAEA"/>
                 </a:solidFill>
@@ -7304,7 +7304,7 @@
               </a:rPr>
               <a:t>Portfolio is overweight in question marks</a:t>
             </a:r>
-            <a:endParaRPr lang="en-US" sz="3000" dirty="0"/>
+            <a:endParaRPr lang="en-US" sz="3200" dirty="0"/>
           </a:p>
         </p:txBody>
       </p:sp>
@@ -7316,8 +7316,8 @@
         </p:nvSpPr>
         <p:spPr>
           <a:xfrm>
-            <a:off x="400050" y="800100"/>
-            <a:ext cx="10648950" cy="266700"/>
+            <a:off x="400050" y="942975"/>
+            <a:ext cx="10648950" cy="285750"/>
           </a:xfrm>
           <a:prstGeom prst="rect">
             <a:avLst/>
@@ -7433,12 +7433,12 @@
         </p:nvSpPr>
         <p:spPr>
           <a:xfrm>
-            <a:off x="1543050" y="1333500"/>
-            <a:ext cx="4933950" cy="2171700"/>
+            <a:off x="1543050" y="1571625"/>
+            <a:ext cx="4933950" cy="1995487"/>
           </a:xfrm>
           <a:prstGeom prst="roundRect">
             <a:avLst>
-              <a:gd name="adj" fmla="val 4211"/>
+              <a:gd name="adj" fmla="val 4582"/>
             </a:avLst>
           </a:prstGeom>
           <a:solidFill>
@@ -7460,12 +7460,12 @@
         </p:nvSpPr>
         <p:spPr>
           <a:xfrm>
-            <a:off x="6572250" y="1333500"/>
-            <a:ext cx="4933950" cy="2171700"/>
+            <a:off x="6572250" y="1571625"/>
+            <a:ext cx="4933950" cy="1995487"/>
           </a:xfrm>
           <a:prstGeom prst="roundRect">
             <a:avLst>
-              <a:gd name="adj" fmla="val 4211"/>
+              <a:gd name="adj" fmla="val 4582"/>
             </a:avLst>
           </a:prstGeom>
           <a:solidFill>
@@ -7487,12 +7487,12 @@
         </p:nvSpPr>
         <p:spPr>
           <a:xfrm>
-            <a:off x="1543050" y="3600450"/>
-            <a:ext cx="4933950" cy="2171700"/>
+            <a:off x="1543050" y="3662362"/>
+            <a:ext cx="4933950" cy="1995487"/>
           </a:xfrm>
           <a:prstGeom prst="roundRect">
             <a:avLst>
-              <a:gd name="adj" fmla="val 4211"/>
+              <a:gd name="adj" fmla="val 4582"/>
             </a:avLst>
           </a:prstGeom>
           <a:solidFill>
@@ -7514,12 +7514,12 @@
         </p:nvSpPr>
         <p:spPr>
           <a:xfrm>
-            <a:off x="6572250" y="3600450"/>
-            <a:ext cx="4933950" cy="2171700"/>
+            <a:off x="6572250" y="3662362"/>
+            <a:ext cx="4933950" cy="1995487"/>
           </a:xfrm>
           <a:prstGeom prst="roundRect">
             <a:avLst>
-              <a:gd name="adj" fmla="val 4211"/>
+              <a:gd name="adj" fmla="val 4582"/>
             </a:avLst>
           </a:prstGeom>
           <a:solidFill>
@@ -7541,8 +7541,8 @@
         </p:nvSpPr>
         <p:spPr>
           <a:xfrm>
-            <a:off x="400050" y="1333500"/>
-            <a:ext cx="1047750" cy="266700"/>
+            <a:off x="400050" y="1571625"/>
+            <a:ext cx="1085850" cy="266700"/>
           </a:xfrm>
           <a:prstGeom prst="rect">
             <a:avLst/>
@@ -7580,8 +7580,8 @@
         </p:nvSpPr>
         <p:spPr>
           <a:xfrm>
-            <a:off x="1543050" y="5924550"/>
-            <a:ext cx="9963150" cy="266700"/>
+            <a:off x="1543050" y="5715000"/>
+            <a:ext cx="9963150" cy="228600"/>
           </a:xfrm>
           <a:prstGeom prst="rect">
             <a:avLst/>
@@ -7619,7 +7619,7 @@
         </p:nvSpPr>
         <p:spPr>
           <a:xfrm>
-            <a:off x="1695450" y="1466850"/>
+            <a:off x="1695450" y="1704975"/>
             <a:ext cx="4629150" cy="171450"/>
           </a:xfrm>
           <a:prstGeom prst="rect">
@@ -7658,7 +7658,7 @@
         </p:nvSpPr>
         <p:spPr>
           <a:xfrm>
-            <a:off x="6724650" y="1466850"/>
+            <a:off x="6724650" y="1704975"/>
             <a:ext cx="4629150" cy="171450"/>
           </a:xfrm>
           <a:prstGeom prst="rect">
@@ -7697,7 +7697,7 @@
         </p:nvSpPr>
         <p:spPr>
           <a:xfrm>
-            <a:off x="1695450" y="3733800"/>
+            <a:off x="1695450" y="3795713"/>
             <a:ext cx="4629150" cy="171450"/>
           </a:xfrm>
           <a:prstGeom prst="rect">
@@ -7736,7 +7736,7 @@
         </p:nvSpPr>
         <p:spPr>
           <a:xfrm>
-            <a:off x="6724650" y="3733800"/>
+            <a:off x="6724650" y="3795713"/>
             <a:ext cx="4629150" cy="171450"/>
           </a:xfrm>
           <a:prstGeom prst="rect">
@@ -7775,12 +7775,12 @@
         </p:nvSpPr>
         <p:spPr>
           <a:xfrm>
-            <a:off x="1695450" y="1752600"/>
-            <a:ext cx="4629150" cy="381000"/>
+            <a:off x="1657350" y="1990725"/>
+            <a:ext cx="4705350" cy="400050"/>
           </a:xfrm>
           <a:prstGeom prst="roundRect">
             <a:avLst>
-              <a:gd name="adj" fmla="val 24000"/>
+              <a:gd name="adj" fmla="val 22857"/>
             </a:avLst>
           </a:prstGeom>
           <a:solidFill>
@@ -7802,8 +7802,8 @@
         </p:nvSpPr>
         <p:spPr>
           <a:xfrm>
-            <a:off x="1809750" y="1752600"/>
-            <a:ext cx="4400550" cy="381000"/>
+            <a:off x="1752600" y="1990725"/>
+            <a:ext cx="4514850" cy="400050"/>
           </a:xfrm>
           <a:prstGeom prst="rect">
             <a:avLst/>
@@ -7819,7 +7819,7 @@
               <a:buNone/>
             </a:pPr>
             <a:r>
-              <a:rPr lang="en-US" sz="1600" b="1" dirty="0">
+              <a:rPr lang="en-US" sz="1500" b="1" dirty="0">
                 <a:solidFill>
                   <a:srgbClr val="EAEAEA"/>
                 </a:solidFill>
@@ -7829,7 +7829,7 @@
               </a:rPr>
               <a:t>Next-best offer</a:t>
             </a:r>
-            <a:endParaRPr lang="en-US" sz="1600" dirty="0"/>
+            <a:endParaRPr lang="en-US" sz="1500" dirty="0"/>
           </a:p>
         </p:txBody>
       </p:sp>
@@ -7841,12 +7841,12 @@
         </p:nvSpPr>
         <p:spPr>
           <a:xfrm>
-            <a:off x="6724650" y="1752600"/>
-            <a:ext cx="4629150" cy="381000"/>
+            <a:off x="6686550" y="1990725"/>
+            <a:ext cx="4705350" cy="400050"/>
           </a:xfrm>
           <a:prstGeom prst="roundRect">
             <a:avLst>
-              <a:gd name="adj" fmla="val 24000"/>
+              <a:gd name="adj" fmla="val 22857"/>
             </a:avLst>
           </a:prstGeom>
           <a:solidFill>
@@ -7868,8 +7868,8 @@
         </p:nvSpPr>
         <p:spPr>
           <a:xfrm>
-            <a:off x="6838950" y="1752600"/>
-            <a:ext cx="4400550" cy="381000"/>
+            <a:off x="6781800" y="1990725"/>
+            <a:ext cx="4514850" cy="400050"/>
           </a:xfrm>
           <a:prstGeom prst="rect">
             <a:avLst/>
@@ -7885,7 +7885,7 @@
               <a:buNone/>
             </a:pPr>
             <a:r>
-              <a:rPr lang="en-US" sz="1600" b="1" dirty="0">
+              <a:rPr lang="en-US" sz="1500" b="1" dirty="0">
                 <a:solidFill>
                   <a:srgbClr val="EAEAEA"/>
                 </a:solidFill>
@@ -7895,7 +7895,7 @@
               </a:rPr>
               <a:t>Reactivation</a:t>
             </a:r>
-            <a:endParaRPr lang="en-US" sz="1600" dirty="0"/>
+            <a:endParaRPr lang="en-US" sz="1500" dirty="0"/>
           </a:p>
         </p:txBody>
       </p:sp>
@@ -7907,12 +7907,12 @@
         </p:nvSpPr>
         <p:spPr>
           <a:xfrm>
-            <a:off x="1695450" y="4019550"/>
-            <a:ext cx="4629150" cy="381000"/>
+            <a:off x="1657350" y="4081463"/>
+            <a:ext cx="4705350" cy="400050"/>
           </a:xfrm>
           <a:prstGeom prst="roundRect">
             <a:avLst>
-              <a:gd name="adj" fmla="val 24000"/>
+              <a:gd name="adj" fmla="val 22857"/>
             </a:avLst>
           </a:prstGeom>
           <a:solidFill>
@@ -7934,8 +7934,8 @@
         </p:nvSpPr>
         <p:spPr>
           <a:xfrm>
-            <a:off x="1809750" y="4019550"/>
-            <a:ext cx="4400550" cy="381000"/>
+            <a:off x="1752600" y="4081463"/>
+            <a:ext cx="4514850" cy="400050"/>
           </a:xfrm>
           <a:prstGeom prst="rect">
             <a:avLst/>
@@ -7951,7 +7951,7 @@
               <a:buNone/>
             </a:pPr>
             <a:r>
-              <a:rPr lang="en-US" sz="1600" b="1" dirty="0">
+              <a:rPr lang="en-US" sz="1500" b="1" dirty="0">
                 <a:solidFill>
                   <a:srgbClr val="EAEAEA"/>
                 </a:solidFill>
@@ -7961,7 +7961,7 @@
               </a:rPr>
               <a:t>Vanity NPS dash</a:t>
             </a:r>
-            <a:endParaRPr lang="en-US" sz="1600" dirty="0"/>
+            <a:endParaRPr lang="en-US" sz="1500" dirty="0"/>
           </a:p>
         </p:txBody>
       </p:sp>
@@ -7973,12 +7973,12 @@
         </p:nvSpPr>
         <p:spPr>
           <a:xfrm>
-            <a:off x="6724650" y="4019550"/>
-            <a:ext cx="4629150" cy="381000"/>
+            <a:off x="6686550" y="4081463"/>
+            <a:ext cx="4705350" cy="400050"/>
           </a:xfrm>
           <a:prstGeom prst="roundRect">
             <a:avLst>
-              <a:gd name="adj" fmla="val 24000"/>
+              <a:gd name="adj" fmla="val 22857"/>
             </a:avLst>
           </a:prstGeom>
           <a:solidFill>
@@ -8000,8 +8000,8 @@
         </p:nvSpPr>
         <p:spPr>
           <a:xfrm>
-            <a:off x="6838950" y="4019550"/>
-            <a:ext cx="4400550" cy="381000"/>
+            <a:off x="6781800" y="4081463"/>
+            <a:ext cx="4514850" cy="400050"/>
           </a:xfrm>
           <a:prstGeom prst="rect">
             <a:avLst/>
@@ -8017,7 +8017,7 @@
               <a:buNone/>
             </a:pPr>
             <a:r>
-              <a:rPr lang="en-US" sz="1600" b="1" dirty="0">
+              <a:rPr lang="en-US" sz="1500" b="1" dirty="0">
                 <a:solidFill>
                   <a:srgbClr val="EAEAEA"/>
                 </a:solidFill>
@@ -8027,7 +8027,7 @@
               </a:rPr>
               <a:t>Taxonomy MVP</a:t>
             </a:r>
-            <a:endParaRPr lang="en-US" sz="1600" dirty="0"/>
+            <a:endParaRPr lang="en-US" sz="1500" dirty="0"/>
           </a:p>
         </p:txBody>
       </p:sp>
@@ -8102,7 +8102,7 @@
         <p:spPr>
           <a:xfrm>
             <a:off x="400050" y="247650"/>
-            <a:ext cx="10839450" cy="381000"/>
+            <a:ext cx="10839450" cy="428625"/>
           </a:xfrm>
           <a:prstGeom prst="rect">
             <a:avLst/>
@@ -8118,7 +8118,7 @@
               <a:buNone/>
             </a:pPr>
             <a:r>
-              <a:rPr lang="en-US" sz="3000" b="1" dirty="0">
+              <a:rPr lang="en-US" sz="3200" b="1" dirty="0">
                 <a:solidFill>
                   <a:srgbClr val="EAEAEA"/>
                 </a:solidFill>
@@ -8128,7 +8128,7 @@
               </a:rPr>
               <a:t>Sequence: prove the signal, scale decisions, then optimize</a:t>
             </a:r>
-            <a:endParaRPr lang="en-US" sz="3000" dirty="0"/>
+            <a:endParaRPr lang="en-US" sz="3200" dirty="0"/>
           </a:p>
         </p:txBody>
       </p:sp>
@@ -8140,8 +8140,8 @@
         </p:nvSpPr>
         <p:spPr>
           <a:xfrm>
-            <a:off x="400050" y="800100"/>
-            <a:ext cx="10648950" cy="266700"/>
+            <a:off x="400050" y="942975"/>
+            <a:ext cx="10648950" cy="285750"/>
           </a:xfrm>
           <a:prstGeom prst="rect">
             <a:avLst/>
@@ -8257,8 +8257,8 @@
         </p:nvSpPr>
         <p:spPr>
           <a:xfrm>
-            <a:off x="400050" y="1219200"/>
-            <a:ext cx="3667125" cy="4648200"/>
+            <a:off x="400050" y="1457325"/>
+            <a:ext cx="3667125" cy="4410075"/>
           </a:xfrm>
           <a:prstGeom prst="roundRect">
             <a:avLst>
@@ -8284,8 +8284,8 @@
         </p:nvSpPr>
         <p:spPr>
           <a:xfrm>
-            <a:off x="400050" y="1219200"/>
-            <a:ext cx="57150" cy="4648200"/>
+            <a:off x="400050" y="1457325"/>
+            <a:ext cx="57150" cy="4410075"/>
           </a:xfrm>
           <a:prstGeom prst="rect">
             <a:avLst/>
@@ -8309,7 +8309,7 @@
         </p:nvSpPr>
         <p:spPr>
           <a:xfrm>
-            <a:off x="571500" y="1390650"/>
+            <a:off x="571500" y="1628775"/>
             <a:ext cx="3324225" cy="171450"/>
           </a:xfrm>
           <a:prstGeom prst="rect">
@@ -8348,7 +8348,7 @@
         </p:nvSpPr>
         <p:spPr>
           <a:xfrm>
-            <a:off x="571500" y="1638300"/>
+            <a:off x="571500" y="1876425"/>
             <a:ext cx="3324225" cy="381000"/>
           </a:xfrm>
           <a:prstGeom prst="rect">
@@ -8387,7 +8387,7 @@
         </p:nvSpPr>
         <p:spPr>
           <a:xfrm>
-            <a:off x="571500" y="2057400"/>
+            <a:off x="571500" y="2295525"/>
             <a:ext cx="3324225" cy="457200"/>
           </a:xfrm>
           <a:prstGeom prst="rect">
@@ -8426,7 +8426,7 @@
         </p:nvSpPr>
         <p:spPr>
           <a:xfrm>
-            <a:off x="571500" y="2638425"/>
+            <a:off x="571500" y="2924175"/>
             <a:ext cx="66675" cy="66675"/>
           </a:xfrm>
           <a:prstGeom prst="roundRect">
@@ -8453,7 +8453,7 @@
         </p:nvSpPr>
         <p:spPr>
           <a:xfrm>
-            <a:off x="762000" y="2552700"/>
+            <a:off x="762000" y="2790825"/>
             <a:ext cx="3133725" cy="342900"/>
           </a:xfrm>
           <a:prstGeom prst="rect">
@@ -8463,7 +8463,7 @@
           <a:ln/>
         </p:spPr>
         <p:txBody>
-          <a:bodyPr wrap="square" lIns="0" tIns="0" rIns="0" bIns="0" rtlCol="0" anchor="t"/>
+          <a:bodyPr wrap="square" lIns="0" tIns="0" rIns="0" bIns="0" rtlCol="0" anchor="ctr"/>
           <a:lstStyle/>
           <a:p>
             <a:pPr algn="l" indent="0" marL="0">
@@ -8492,7 +8492,7 @@
         </p:nvSpPr>
         <p:spPr>
           <a:xfrm>
-            <a:off x="571500" y="2867025"/>
+            <a:off x="571500" y="3152775"/>
             <a:ext cx="66675" cy="66675"/>
           </a:xfrm>
           <a:prstGeom prst="roundRect">
@@ -8519,7 +8519,7 @@
         </p:nvSpPr>
         <p:spPr>
           <a:xfrm>
-            <a:off x="762000" y="2781300"/>
+            <a:off x="762000" y="3019425"/>
             <a:ext cx="3133725" cy="342900"/>
           </a:xfrm>
           <a:prstGeom prst="rect">
@@ -8529,7 +8529,7 @@
           <a:ln/>
         </p:spPr>
         <p:txBody>
-          <a:bodyPr wrap="square" lIns="0" tIns="0" rIns="0" bIns="0" rtlCol="0" anchor="t"/>
+          <a:bodyPr wrap="square" lIns="0" tIns="0" rIns="0" bIns="0" rtlCol="0" anchor="ctr"/>
           <a:lstStyle/>
           <a:p>
             <a:pPr algn="l" indent="0" marL="0">
@@ -8558,7 +8558,7 @@
         </p:nvSpPr>
         <p:spPr>
           <a:xfrm>
-            <a:off x="571500" y="3095625"/>
+            <a:off x="571500" y="3381375"/>
             <a:ext cx="66675" cy="66675"/>
           </a:xfrm>
           <a:prstGeom prst="roundRect">
@@ -8585,7 +8585,7 @@
         </p:nvSpPr>
         <p:spPr>
           <a:xfrm>
-            <a:off x="762000" y="3009900"/>
+            <a:off x="762000" y="3248025"/>
             <a:ext cx="3133725" cy="342900"/>
           </a:xfrm>
           <a:prstGeom prst="rect">
@@ -8595,7 +8595,7 @@
           <a:ln/>
         </p:spPr>
         <p:txBody>
-          <a:bodyPr wrap="square" lIns="0" tIns="0" rIns="0" bIns="0" rtlCol="0" anchor="t"/>
+          <a:bodyPr wrap="square" lIns="0" tIns="0" rIns="0" bIns="0" rtlCol="0" anchor="ctr"/>
           <a:lstStyle/>
           <a:p>
             <a:pPr algn="l" indent="0" marL="0">
@@ -8624,8 +8624,8 @@
         </p:nvSpPr>
         <p:spPr>
           <a:xfrm>
-            <a:off x="4257675" y="1219200"/>
-            <a:ext cx="3667125" cy="4648200"/>
+            <a:off x="4257675" y="1457325"/>
+            <a:ext cx="3667125" cy="4410075"/>
           </a:xfrm>
           <a:prstGeom prst="roundRect">
             <a:avLst>
@@ -8651,8 +8651,8 @@
         </p:nvSpPr>
         <p:spPr>
           <a:xfrm>
-            <a:off x="4257675" y="1219200"/>
-            <a:ext cx="57150" cy="4648200"/>
+            <a:off x="4257675" y="1457325"/>
+            <a:ext cx="57150" cy="4410075"/>
           </a:xfrm>
           <a:prstGeom prst="rect">
             <a:avLst/>
@@ -8676,7 +8676,7 @@
         </p:nvSpPr>
         <p:spPr>
           <a:xfrm>
-            <a:off x="4429125" y="1390650"/>
+            <a:off x="4429125" y="1628775"/>
             <a:ext cx="3324225" cy="171450"/>
           </a:xfrm>
           <a:prstGeom prst="rect">
@@ -8715,7 +8715,7 @@
         </p:nvSpPr>
         <p:spPr>
           <a:xfrm>
-            <a:off x="4429125" y="1638300"/>
+            <a:off x="4429125" y="1876425"/>
             <a:ext cx="3324225" cy="381000"/>
           </a:xfrm>
           <a:prstGeom prst="rect">
@@ -8754,7 +8754,7 @@
         </p:nvSpPr>
         <p:spPr>
           <a:xfrm>
-            <a:off x="4429125" y="2057400"/>
+            <a:off x="4429125" y="2295525"/>
             <a:ext cx="3324225" cy="457200"/>
           </a:xfrm>
           <a:prstGeom prst="rect">
@@ -8793,7 +8793,7 @@
         </p:nvSpPr>
         <p:spPr>
           <a:xfrm>
-            <a:off x="4429125" y="2638425"/>
+            <a:off x="4429125" y="2924175"/>
             <a:ext cx="66675" cy="66675"/>
           </a:xfrm>
           <a:prstGeom prst="roundRect">
@@ -8820,7 +8820,7 @@
         </p:nvSpPr>
         <p:spPr>
           <a:xfrm>
-            <a:off x="4619625" y="2552700"/>
+            <a:off x="4619625" y="2790825"/>
             <a:ext cx="3133725" cy="342900"/>
           </a:xfrm>
           <a:prstGeom prst="rect">
@@ -8830,7 +8830,7 @@
           <a:ln/>
         </p:spPr>
         <p:txBody>
-          <a:bodyPr wrap="square" lIns="0" tIns="0" rIns="0" bIns="0" rtlCol="0" anchor="t"/>
+          <a:bodyPr wrap="square" lIns="0" tIns="0" rIns="0" bIns="0" rtlCol="0" anchor="ctr"/>
           <a:lstStyle/>
           <a:p>
             <a:pPr algn="l" indent="0" marL="0">
@@ -8859,7 +8859,7 @@
         </p:nvSpPr>
         <p:spPr>
           <a:xfrm>
-            <a:off x="4429125" y="2867025"/>
+            <a:off x="4429125" y="3152775"/>
             <a:ext cx="66675" cy="66675"/>
           </a:xfrm>
           <a:prstGeom prst="roundRect">
@@ -8886,7 +8886,7 @@
         </p:nvSpPr>
         <p:spPr>
           <a:xfrm>
-            <a:off x="4619625" y="2781300"/>
+            <a:off x="4619625" y="3019425"/>
             <a:ext cx="3133725" cy="342900"/>
           </a:xfrm>
           <a:prstGeom prst="rect">
@@ -8896,7 +8896,7 @@
           <a:ln/>
         </p:spPr>
         <p:txBody>
-          <a:bodyPr wrap="square" lIns="0" tIns="0" rIns="0" bIns="0" rtlCol="0" anchor="t"/>
+          <a:bodyPr wrap="square" lIns="0" tIns="0" rIns="0" bIns="0" rtlCol="0" anchor="ctr"/>
           <a:lstStyle/>
           <a:p>
             <a:pPr algn="l" indent="0" marL="0">
@@ -8925,7 +8925,7 @@
         </p:nvSpPr>
         <p:spPr>
           <a:xfrm>
-            <a:off x="4429125" y="3095625"/>
+            <a:off x="4429125" y="3381375"/>
             <a:ext cx="66675" cy="66675"/>
           </a:xfrm>
           <a:prstGeom prst="roundRect">
@@ -8952,7 +8952,7 @@
         </p:nvSpPr>
         <p:spPr>
           <a:xfrm>
-            <a:off x="4619625" y="3009900"/>
+            <a:off x="4619625" y="3248025"/>
             <a:ext cx="3133725" cy="342900"/>
           </a:xfrm>
           <a:prstGeom prst="rect">
@@ -8962,7 +8962,7 @@
           <a:ln/>
         </p:spPr>
         <p:txBody>
-          <a:bodyPr wrap="square" lIns="0" tIns="0" rIns="0" bIns="0" rtlCol="0" anchor="t"/>
+          <a:bodyPr wrap="square" lIns="0" tIns="0" rIns="0" bIns="0" rtlCol="0" anchor="ctr"/>
           <a:lstStyle/>
           <a:p>
             <a:pPr algn="l" indent="0" marL="0">
@@ -8991,8 +8991,8 @@
         </p:nvSpPr>
         <p:spPr>
           <a:xfrm>
-            <a:off x="8115300" y="1219200"/>
-            <a:ext cx="3667125" cy="4648200"/>
+            <a:off x="8115300" y="1457325"/>
+            <a:ext cx="3667125" cy="4410075"/>
           </a:xfrm>
           <a:prstGeom prst="roundRect">
             <a:avLst>
@@ -9018,8 +9018,8 @@
         </p:nvSpPr>
         <p:spPr>
           <a:xfrm>
-            <a:off x="8115300" y="1219200"/>
-            <a:ext cx="57150" cy="4648200"/>
+            <a:off x="8115300" y="1457325"/>
+            <a:ext cx="57150" cy="4410075"/>
           </a:xfrm>
           <a:prstGeom prst="rect">
             <a:avLst/>
@@ -9043,7 +9043,7 @@
         </p:nvSpPr>
         <p:spPr>
           <a:xfrm>
-            <a:off x="8286750" y="1390650"/>
+            <a:off x="8286750" y="1628775"/>
             <a:ext cx="3324225" cy="171450"/>
           </a:xfrm>
           <a:prstGeom prst="rect">
@@ -9082,7 +9082,7 @@
         </p:nvSpPr>
         <p:spPr>
           <a:xfrm>
-            <a:off x="8286750" y="1638300"/>
+            <a:off x="8286750" y="1876425"/>
             <a:ext cx="3324225" cy="381000"/>
           </a:xfrm>
           <a:prstGeom prst="rect">
@@ -9121,7 +9121,7 @@
         </p:nvSpPr>
         <p:spPr>
           <a:xfrm>
-            <a:off x="8286750" y="2057400"/>
+            <a:off x="8286750" y="2295525"/>
             <a:ext cx="3324225" cy="457200"/>
           </a:xfrm>
           <a:prstGeom prst="rect">
@@ -9160,7 +9160,7 @@
         </p:nvSpPr>
         <p:spPr>
           <a:xfrm>
-            <a:off x="8286750" y="2638425"/>
+            <a:off x="8286750" y="2924175"/>
             <a:ext cx="66675" cy="66675"/>
           </a:xfrm>
           <a:prstGeom prst="roundRect">
@@ -9187,7 +9187,7 @@
         </p:nvSpPr>
         <p:spPr>
           <a:xfrm>
-            <a:off x="8477250" y="2552700"/>
+            <a:off x="8477250" y="2790825"/>
             <a:ext cx="3133725" cy="342900"/>
           </a:xfrm>
           <a:prstGeom prst="rect">
@@ -9197,7 +9197,7 @@
           <a:ln/>
         </p:spPr>
         <p:txBody>
-          <a:bodyPr wrap="square" lIns="0" tIns="0" rIns="0" bIns="0" rtlCol="0" anchor="t"/>
+          <a:bodyPr wrap="square" lIns="0" tIns="0" rIns="0" bIns="0" rtlCol="0" anchor="ctr"/>
           <a:lstStyle/>
           <a:p>
             <a:pPr algn="l" indent="0" marL="0">
@@ -9226,7 +9226,7 @@
         </p:nvSpPr>
         <p:spPr>
           <a:xfrm>
-            <a:off x="8286750" y="2867025"/>
+            <a:off x="8286750" y="3152775"/>
             <a:ext cx="66675" cy="66675"/>
           </a:xfrm>
           <a:prstGeom prst="roundRect">
@@ -9253,7 +9253,7 @@
         </p:nvSpPr>
         <p:spPr>
           <a:xfrm>
-            <a:off x="8477250" y="2781300"/>
+            <a:off x="8477250" y="3019425"/>
             <a:ext cx="3133725" cy="342900"/>
           </a:xfrm>
           <a:prstGeom prst="rect">
@@ -9263,7 +9263,7 @@
           <a:ln/>
         </p:spPr>
         <p:txBody>
-          <a:bodyPr wrap="square" lIns="0" tIns="0" rIns="0" bIns="0" rtlCol="0" anchor="t"/>
+          <a:bodyPr wrap="square" lIns="0" tIns="0" rIns="0" bIns="0" rtlCol="0" anchor="ctr"/>
           <a:lstStyle/>
           <a:p>
             <a:pPr algn="l" indent="0" marL="0">
@@ -9292,7 +9292,7 @@
         </p:nvSpPr>
         <p:spPr>
           <a:xfrm>
-            <a:off x="8286750" y="3095625"/>
+            <a:off x="8286750" y="3381375"/>
             <a:ext cx="66675" cy="66675"/>
           </a:xfrm>
           <a:prstGeom prst="roundRect">
@@ -9319,7 +9319,7 @@
         </p:nvSpPr>
         <p:spPr>
           <a:xfrm>
-            <a:off x="8477250" y="3009900"/>
+            <a:off x="8477250" y="3248025"/>
             <a:ext cx="3133725" cy="342900"/>
           </a:xfrm>
           <a:prstGeom prst="rect">
@@ -9329,7 +9329,7 @@
           <a:ln/>
         </p:spPr>
         <p:txBody>
-          <a:bodyPr wrap="square" lIns="0" tIns="0" rIns="0" bIns="0" rtlCol="0" anchor="t"/>
+          <a:bodyPr wrap="square" lIns="0" tIns="0" rIns="0" bIns="0" rtlCol="0" anchor="ctr"/>
           <a:lstStyle/>
           <a:p>
             <a:pPr algn="l" indent="0" marL="0">
@@ -9460,7 +9460,7 @@
         <p:spPr>
           <a:xfrm>
             <a:off x="400050" y="247650"/>
-            <a:ext cx="10839450" cy="381000"/>
+            <a:ext cx="10839450" cy="428625"/>
           </a:xfrm>
           <a:prstGeom prst="rect">
             <a:avLst/>
@@ -9476,7 +9476,7 @@
               <a:buNone/>
             </a:pPr>
             <a:r>
-              <a:rPr lang="en-US" sz="3000" b="1" dirty="0">
+              <a:rPr lang="en-US" sz="3200" b="1" dirty="0">
                 <a:solidFill>
                   <a:srgbClr val="EAEAEA"/>
                 </a:solidFill>
@@ -9486,7 +9486,7 @@
               </a:rPr>
               <a:t>Build a decision fabric—not one-off models</a:t>
             </a:r>
-            <a:endParaRPr lang="en-US" sz="3000" dirty="0"/>
+            <a:endParaRPr lang="en-US" sz="3200" dirty="0"/>
           </a:p>
         </p:txBody>
       </p:sp>
@@ -9498,8 +9498,8 @@
         </p:nvSpPr>
         <p:spPr>
           <a:xfrm>
-            <a:off x="400050" y="800100"/>
-            <a:ext cx="10648950" cy="266700"/>
+            <a:off x="400050" y="942975"/>
+            <a:ext cx="10648950" cy="285750"/>
           </a:xfrm>
           <a:prstGeom prst="rect">
             <a:avLst/>
@@ -9615,8 +9615,8 @@
         </p:nvSpPr>
         <p:spPr>
           <a:xfrm>
-            <a:off x="400050" y="1219200"/>
-            <a:ext cx="2714625" cy="5105400"/>
+            <a:off x="400050" y="1457325"/>
+            <a:ext cx="2714625" cy="4867275"/>
           </a:xfrm>
           <a:prstGeom prst="roundRect">
             <a:avLst>
@@ -9642,8 +9642,8 @@
         </p:nvSpPr>
         <p:spPr>
           <a:xfrm>
-            <a:off x="400050" y="1219200"/>
-            <a:ext cx="57150" cy="5105400"/>
+            <a:off x="400050" y="1457325"/>
+            <a:ext cx="57150" cy="4867275"/>
           </a:xfrm>
           <a:prstGeom prst="rect">
             <a:avLst/>
@@ -9667,7 +9667,7 @@
         </p:nvSpPr>
         <p:spPr>
           <a:xfrm>
-            <a:off x="571500" y="1371600"/>
+            <a:off x="571500" y="1571625"/>
             <a:ext cx="2371725" cy="171450"/>
           </a:xfrm>
           <a:prstGeom prst="rect">
@@ -9706,8 +9706,8 @@
         </p:nvSpPr>
         <p:spPr>
           <a:xfrm>
-            <a:off x="571500" y="1638300"/>
-            <a:ext cx="2371725" cy="4533900"/>
+            <a:off x="571500" y="1838325"/>
+            <a:ext cx="2371725" cy="4371975"/>
           </a:xfrm>
           <a:prstGeom prst="rect">
             <a:avLst/>
@@ -9745,7 +9745,7 @@
         </p:nvSpPr>
         <p:spPr>
           <a:xfrm>
-            <a:off x="3114675" y="3762375"/>
+            <a:off x="3114675" y="3881438"/>
             <a:ext cx="171450" cy="19050"/>
           </a:xfrm>
           <a:prstGeom prst="rect">
@@ -9770,8 +9770,8 @@
         </p:nvSpPr>
         <p:spPr>
           <a:xfrm>
-            <a:off x="3286125" y="1219200"/>
-            <a:ext cx="2714625" cy="5105400"/>
+            <a:off x="3286125" y="1457325"/>
+            <a:ext cx="2714625" cy="4867275"/>
           </a:xfrm>
           <a:prstGeom prst="roundRect">
             <a:avLst>
@@ -9797,8 +9797,8 @@
         </p:nvSpPr>
         <p:spPr>
           <a:xfrm>
-            <a:off x="3286125" y="1219200"/>
-            <a:ext cx="57150" cy="5105400"/>
+            <a:off x="3286125" y="1457325"/>
+            <a:ext cx="57150" cy="4867275"/>
           </a:xfrm>
           <a:prstGeom prst="rect">
             <a:avLst/>
@@ -9822,7 +9822,7 @@
         </p:nvSpPr>
         <p:spPr>
           <a:xfrm>
-            <a:off x="3457575" y="1371600"/>
+            <a:off x="3457575" y="1571625"/>
             <a:ext cx="2371725" cy="171450"/>
           </a:xfrm>
           <a:prstGeom prst="rect">
@@ -9861,8 +9861,8 @@
         </p:nvSpPr>
         <p:spPr>
           <a:xfrm>
-            <a:off x="3457575" y="1638300"/>
-            <a:ext cx="2371725" cy="4533900"/>
+            <a:off x="3457575" y="1838325"/>
+            <a:ext cx="2371725" cy="4371975"/>
           </a:xfrm>
           <a:prstGeom prst="rect">
             <a:avLst/>
@@ -9900,7 +9900,7 @@
         </p:nvSpPr>
         <p:spPr>
           <a:xfrm>
-            <a:off x="6000750" y="3762375"/>
+            <a:off x="6000750" y="3881438"/>
             <a:ext cx="171450" cy="19050"/>
           </a:xfrm>
           <a:prstGeom prst="rect">
@@ -9925,8 +9925,8 @@
         </p:nvSpPr>
         <p:spPr>
           <a:xfrm>
-            <a:off x="6172200" y="1219200"/>
-            <a:ext cx="2714625" cy="5105400"/>
+            <a:off x="6172200" y="1457325"/>
+            <a:ext cx="2714625" cy="4867275"/>
           </a:xfrm>
           <a:prstGeom prst="roundRect">
             <a:avLst>
@@ -9952,8 +9952,8 @@
         </p:nvSpPr>
         <p:spPr>
           <a:xfrm>
-            <a:off x="6172200" y="1219200"/>
-            <a:ext cx="57150" cy="5105400"/>
+            <a:off x="6172200" y="1457325"/>
+            <a:ext cx="57150" cy="4867275"/>
           </a:xfrm>
           <a:prstGeom prst="rect">
             <a:avLst/>
@@ -9977,7 +9977,7 @@
         </p:nvSpPr>
         <p:spPr>
           <a:xfrm>
-            <a:off x="6343650" y="1371600"/>
+            <a:off x="6343650" y="1571625"/>
             <a:ext cx="2371725" cy="171450"/>
           </a:xfrm>
           <a:prstGeom prst="rect">
@@ -10016,8 +10016,8 @@
         </p:nvSpPr>
         <p:spPr>
           <a:xfrm>
-            <a:off x="6343650" y="1638300"/>
-            <a:ext cx="2371725" cy="4533900"/>
+            <a:off x="6343650" y="1838325"/>
+            <a:ext cx="2371725" cy="4371975"/>
           </a:xfrm>
           <a:prstGeom prst="rect">
             <a:avLst/>
@@ -10055,7 +10055,7 @@
         </p:nvSpPr>
         <p:spPr>
           <a:xfrm>
-            <a:off x="8886825" y="3762375"/>
+            <a:off x="8886825" y="3881438"/>
             <a:ext cx="171450" cy="19050"/>
           </a:xfrm>
           <a:prstGeom prst="rect">
@@ -10080,8 +10080,8 @@
         </p:nvSpPr>
         <p:spPr>
           <a:xfrm>
-            <a:off x="9058275" y="1219200"/>
-            <a:ext cx="2714625" cy="5105400"/>
+            <a:off x="9058275" y="1457325"/>
+            <a:ext cx="2714625" cy="4867275"/>
           </a:xfrm>
           <a:prstGeom prst="roundRect">
             <a:avLst>
@@ -10107,8 +10107,8 @@
         </p:nvSpPr>
         <p:spPr>
           <a:xfrm>
-            <a:off x="9058275" y="1219200"/>
-            <a:ext cx="57150" cy="5105400"/>
+            <a:off x="9058275" y="1457325"/>
+            <a:ext cx="57150" cy="4867275"/>
           </a:xfrm>
           <a:prstGeom prst="rect">
             <a:avLst/>
@@ -10132,7 +10132,7 @@
         </p:nvSpPr>
         <p:spPr>
           <a:xfrm>
-            <a:off x="9229725" y="1371600"/>
+            <a:off x="9229725" y="1571625"/>
             <a:ext cx="2371725" cy="171450"/>
           </a:xfrm>
           <a:prstGeom prst="rect">
@@ -10171,8 +10171,8 @@
         </p:nvSpPr>
         <p:spPr>
           <a:xfrm>
-            <a:off x="9229725" y="1638300"/>
-            <a:ext cx="2371725" cy="4533900"/>
+            <a:off x="9229725" y="1838325"/>
+            <a:ext cx="2371725" cy="4371975"/>
           </a:xfrm>
           <a:prstGeom prst="rect">
             <a:avLst/>
@@ -10273,7 +10273,7 @@
         <p:spPr>
           <a:xfrm>
             <a:off x="400050" y="247650"/>
-            <a:ext cx="10839450" cy="381000"/>
+            <a:ext cx="10839450" cy="428625"/>
           </a:xfrm>
           <a:prstGeom prst="rect">
             <a:avLst/>
@@ -10289,7 +10289,7 @@
               <a:buNone/>
             </a:pPr>
             <a:r>
-              <a:rPr lang="en-US" sz="3000" b="1" dirty="0">
+              <a:rPr lang="en-US" sz="3200" b="1" dirty="0">
                 <a:solidFill>
                   <a:srgbClr val="EAEAEA"/>
                 </a:solidFill>
@@ -10299,7 +10299,7 @@
               </a:rPr>
               <a:t>Measure incremental value, not vanity engagement</a:t>
             </a:r>
-            <a:endParaRPr lang="en-US" sz="3000" dirty="0"/>
+            <a:endParaRPr lang="en-US" sz="3200" dirty="0"/>
           </a:p>
         </p:txBody>
       </p:sp>
@@ -10311,8 +10311,8 @@
         </p:nvSpPr>
         <p:spPr>
           <a:xfrm>
-            <a:off x="400050" y="800100"/>
-            <a:ext cx="10648950" cy="266700"/>
+            <a:off x="400050" y="942975"/>
+            <a:ext cx="10648950" cy="285750"/>
           </a:xfrm>
           <a:prstGeom prst="rect">
             <a:avLst/>
@@ -10428,12 +10428,12 @@
         </p:nvSpPr>
         <p:spPr>
           <a:xfrm>
-            <a:off x="400050" y="1219200"/>
-            <a:ext cx="11391900" cy="1638300"/>
+            <a:off x="400050" y="1457325"/>
+            <a:ext cx="11391900" cy="1552575"/>
           </a:xfrm>
           <a:prstGeom prst="roundRect">
             <a:avLst>
-              <a:gd name="adj" fmla="val 5581"/>
+              <a:gd name="adj" fmla="val 5890"/>
             </a:avLst>
           </a:prstGeom>
           <a:solidFill>
@@ -10455,8 +10455,8 @@
         </p:nvSpPr>
         <p:spPr>
           <a:xfrm>
-            <a:off x="400050" y="1219200"/>
-            <a:ext cx="114300" cy="1638300"/>
+            <a:off x="400050" y="1457325"/>
+            <a:ext cx="114300" cy="1552575"/>
           </a:xfrm>
           <a:prstGeom prst="rect">
             <a:avLst/>
@@ -10480,8 +10480,8 @@
         </p:nvSpPr>
         <p:spPr>
           <a:xfrm>
-            <a:off x="704850" y="1333500"/>
-            <a:ext cx="5126355" cy="266700"/>
+            <a:off x="666750" y="2124075"/>
+            <a:ext cx="4328922" cy="209550"/>
           </a:xfrm>
           <a:prstGeom prst="rect">
             <a:avLst/>
@@ -10497,7 +10497,7 @@
               <a:buNone/>
             </a:pPr>
             <a:r>
-              <a:rPr lang="en-US" sz="1800" b="1" dirty="0">
+              <a:rPr lang="en-US" sz="1600" b="1" dirty="0">
                 <a:solidFill>
                   <a:srgbClr val="EAEAEA"/>
                 </a:solidFill>
@@ -10507,7 +10507,7 @@
               </a:rPr>
               <a:t>USER</a:t>
             </a:r>
-            <a:endParaRPr lang="en-US" sz="1800" dirty="0"/>
+            <a:endParaRPr lang="en-US" sz="1600" dirty="0"/>
           </a:p>
         </p:txBody>
       </p:sp>
@@ -10519,8 +10519,8 @@
         </p:nvSpPr>
         <p:spPr>
           <a:xfrm>
-            <a:off x="5184648" y="1343025"/>
-            <a:ext cx="5923788" cy="266700"/>
+            <a:off x="4956810" y="2124075"/>
+            <a:ext cx="6265545" cy="209550"/>
           </a:xfrm>
           <a:prstGeom prst="rect">
             <a:avLst/>
@@ -10536,7 +10536,7 @@
               <a:buNone/>
             </a:pPr>
             <a:r>
-              <a:rPr lang="en-US" sz="1600" dirty="0">
+              <a:rPr lang="en-US" sz="1400" dirty="0">
                 <a:solidFill>
                   <a:srgbClr val="6C6C8A"/>
                 </a:solidFill>
@@ -10546,7 +10546,7 @@
               </a:rPr>
               <a:t>Relevance · trust · retention</a:t>
             </a:r>
-            <a:endParaRPr lang="en-US" sz="1600" dirty="0"/>
+            <a:endParaRPr lang="en-US" sz="1400" dirty="0"/>
           </a:p>
         </p:txBody>
       </p:sp>
@@ -10558,12 +10558,12 @@
         </p:nvSpPr>
         <p:spPr>
           <a:xfrm>
-            <a:off x="400050" y="2952750"/>
-            <a:ext cx="11391900" cy="1638300"/>
+            <a:off x="400050" y="3105150"/>
+            <a:ext cx="11391900" cy="1552575"/>
           </a:xfrm>
           <a:prstGeom prst="roundRect">
             <a:avLst>
-              <a:gd name="adj" fmla="val 5581"/>
+              <a:gd name="adj" fmla="val 5890"/>
             </a:avLst>
           </a:prstGeom>
           <a:solidFill>
@@ -10585,8 +10585,8 @@
         </p:nvSpPr>
         <p:spPr>
           <a:xfrm>
-            <a:off x="400050" y="2952750"/>
-            <a:ext cx="114300" cy="1638300"/>
+            <a:off x="400050" y="3105150"/>
+            <a:ext cx="114300" cy="1552575"/>
           </a:xfrm>
           <a:prstGeom prst="rect">
             <a:avLst/>
@@ -10610,8 +10610,8 @@
         </p:nvSpPr>
         <p:spPr>
           <a:xfrm>
-            <a:off x="704850" y="3067050"/>
-            <a:ext cx="5126355" cy="266700"/>
+            <a:off x="666750" y="3771900"/>
+            <a:ext cx="4328922" cy="209550"/>
           </a:xfrm>
           <a:prstGeom prst="rect">
             <a:avLst/>
@@ -10627,7 +10627,7 @@
               <a:buNone/>
             </a:pPr>
             <a:r>
-              <a:rPr lang="en-US" sz="1800" b="1" dirty="0">
+              <a:rPr lang="en-US" sz="1600" b="1" dirty="0">
                 <a:solidFill>
                   <a:srgbClr val="EAEAEA"/>
                 </a:solidFill>
@@ -10637,7 +10637,7 @@
               </a:rPr>
               <a:t>PRODUCT</a:t>
             </a:r>
-            <a:endParaRPr lang="en-US" sz="1800" dirty="0"/>
+            <a:endParaRPr lang="en-US" sz="1600" dirty="0"/>
           </a:p>
         </p:txBody>
       </p:sp>
@@ -10649,8 +10649,8 @@
         </p:nvSpPr>
         <p:spPr>
           <a:xfrm>
-            <a:off x="5184648" y="3076575"/>
-            <a:ext cx="5923788" cy="266700"/>
+            <a:off x="4956810" y="3771900"/>
+            <a:ext cx="6265545" cy="209550"/>
           </a:xfrm>
           <a:prstGeom prst="rect">
             <a:avLst/>
@@ -10666,7 +10666,7 @@
               <a:buNone/>
             </a:pPr>
             <a:r>
-              <a:rPr lang="en-US" sz="1600" dirty="0">
+              <a:rPr lang="en-US" sz="1400" dirty="0">
                 <a:solidFill>
                   <a:srgbClr val="6C6C8A"/>
                 </a:solidFill>
@@ -10676,7 +10676,7 @@
               </a:rPr>
               <a:t>Activation · conversion · time-to-value</a:t>
             </a:r>
-            <a:endParaRPr lang="en-US" sz="1600" dirty="0"/>
+            <a:endParaRPr lang="en-US" sz="1400" dirty="0"/>
           </a:p>
         </p:txBody>
       </p:sp>
@@ -10688,12 +10688,12 @@
         </p:nvSpPr>
         <p:spPr>
           <a:xfrm>
-            <a:off x="400050" y="4686300"/>
-            <a:ext cx="11391900" cy="1638300"/>
+            <a:off x="400050" y="4752975"/>
+            <a:ext cx="11391900" cy="1552575"/>
           </a:xfrm>
           <a:prstGeom prst="roundRect">
             <a:avLst>
-              <a:gd name="adj" fmla="val 5581"/>
+              <a:gd name="adj" fmla="val 5890"/>
             </a:avLst>
           </a:prstGeom>
           <a:solidFill>
@@ -10715,8 +10715,8 @@
         </p:nvSpPr>
         <p:spPr>
           <a:xfrm>
-            <a:off x="400050" y="4686300"/>
-            <a:ext cx="114300" cy="1638300"/>
+            <a:off x="400050" y="4752975"/>
+            <a:ext cx="114300" cy="1552575"/>
           </a:xfrm>
           <a:prstGeom prst="rect">
             <a:avLst/>
@@ -10740,8 +10740,8 @@
         </p:nvSpPr>
         <p:spPr>
           <a:xfrm>
-            <a:off x="704850" y="4800600"/>
-            <a:ext cx="5126355" cy="266700"/>
+            <a:off x="666750" y="5419725"/>
+            <a:ext cx="4328922" cy="209550"/>
           </a:xfrm>
           <a:prstGeom prst="rect">
             <a:avLst/>
@@ -10757,7 +10757,7 @@
               <a:buNone/>
             </a:pPr>
             <a:r>
-              <a:rPr lang="en-US" sz="1800" b="1" dirty="0">
+              <a:rPr lang="en-US" sz="1600" b="1" dirty="0">
                 <a:solidFill>
                   <a:srgbClr val="EAEAEA"/>
                 </a:solidFill>
@@ -10767,7 +10767,7 @@
               </a:rPr>
               <a:t>COMMERCIAL</a:t>
             </a:r>
-            <a:endParaRPr lang="en-US" sz="1800" dirty="0"/>
+            <a:endParaRPr lang="en-US" sz="1600" dirty="0"/>
           </a:p>
         </p:txBody>
       </p:sp>
@@ -10779,8 +10779,8 @@
         </p:nvSpPr>
         <p:spPr>
           <a:xfrm>
-            <a:off x="5184648" y="4810125"/>
-            <a:ext cx="5923788" cy="266700"/>
+            <a:off x="4956810" y="5419725"/>
+            <a:ext cx="6265545" cy="209550"/>
           </a:xfrm>
           <a:prstGeom prst="rect">
             <a:avLst/>
@@ -10796,7 +10796,7 @@
               <a:buNone/>
             </a:pPr>
             <a:r>
-              <a:rPr lang="en-US" sz="1600" dirty="0">
+              <a:rPr lang="en-US" sz="1400" dirty="0">
                 <a:solidFill>
                   <a:srgbClr val="6C6C8A"/>
                 </a:solidFill>
@@ -10806,7 +10806,7 @@
               </a:rPr>
               <a:t>Incremental revenue · margin · LTV</a:t>
             </a:r>
-            <a:endParaRPr lang="en-US" sz="1600" dirty="0"/>
+            <a:endParaRPr lang="en-US" sz="1400" dirty="0"/>
           </a:p>
         </p:txBody>
       </p:sp>
@@ -10881,7 +10881,7 @@
         <p:spPr>
           <a:xfrm>
             <a:off x="400050" y="247650"/>
-            <a:ext cx="10839450" cy="381000"/>
+            <a:ext cx="10839450" cy="428625"/>
           </a:xfrm>
           <a:prstGeom prst="rect">
             <a:avLst/>
@@ -10897,7 +10897,7 @@
               <a:buNone/>
             </a:pPr>
             <a:r>
-              <a:rPr lang="en-US" sz="3000" b="1" dirty="0">
+              <a:rPr lang="en-US" sz="3200" b="1" dirty="0">
                 <a:solidFill>
                   <a:srgbClr val="EAEAEA"/>
                 </a:solidFill>
@@ -10907,7 +10907,7 @@
               </a:rPr>
               <a:t>Always-on learning loop</a:t>
             </a:r>
-            <a:endParaRPr lang="en-US" sz="3000" dirty="0"/>
+            <a:endParaRPr lang="en-US" sz="3200" dirty="0"/>
           </a:p>
         </p:txBody>
       </p:sp>
@@ -10997,12 +10997,12 @@
         </p:nvSpPr>
         <p:spPr>
           <a:xfrm>
-            <a:off x="400050" y="781050"/>
-            <a:ext cx="5600700" cy="2676525"/>
+            <a:off x="400050" y="904875"/>
+            <a:ext cx="5600700" cy="2609850"/>
           </a:xfrm>
           <a:prstGeom prst="roundRect">
             <a:avLst>
-              <a:gd name="adj" fmla="val 3416"/>
+              <a:gd name="adj" fmla="val 3504"/>
             </a:avLst>
           </a:prstGeom>
           <a:solidFill>
@@ -11024,8 +11024,8 @@
         </p:nvSpPr>
         <p:spPr>
           <a:xfrm>
-            <a:off x="400050" y="781050"/>
-            <a:ext cx="57150" cy="2676525"/>
+            <a:off x="400050" y="904875"/>
+            <a:ext cx="57150" cy="2609850"/>
           </a:xfrm>
           <a:prstGeom prst="rect">
             <a:avLst/>
@@ -11049,7 +11049,7 @@
         </p:nvSpPr>
         <p:spPr>
           <a:xfrm>
-            <a:off x="571500" y="933450"/>
+            <a:off x="571500" y="1019175"/>
             <a:ext cx="5257800" cy="171450"/>
           </a:xfrm>
           <a:prstGeom prst="rect">
@@ -11088,8 +11088,8 @@
         </p:nvSpPr>
         <p:spPr>
           <a:xfrm>
-            <a:off x="571500" y="1200150"/>
-            <a:ext cx="5257800" cy="2105025"/>
+            <a:off x="571500" y="1285875"/>
+            <a:ext cx="5257800" cy="2114550"/>
           </a:xfrm>
           <a:prstGeom prst="rect">
             <a:avLst/>
@@ -11105,7 +11105,7 @@
               <a:buNone/>
             </a:pPr>
             <a:r>
-              <a:rPr lang="en-US" sz="1800" b="1" dirty="0">
+              <a:rPr lang="en-US" sz="1600" b="1" dirty="0">
                 <a:solidFill>
                   <a:srgbClr val="EAEAEA"/>
                 </a:solidFill>
@@ -11115,7 +11115,7 @@
               </a:rPr>
               <a:t>Instrument decisions</a:t>
             </a:r>
-            <a:endParaRPr lang="en-US" sz="1800" dirty="0"/>
+            <a:endParaRPr lang="en-US" sz="1600" dirty="0"/>
           </a:p>
         </p:txBody>
       </p:sp>
@@ -11127,12 +11127,12 @@
         </p:nvSpPr>
         <p:spPr>
           <a:xfrm>
-            <a:off x="6191250" y="781050"/>
-            <a:ext cx="5600700" cy="2676525"/>
+            <a:off x="6191250" y="904875"/>
+            <a:ext cx="5600700" cy="2609850"/>
           </a:xfrm>
           <a:prstGeom prst="roundRect">
             <a:avLst>
-              <a:gd name="adj" fmla="val 3416"/>
+              <a:gd name="adj" fmla="val 3504"/>
             </a:avLst>
           </a:prstGeom>
           <a:solidFill>
@@ -11154,8 +11154,8 @@
         </p:nvSpPr>
         <p:spPr>
           <a:xfrm>
-            <a:off x="6191250" y="781050"/>
-            <a:ext cx="57150" cy="2676525"/>
+            <a:off x="6191250" y="904875"/>
+            <a:ext cx="57150" cy="2609850"/>
           </a:xfrm>
           <a:prstGeom prst="rect">
             <a:avLst/>
@@ -11179,7 +11179,7 @@
         </p:nvSpPr>
         <p:spPr>
           <a:xfrm>
-            <a:off x="6362700" y="933450"/>
+            <a:off x="6362700" y="1019175"/>
             <a:ext cx="5257800" cy="171450"/>
           </a:xfrm>
           <a:prstGeom prst="rect">
@@ -11218,8 +11218,8 @@
         </p:nvSpPr>
         <p:spPr>
           <a:xfrm>
-            <a:off x="6362700" y="1200150"/>
-            <a:ext cx="5257800" cy="2105025"/>
+            <a:off x="6362700" y="1285875"/>
+            <a:ext cx="5257800" cy="2114550"/>
           </a:xfrm>
           <a:prstGeom prst="rect">
             <a:avLst/>
@@ -11235,7 +11235,7 @@
               <a:buNone/>
             </a:pPr>
             <a:r>
-              <a:rPr lang="en-US" sz="1800" b="1" dirty="0">
+              <a:rPr lang="en-US" sz="1600" b="1" dirty="0">
                 <a:solidFill>
                   <a:srgbClr val="EAEAEA"/>
                 </a:solidFill>
@@ -11245,7 +11245,7 @@
               </a:rPr>
               <a:t>Design the holdout</a:t>
             </a:r>
-            <a:endParaRPr lang="en-US" sz="1800" dirty="0"/>
+            <a:endParaRPr lang="en-US" sz="1600" dirty="0"/>
           </a:p>
         </p:txBody>
       </p:sp>
@@ -11257,12 +11257,12 @@
         </p:nvSpPr>
         <p:spPr>
           <a:xfrm>
-            <a:off x="400050" y="3648075"/>
-            <a:ext cx="5600700" cy="2676525"/>
+            <a:off x="400050" y="3705225"/>
+            <a:ext cx="5600700" cy="2609850"/>
           </a:xfrm>
           <a:prstGeom prst="roundRect">
             <a:avLst>
-              <a:gd name="adj" fmla="val 3416"/>
+              <a:gd name="adj" fmla="val 3504"/>
             </a:avLst>
           </a:prstGeom>
           <a:solidFill>
@@ -11284,8 +11284,8 @@
         </p:nvSpPr>
         <p:spPr>
           <a:xfrm>
-            <a:off x="400050" y="3648075"/>
-            <a:ext cx="57150" cy="2676525"/>
+            <a:off x="400050" y="3705225"/>
+            <a:ext cx="57150" cy="2609850"/>
           </a:xfrm>
           <a:prstGeom prst="rect">
             <a:avLst/>
@@ -11309,7 +11309,7 @@
         </p:nvSpPr>
         <p:spPr>
           <a:xfrm>
-            <a:off x="571500" y="3800475"/>
+            <a:off x="571500" y="3819525"/>
             <a:ext cx="5257800" cy="171450"/>
           </a:xfrm>
           <a:prstGeom prst="rect">
@@ -11348,8 +11348,8 @@
         </p:nvSpPr>
         <p:spPr>
           <a:xfrm>
-            <a:off x="571500" y="4067175"/>
-            <a:ext cx="5257800" cy="2105025"/>
+            <a:off x="571500" y="4086225"/>
+            <a:ext cx="5257800" cy="2114550"/>
           </a:xfrm>
           <a:prstGeom prst="rect">
             <a:avLst/>
@@ -11365,7 +11365,7 @@
               <a:buNone/>
             </a:pPr>
             <a:r>
-              <a:rPr lang="en-US" sz="1800" b="1" dirty="0">
+              <a:rPr lang="en-US" sz="1600" b="1" dirty="0">
                 <a:solidFill>
                   <a:srgbClr val="EAEAEA"/>
                 </a:solidFill>
@@ -11375,7 +11375,7 @@
               </a:rPr>
               <a:t>Ship the treatment</a:t>
             </a:r>
-            <a:endParaRPr lang="en-US" sz="1800" dirty="0"/>
+            <a:endParaRPr lang="en-US" sz="1600" dirty="0"/>
           </a:p>
         </p:txBody>
       </p:sp>
@@ -11387,12 +11387,12 @@
         </p:nvSpPr>
         <p:spPr>
           <a:xfrm>
-            <a:off x="6191250" y="3648075"/>
-            <a:ext cx="5600700" cy="2676525"/>
+            <a:off x="6191250" y="3705225"/>
+            <a:ext cx="5600700" cy="2609850"/>
           </a:xfrm>
           <a:prstGeom prst="roundRect">
             <a:avLst>
-              <a:gd name="adj" fmla="val 3416"/>
+              <a:gd name="adj" fmla="val 3504"/>
             </a:avLst>
           </a:prstGeom>
           <a:solidFill>
@@ -11414,8 +11414,8 @@
         </p:nvSpPr>
         <p:spPr>
           <a:xfrm>
-            <a:off x="6191250" y="3648075"/>
-            <a:ext cx="57150" cy="2676525"/>
+            <a:off x="6191250" y="3705225"/>
+            <a:ext cx="57150" cy="2609850"/>
           </a:xfrm>
           <a:prstGeom prst="rect">
             <a:avLst/>
@@ -11439,7 +11439,7 @@
         </p:nvSpPr>
         <p:spPr>
           <a:xfrm>
-            <a:off x="6362700" y="3800475"/>
+            <a:off x="6362700" y="3819525"/>
             <a:ext cx="5257800" cy="171450"/>
           </a:xfrm>
           <a:prstGeom prst="rect">
@@ -11478,8 +11478,8 @@
         </p:nvSpPr>
         <p:spPr>
           <a:xfrm>
-            <a:off x="6362700" y="4067175"/>
-            <a:ext cx="5257800" cy="2105025"/>
+            <a:off x="6362700" y="4086225"/>
+            <a:ext cx="5257800" cy="2114550"/>
           </a:xfrm>
           <a:prstGeom prst="rect">
             <a:avLst/>
@@ -11495,7 +11495,7 @@
               <a:buNone/>
             </a:pPr>
             <a:r>
-              <a:rPr lang="en-US" sz="1800" b="1" dirty="0">
+              <a:rPr lang="en-US" sz="1600" b="1" dirty="0">
                 <a:solidFill>
                   <a:srgbClr val="EAEAEA"/>
                 </a:solidFill>
@@ -11505,7 +11505,7 @@
               </a:rPr>
               <a:t>Promote or stop</a:t>
             </a:r>
-            <a:endParaRPr lang="en-US" sz="1800" dirty="0"/>
+            <a:endParaRPr lang="en-US" sz="1600" dirty="0"/>
           </a:p>
         </p:txBody>
       </p:sp>
@@ -11580,7 +11580,7 @@
         <p:spPr>
           <a:xfrm>
             <a:off x="400050" y="247650"/>
-            <a:ext cx="10839450" cy="381000"/>
+            <a:ext cx="10839450" cy="428625"/>
           </a:xfrm>
           <a:prstGeom prst="rect">
             <a:avLst/>
@@ -11596,7 +11596,7 @@
               <a:buNone/>
             </a:pPr>
             <a:r>
-              <a:rPr lang="en-US" sz="3000" b="1" dirty="0">
+              <a:rPr lang="en-US" sz="3200" b="1" dirty="0">
                 <a:solidFill>
                   <a:srgbClr val="EAEAEA"/>
                 </a:solidFill>
@@ -11606,7 +11606,7 @@
               </a:rPr>
               <a:t>Revenue trend</a:t>
             </a:r>
-            <a:endParaRPr lang="en-US" sz="3000" dirty="0"/>
+            <a:endParaRPr lang="en-US" sz="3200" dirty="0"/>
           </a:p>
         </p:txBody>
       </p:sp>
@@ -11849,7 +11849,7 @@
         <p:spPr>
           <a:xfrm>
             <a:off x="400050" y="247650"/>
-            <a:ext cx="10839450" cy="381000"/>
+            <a:ext cx="10839450" cy="428625"/>
           </a:xfrm>
           <a:prstGeom prst="rect">
             <a:avLst/>
@@ -11865,7 +11865,7 @@
               <a:buNone/>
             </a:pPr>
             <a:r>
-              <a:rPr lang="en-US" sz="3000" b="1" dirty="0">
+              <a:rPr lang="en-US" sz="3200" b="1" dirty="0">
                 <a:solidFill>
                   <a:srgbClr val="EAEAEA"/>
                 </a:solidFill>
@@ -11875,7 +11875,7 @@
               </a:rPr>
               <a:t>Capability stack</a:t>
             </a:r>
-            <a:endParaRPr lang="en-US" sz="3000" dirty="0"/>
+            <a:endParaRPr lang="en-US" sz="3200" dirty="0"/>
           </a:p>
         </p:txBody>
       </p:sp>
@@ -11965,12 +11965,12 @@
         </p:nvSpPr>
         <p:spPr>
           <a:xfrm>
-            <a:off x="3176826" y="781050"/>
-            <a:ext cx="5838349" cy="1323975"/>
+            <a:off x="3176826" y="904875"/>
+            <a:ext cx="5838349" cy="1295400"/>
           </a:xfrm>
           <a:prstGeom prst="roundRect">
             <a:avLst>
-              <a:gd name="adj" fmla="val 6906"/>
+              <a:gd name="adj" fmla="val 7059"/>
             </a:avLst>
           </a:prstGeom>
           <a:solidFill>
@@ -11992,7 +11992,7 @@
         </p:nvSpPr>
         <p:spPr>
           <a:xfrm>
-            <a:off x="3291126" y="1347788"/>
+            <a:off x="3291126" y="1457325"/>
             <a:ext cx="5609749" cy="209550"/>
           </a:xfrm>
           <a:prstGeom prst="rect">
@@ -12031,12 +12031,12 @@
         </p:nvSpPr>
         <p:spPr>
           <a:xfrm>
-            <a:off x="2251234" y="2181225"/>
-            <a:ext cx="7689533" cy="1323975"/>
+            <a:off x="2251234" y="2276475"/>
+            <a:ext cx="7689533" cy="1295400"/>
           </a:xfrm>
           <a:prstGeom prst="roundRect">
             <a:avLst>
-              <a:gd name="adj" fmla="val 6906"/>
+              <a:gd name="adj" fmla="val 7059"/>
             </a:avLst>
           </a:prstGeom>
           <a:solidFill>
@@ -12058,7 +12058,7 @@
         </p:nvSpPr>
         <p:spPr>
           <a:xfrm>
-            <a:off x="2365534" y="2747963"/>
+            <a:off x="2365534" y="2828925"/>
             <a:ext cx="7460933" cy="209550"/>
           </a:xfrm>
           <a:prstGeom prst="rect">
@@ -12097,12 +12097,12 @@
         </p:nvSpPr>
         <p:spPr>
           <a:xfrm>
-            <a:off x="1325642" y="3581400"/>
-            <a:ext cx="9540716" cy="1323975"/>
+            <a:off x="1325642" y="3648075"/>
+            <a:ext cx="9540716" cy="1295400"/>
           </a:xfrm>
           <a:prstGeom prst="roundRect">
             <a:avLst>
-              <a:gd name="adj" fmla="val 6906"/>
+              <a:gd name="adj" fmla="val 7059"/>
             </a:avLst>
           </a:prstGeom>
           <a:solidFill>
@@ -12124,7 +12124,7 @@
         </p:nvSpPr>
         <p:spPr>
           <a:xfrm>
-            <a:off x="1439942" y="4148137"/>
+            <a:off x="1439942" y="4200525"/>
             <a:ext cx="9312116" cy="209550"/>
           </a:xfrm>
           <a:prstGeom prst="rect">
@@ -12163,12 +12163,12 @@
         </p:nvSpPr>
         <p:spPr>
           <a:xfrm>
-            <a:off x="400050" y="4981575"/>
-            <a:ext cx="11391900" cy="1323975"/>
+            <a:off x="400050" y="5019675"/>
+            <a:ext cx="11391900" cy="1295400"/>
           </a:xfrm>
           <a:prstGeom prst="roundRect">
             <a:avLst>
-              <a:gd name="adj" fmla="val 6906"/>
+              <a:gd name="adj" fmla="val 7059"/>
             </a:avLst>
           </a:prstGeom>
           <a:solidFill>
@@ -12190,7 +12190,7 @@
         </p:nvSpPr>
         <p:spPr>
           <a:xfrm>
-            <a:off x="514350" y="5548313"/>
+            <a:off x="514350" y="5572125"/>
             <a:ext cx="11163300" cy="209550"/>
           </a:xfrm>
           <a:prstGeom prst="rect">
@@ -12292,7 +12292,7 @@
         <p:spPr>
           <a:xfrm>
             <a:off x="400050" y="247650"/>
-            <a:ext cx="10839450" cy="381000"/>
+            <a:ext cx="10839450" cy="428625"/>
           </a:xfrm>
           <a:prstGeom prst="rect">
             <a:avLst/>
@@ -12308,7 +12308,7 @@
               <a:buNone/>
             </a:pPr>
             <a:r>
-              <a:rPr lang="en-US" sz="3000" b="1" dirty="0">
+              <a:rPr lang="en-US" sz="3200" b="1" dirty="0">
                 <a:solidFill>
                   <a:srgbClr val="EAEAEA"/>
                 </a:solidFill>
@@ -12318,7 +12318,7 @@
               </a:rPr>
               <a:t>90-day launch milestones</a:t>
             </a:r>
-            <a:endParaRPr lang="en-US" sz="3000" dirty="0"/>
+            <a:endParaRPr lang="en-US" sz="3200" dirty="0"/>
           </a:p>
         </p:txBody>
       </p:sp>
@@ -12408,7 +12408,7 @@
         </p:nvSpPr>
         <p:spPr>
           <a:xfrm>
-            <a:off x="590550" y="2105025"/>
+            <a:off x="590550" y="2228850"/>
             <a:ext cx="11010900" cy="19050"/>
           </a:xfrm>
           <a:prstGeom prst="rect">
@@ -12433,7 +12433,7 @@
         </p:nvSpPr>
         <p:spPr>
           <a:xfrm>
-            <a:off x="1728788" y="2019300"/>
+            <a:off x="1728788" y="2143125"/>
             <a:ext cx="190500" cy="190500"/>
           </a:xfrm>
           <a:prstGeom prst="roundRect">
@@ -12460,7 +12460,7 @@
         </p:nvSpPr>
         <p:spPr>
           <a:xfrm>
-            <a:off x="476250" y="2381250"/>
+            <a:off x="476250" y="2505075"/>
             <a:ext cx="2695575" cy="171450"/>
           </a:xfrm>
           <a:prstGeom prst="rect">
@@ -12499,7 +12499,7 @@
         </p:nvSpPr>
         <p:spPr>
           <a:xfrm>
-            <a:off x="476250" y="2628900"/>
+            <a:off x="476250" y="2752725"/>
             <a:ext cx="2695575" cy="666750"/>
           </a:xfrm>
           <a:prstGeom prst="rect">
@@ -12538,7 +12538,7 @@
         </p:nvSpPr>
         <p:spPr>
           <a:xfrm>
-            <a:off x="4576763" y="2019300"/>
+            <a:off x="4576763" y="2143125"/>
             <a:ext cx="190500" cy="190500"/>
           </a:xfrm>
           <a:prstGeom prst="roundRect">
@@ -12565,7 +12565,7 @@
         </p:nvSpPr>
         <p:spPr>
           <a:xfrm>
-            <a:off x="3324225" y="2381250"/>
+            <a:off x="3324225" y="2505075"/>
             <a:ext cx="2695575" cy="171450"/>
           </a:xfrm>
           <a:prstGeom prst="rect">
@@ -12604,7 +12604,7 @@
         </p:nvSpPr>
         <p:spPr>
           <a:xfrm>
-            <a:off x="3324225" y="2628900"/>
+            <a:off x="3324225" y="2752725"/>
             <a:ext cx="2695575" cy="666750"/>
           </a:xfrm>
           <a:prstGeom prst="rect">
@@ -12643,7 +12643,7 @@
         </p:nvSpPr>
         <p:spPr>
           <a:xfrm>
-            <a:off x="7424737" y="2019300"/>
+            <a:off x="7424737" y="2143125"/>
             <a:ext cx="190500" cy="190500"/>
           </a:xfrm>
           <a:prstGeom prst="roundRect">
@@ -12670,7 +12670,7 @@
         </p:nvSpPr>
         <p:spPr>
           <a:xfrm>
-            <a:off x="6172200" y="2381250"/>
+            <a:off x="6172200" y="2505075"/>
             <a:ext cx="2695575" cy="171450"/>
           </a:xfrm>
           <a:prstGeom prst="rect">
@@ -12709,7 +12709,7 @@
         </p:nvSpPr>
         <p:spPr>
           <a:xfrm>
-            <a:off x="6172200" y="2628900"/>
+            <a:off x="6172200" y="2752725"/>
             <a:ext cx="2695575" cy="666750"/>
           </a:xfrm>
           <a:prstGeom prst="rect">
@@ -12748,7 +12748,7 @@
         </p:nvSpPr>
         <p:spPr>
           <a:xfrm>
-            <a:off x="10272713" y="2019300"/>
+            <a:off x="10272713" y="2143125"/>
             <a:ext cx="190500" cy="190500"/>
           </a:xfrm>
           <a:prstGeom prst="roundRect">
@@ -12775,7 +12775,7 @@
         </p:nvSpPr>
         <p:spPr>
           <a:xfrm>
-            <a:off x="9020175" y="2381250"/>
+            <a:off x="9020175" y="2505075"/>
             <a:ext cx="2695575" cy="171450"/>
           </a:xfrm>
           <a:prstGeom prst="rect">
@@ -12814,7 +12814,7 @@
         </p:nvSpPr>
         <p:spPr>
           <a:xfrm>
-            <a:off x="9020175" y="2628900"/>
+            <a:off x="9020175" y="2752725"/>
             <a:ext cx="2695575" cy="666750"/>
           </a:xfrm>
           <a:prstGeom prst="rect">
@@ -12916,7 +12916,7 @@
         <p:spPr>
           <a:xfrm>
             <a:off x="400050" y="247650"/>
-            <a:ext cx="10839450" cy="381000"/>
+            <a:ext cx="10839450" cy="428625"/>
           </a:xfrm>
           <a:prstGeom prst="rect">
             <a:avLst/>
@@ -12932,7 +12932,7 @@
               <a:buNone/>
             </a:pPr>
             <a:r>
-              <a:rPr lang="en-US" sz="3000" b="1" dirty="0">
+              <a:rPr lang="en-US" sz="3200" b="1" dirty="0">
                 <a:solidFill>
                   <a:srgbClr val="EAEAEA"/>
                 </a:solidFill>
@@ -12942,7 +12942,7 @@
               </a:rPr>
               <a:t>From signal to scaled decision</a:t>
             </a:r>
-            <a:endParaRPr lang="en-US" sz="3000" dirty="0"/>
+            <a:endParaRPr lang="en-US" sz="3200" dirty="0"/>
           </a:p>
         </p:txBody>
       </p:sp>
@@ -13032,12 +13032,12 @@
         </p:nvSpPr>
         <p:spPr>
           <a:xfrm>
-            <a:off x="400050" y="781050"/>
-            <a:ext cx="11391900" cy="1314450"/>
+            <a:off x="400050" y="904875"/>
+            <a:ext cx="11391900" cy="1276350"/>
           </a:xfrm>
           <a:prstGeom prst="roundRect">
             <a:avLst>
-              <a:gd name="adj" fmla="val 6957"/>
+              <a:gd name="adj" fmla="val 7164"/>
             </a:avLst>
           </a:prstGeom>
           <a:solidFill>
@@ -13059,7 +13059,7 @@
         </p:nvSpPr>
         <p:spPr>
           <a:xfrm>
-            <a:off x="552450" y="1333500"/>
+            <a:off x="552450" y="1438275"/>
             <a:ext cx="11087100" cy="228600"/>
           </a:xfrm>
           <a:prstGeom prst="rect">
@@ -13098,12 +13098,12 @@
         </p:nvSpPr>
         <p:spPr>
           <a:xfrm>
-            <a:off x="969645" y="2190750"/>
-            <a:ext cx="10252710" cy="1314450"/>
+            <a:off x="969645" y="2276475"/>
+            <a:ext cx="10252710" cy="1276350"/>
           </a:xfrm>
           <a:prstGeom prst="roundRect">
             <a:avLst>
-              <a:gd name="adj" fmla="val 6957"/>
+              <a:gd name="adj" fmla="val 7164"/>
             </a:avLst>
           </a:prstGeom>
           <a:solidFill>
@@ -13125,7 +13125,7 @@
         </p:nvSpPr>
         <p:spPr>
           <a:xfrm>
-            <a:off x="1122045" y="2743200"/>
+            <a:off x="1122045" y="2809875"/>
             <a:ext cx="9947910" cy="228600"/>
           </a:xfrm>
           <a:prstGeom prst="rect">
@@ -13164,12 +13164,12 @@
         </p:nvSpPr>
         <p:spPr>
           <a:xfrm>
-            <a:off x="1539240" y="3600450"/>
-            <a:ext cx="9113520" cy="1314450"/>
+            <a:off x="1539240" y="3648075"/>
+            <a:ext cx="9113520" cy="1276350"/>
           </a:xfrm>
           <a:prstGeom prst="roundRect">
             <a:avLst>
-              <a:gd name="adj" fmla="val 6957"/>
+              <a:gd name="adj" fmla="val 7164"/>
             </a:avLst>
           </a:prstGeom>
           <a:solidFill>
@@ -13191,7 +13191,7 @@
         </p:nvSpPr>
         <p:spPr>
           <a:xfrm>
-            <a:off x="1691640" y="4152900"/>
+            <a:off x="1691640" y="4181475"/>
             <a:ext cx="8808720" cy="228600"/>
           </a:xfrm>
           <a:prstGeom prst="rect">
@@ -13230,12 +13230,12 @@
         </p:nvSpPr>
         <p:spPr>
           <a:xfrm>
-            <a:off x="2108835" y="5010150"/>
-            <a:ext cx="7974330" cy="1314450"/>
+            <a:off x="2108835" y="5019675"/>
+            <a:ext cx="7974330" cy="1276350"/>
           </a:xfrm>
           <a:prstGeom prst="roundRect">
             <a:avLst>
-              <a:gd name="adj" fmla="val 6957"/>
+              <a:gd name="adj" fmla="val 7164"/>
             </a:avLst>
           </a:prstGeom>
           <a:solidFill>
@@ -13257,7 +13257,7 @@
         </p:nvSpPr>
         <p:spPr>
           <a:xfrm>
-            <a:off x="2261235" y="5562600"/>
+            <a:off x="2261235" y="5553075"/>
             <a:ext cx="7669530" cy="228600"/>
           </a:xfrm>
           <a:prstGeom prst="rect">
@@ -13359,7 +13359,7 @@
         <p:spPr>
           <a:xfrm>
             <a:off x="400050" y="247650"/>
-            <a:ext cx="10839450" cy="381000"/>
+            <a:ext cx="10839450" cy="428625"/>
           </a:xfrm>
           <a:prstGeom prst="rect">
             <a:avLst/>
@@ -13375,7 +13375,7 @@
               <a:buNone/>
             </a:pPr>
             <a:r>
-              <a:rPr lang="en-US" sz="3000" b="1" dirty="0">
+              <a:rPr lang="en-US" sz="3200" b="1" dirty="0">
                 <a:solidFill>
                   <a:srgbClr val="EAEAEA"/>
                 </a:solidFill>
@@ -13385,7 +13385,7 @@
               </a:rPr>
               <a:t>Ownership for the 90-day squad</a:t>
             </a:r>
-            <a:endParaRPr lang="en-US" sz="3000" dirty="0"/>
+            <a:endParaRPr lang="en-US" sz="3200" dirty="0"/>
           </a:p>
         </p:txBody>
       </p:sp>
@@ -13475,7 +13475,7 @@
         </p:nvSpPr>
         <p:spPr>
           <a:xfrm>
-            <a:off x="4045458" y="857250"/>
+            <a:off x="4045458" y="981075"/>
             <a:ext cx="4101084" cy="838200"/>
           </a:xfrm>
           <a:prstGeom prst="roundRect">
@@ -13502,7 +13502,7 @@
         </p:nvSpPr>
         <p:spPr>
           <a:xfrm>
-            <a:off x="4045458" y="857250"/>
+            <a:off x="4045458" y="981075"/>
             <a:ext cx="57150" cy="838200"/>
           </a:xfrm>
           <a:prstGeom prst="rect">
@@ -13527,7 +13527,7 @@
         </p:nvSpPr>
         <p:spPr>
           <a:xfrm>
-            <a:off x="4216908" y="1009650"/>
+            <a:off x="4216908" y="1095375"/>
             <a:ext cx="3758184" cy="171450"/>
           </a:xfrm>
           <a:prstGeom prst="rect">
@@ -13566,7 +13566,7 @@
         </p:nvSpPr>
         <p:spPr>
           <a:xfrm>
-            <a:off x="6081713" y="1695450"/>
+            <a:off x="6081713" y="1819275"/>
             <a:ext cx="28575" cy="342900"/>
           </a:xfrm>
           <a:prstGeom prst="rect">
@@ -13591,7 +13591,7 @@
         </p:nvSpPr>
         <p:spPr>
           <a:xfrm>
-            <a:off x="1752600" y="2024062"/>
+            <a:off x="1752600" y="2147888"/>
             <a:ext cx="8686800" cy="28575"/>
           </a:xfrm>
           <a:prstGeom prst="rect">
@@ -13616,7 +13616,7 @@
         </p:nvSpPr>
         <p:spPr>
           <a:xfrm>
-            <a:off x="1738313" y="2038350"/>
+            <a:off x="1738313" y="2162175"/>
             <a:ext cx="28575" cy="342900"/>
           </a:xfrm>
           <a:prstGeom prst="rect">
@@ -13641,7 +13641,7 @@
         </p:nvSpPr>
         <p:spPr>
           <a:xfrm>
-            <a:off x="4633913" y="2038350"/>
+            <a:off x="4633913" y="2162175"/>
             <a:ext cx="28575" cy="342900"/>
           </a:xfrm>
           <a:prstGeom prst="rect">
@@ -13666,7 +13666,7 @@
         </p:nvSpPr>
         <p:spPr>
           <a:xfrm>
-            <a:off x="7529513" y="2038350"/>
+            <a:off x="7529513" y="2162175"/>
             <a:ext cx="28575" cy="342900"/>
           </a:xfrm>
           <a:prstGeom prst="rect">
@@ -13691,7 +13691,7 @@
         </p:nvSpPr>
         <p:spPr>
           <a:xfrm>
-            <a:off x="10425113" y="2038350"/>
+            <a:off x="10425113" y="2162175"/>
             <a:ext cx="28575" cy="342900"/>
           </a:xfrm>
           <a:prstGeom prst="rect">
@@ -13716,7 +13716,7 @@
         </p:nvSpPr>
         <p:spPr>
           <a:xfrm>
-            <a:off x="400050" y="2381250"/>
+            <a:off x="400050" y="2505075"/>
             <a:ext cx="2705100" cy="1047750"/>
           </a:xfrm>
           <a:prstGeom prst="roundRect">
@@ -13743,7 +13743,7 @@
         </p:nvSpPr>
         <p:spPr>
           <a:xfrm>
-            <a:off x="400050" y="2381250"/>
+            <a:off x="400050" y="2505075"/>
             <a:ext cx="57150" cy="1047750"/>
           </a:xfrm>
           <a:prstGeom prst="rect">
@@ -13768,7 +13768,7 @@
         </p:nvSpPr>
         <p:spPr>
           <a:xfrm>
-            <a:off x="571500" y="2533650"/>
+            <a:off x="571500" y="2619375"/>
             <a:ext cx="2362200" cy="171450"/>
           </a:xfrm>
           <a:prstGeom prst="rect">
@@ -13807,7 +13807,7 @@
         </p:nvSpPr>
         <p:spPr>
           <a:xfrm>
-            <a:off x="3295650" y="2381250"/>
+            <a:off x="3295650" y="2505075"/>
             <a:ext cx="2705100" cy="1047750"/>
           </a:xfrm>
           <a:prstGeom prst="roundRect">
@@ -13834,7 +13834,7 @@
         </p:nvSpPr>
         <p:spPr>
           <a:xfrm>
-            <a:off x="3295650" y="2381250"/>
+            <a:off x="3295650" y="2505075"/>
             <a:ext cx="57150" cy="1047750"/>
           </a:xfrm>
           <a:prstGeom prst="rect">
@@ -13859,7 +13859,7 @@
         </p:nvSpPr>
         <p:spPr>
           <a:xfrm>
-            <a:off x="3467100" y="2533650"/>
+            <a:off x="3467100" y="2619375"/>
             <a:ext cx="2362200" cy="171450"/>
           </a:xfrm>
           <a:prstGeom prst="rect">
@@ -13898,7 +13898,7 @@
         </p:nvSpPr>
         <p:spPr>
           <a:xfrm>
-            <a:off x="6191250" y="2381250"/>
+            <a:off x="6191250" y="2505075"/>
             <a:ext cx="2705100" cy="1047750"/>
           </a:xfrm>
           <a:prstGeom prst="roundRect">
@@ -13925,7 +13925,7 @@
         </p:nvSpPr>
         <p:spPr>
           <a:xfrm>
-            <a:off x="6191250" y="2381250"/>
+            <a:off x="6191250" y="2505075"/>
             <a:ext cx="57150" cy="1047750"/>
           </a:xfrm>
           <a:prstGeom prst="rect">
@@ -13950,7 +13950,7 @@
         </p:nvSpPr>
         <p:spPr>
           <a:xfrm>
-            <a:off x="6362700" y="2533650"/>
+            <a:off x="6362700" y="2619375"/>
             <a:ext cx="2362200" cy="171450"/>
           </a:xfrm>
           <a:prstGeom prst="rect">
@@ -13989,7 +13989,7 @@
         </p:nvSpPr>
         <p:spPr>
           <a:xfrm>
-            <a:off x="9086850" y="2381250"/>
+            <a:off x="9086850" y="2505075"/>
             <a:ext cx="2705100" cy="1047750"/>
           </a:xfrm>
           <a:prstGeom prst="roundRect">
@@ -14016,7 +14016,7 @@
         </p:nvSpPr>
         <p:spPr>
           <a:xfrm>
-            <a:off x="9086850" y="2381250"/>
+            <a:off x="9086850" y="2505075"/>
             <a:ext cx="57150" cy="1047750"/>
           </a:xfrm>
           <a:prstGeom prst="rect">
@@ -14041,7 +14041,7 @@
         </p:nvSpPr>
         <p:spPr>
           <a:xfrm>
-            <a:off x="9258300" y="2533650"/>
+            <a:off x="9258300" y="2619375"/>
             <a:ext cx="2362200" cy="171450"/>
           </a:xfrm>
           <a:prstGeom prst="rect">
@@ -14143,7 +14143,7 @@
         <p:spPr>
           <a:xfrm>
             <a:off x="400050" y="247650"/>
-            <a:ext cx="10839450" cy="381000"/>
+            <a:ext cx="10839450" cy="428625"/>
           </a:xfrm>
           <a:prstGeom prst="rect">
             <a:avLst/>
@@ -14159,7 +14159,7 @@
               <a:buNone/>
             </a:pPr>
             <a:r>
-              <a:rPr lang="en-US" sz="3000" b="1" dirty="0">
+              <a:rPr lang="en-US" sz="3200" b="1" dirty="0">
                 <a:solidFill>
                   <a:srgbClr val="EAEAEA"/>
                 </a:solidFill>
@@ -14169,7 +14169,7 @@
               </a:rPr>
               <a:t>Impact × effort for the next backlog</a:t>
             </a:r>
-            <a:endParaRPr lang="en-US" sz="3000" dirty="0"/>
+            <a:endParaRPr lang="en-US" sz="3200" dirty="0"/>
           </a:p>
         </p:txBody>
       </p:sp>
@@ -14259,8 +14259,8 @@
         </p:nvSpPr>
         <p:spPr>
           <a:xfrm>
-            <a:off x="1352550" y="781050"/>
-            <a:ext cx="10058400" cy="5543550"/>
+            <a:off x="1352550" y="904875"/>
+            <a:ext cx="10058400" cy="5419725"/>
           </a:xfrm>
           <a:prstGeom prst="rect">
             <a:avLst/>
@@ -14284,8 +14284,8 @@
         </p:nvSpPr>
         <p:spPr>
           <a:xfrm>
-            <a:off x="4698206" y="781050"/>
-            <a:ext cx="14288" cy="5543550"/>
+            <a:off x="4698206" y="904875"/>
+            <a:ext cx="14288" cy="5419725"/>
           </a:xfrm>
           <a:prstGeom prst="rect">
             <a:avLst/>
@@ -14309,7 +14309,7 @@
         </p:nvSpPr>
         <p:spPr>
           <a:xfrm>
-            <a:off x="1352550" y="2621756"/>
+            <a:off x="1352550" y="2704306"/>
             <a:ext cx="10058400" cy="14288"/>
           </a:xfrm>
           <a:prstGeom prst="rect">
@@ -14334,8 +14334,8 @@
         </p:nvSpPr>
         <p:spPr>
           <a:xfrm>
-            <a:off x="8051006" y="781050"/>
-            <a:ext cx="14288" cy="5543550"/>
+            <a:off x="8051006" y="904875"/>
+            <a:ext cx="14288" cy="5419725"/>
           </a:xfrm>
           <a:prstGeom prst="rect">
             <a:avLst/>
@@ -14359,7 +14359,7 @@
         </p:nvSpPr>
         <p:spPr>
           <a:xfrm>
-            <a:off x="1352550" y="4469606"/>
+            <a:off x="1352550" y="4510881"/>
             <a:ext cx="10058400" cy="14288"/>
           </a:xfrm>
           <a:prstGeom prst="rect">
@@ -14384,7 +14384,7 @@
         </p:nvSpPr>
         <p:spPr>
           <a:xfrm>
-            <a:off x="2505075" y="1562100"/>
+            <a:off x="2505075" y="1665287"/>
             <a:ext cx="1047750" cy="285750"/>
           </a:xfrm>
           <a:prstGeom prst="roundRect">
@@ -14411,7 +14411,7 @@
         </p:nvSpPr>
         <p:spPr>
           <a:xfrm>
-            <a:off x="2581275" y="1619250"/>
+            <a:off x="2581275" y="1722437"/>
             <a:ext cx="895350" cy="171450"/>
           </a:xfrm>
           <a:prstGeom prst="rect">
@@ -14450,7 +14450,7 @@
         </p:nvSpPr>
         <p:spPr>
           <a:xfrm>
-            <a:off x="9210675" y="1562100"/>
+            <a:off x="9210675" y="1665287"/>
             <a:ext cx="1047750" cy="285750"/>
           </a:xfrm>
           <a:prstGeom prst="roundRect">
@@ -14477,7 +14477,7 @@
         </p:nvSpPr>
         <p:spPr>
           <a:xfrm>
-            <a:off x="9286875" y="1619250"/>
+            <a:off x="9286875" y="1722437"/>
             <a:ext cx="895350" cy="171450"/>
           </a:xfrm>
           <a:prstGeom prst="rect">
@@ -14516,7 +14516,7 @@
         </p:nvSpPr>
         <p:spPr>
           <a:xfrm>
-            <a:off x="5857875" y="3409950"/>
+            <a:off x="5857875" y="3471863"/>
             <a:ext cx="1047750" cy="285750"/>
           </a:xfrm>
           <a:prstGeom prst="roundRect">
@@ -14543,7 +14543,7 @@
         </p:nvSpPr>
         <p:spPr>
           <a:xfrm>
-            <a:off x="5934075" y="3467100"/>
+            <a:off x="5934075" y="3529013"/>
             <a:ext cx="895350" cy="171450"/>
           </a:xfrm>
           <a:prstGeom prst="rect">
@@ -14582,7 +14582,7 @@
         </p:nvSpPr>
         <p:spPr>
           <a:xfrm>
-            <a:off x="9210675" y="5257800"/>
+            <a:off x="9210675" y="5278438"/>
             <a:ext cx="1047750" cy="285750"/>
           </a:xfrm>
           <a:prstGeom prst="roundRect">
@@ -14609,7 +14609,7 @@
         </p:nvSpPr>
         <p:spPr>
           <a:xfrm>
-            <a:off x="9286875" y="5314950"/>
+            <a:off x="9286875" y="5335588"/>
             <a:ext cx="895350" cy="171450"/>
           </a:xfrm>
           <a:prstGeom prst="rect">
@@ -14711,7 +14711,7 @@
         <p:spPr>
           <a:xfrm>
             <a:off x="400050" y="247650"/>
-            <a:ext cx="10839450" cy="381000"/>
+            <a:ext cx="10839450" cy="428625"/>
           </a:xfrm>
           <a:prstGeom prst="rect">
             <a:avLst/>
@@ -14727,7 +14727,7 @@
               <a:buNone/>
             </a:pPr>
             <a:r>
-              <a:rPr lang="en-US" sz="3000" b="1" dirty="0">
+              <a:rPr lang="en-US" sz="3200" b="1" dirty="0">
                 <a:solidFill>
                   <a:srgbClr val="EAEAEA"/>
                 </a:solidFill>
@@ -14737,7 +14737,7 @@
               </a:rPr>
               <a:t>Why learning is slow today</a:t>
             </a:r>
-            <a:endParaRPr lang="en-US" sz="3000" dirty="0"/>
+            <a:endParaRPr lang="en-US" sz="3200" dirty="0"/>
           </a:p>
         </p:txBody>
       </p:sp>
@@ -14827,7 +14827,7 @@
         </p:nvSpPr>
         <p:spPr>
           <a:xfrm>
-            <a:off x="4387215" y="781050"/>
+            <a:off x="4387215" y="904875"/>
             <a:ext cx="3417570" cy="762000"/>
           </a:xfrm>
           <a:prstGeom prst="roundRect">
@@ -14854,7 +14854,7 @@
         </p:nvSpPr>
         <p:spPr>
           <a:xfrm>
-            <a:off x="4387215" y="781050"/>
+            <a:off x="4387215" y="904875"/>
             <a:ext cx="57150" cy="762000"/>
           </a:xfrm>
           <a:prstGeom prst="rect">
@@ -14879,7 +14879,7 @@
         </p:nvSpPr>
         <p:spPr>
           <a:xfrm>
-            <a:off x="4558665" y="933450"/>
+            <a:off x="4558665" y="1019175"/>
             <a:ext cx="3074670" cy="171450"/>
           </a:xfrm>
           <a:prstGeom prst="rect">
@@ -14918,7 +14918,7 @@
         </p:nvSpPr>
         <p:spPr>
           <a:xfrm flipH="1">
-            <a:off x="2238375" y="1543050"/>
+            <a:off x="2238375" y="1666875"/>
             <a:ext cx="3857625" cy="762000"/>
           </a:xfrm>
           <a:prstGeom prst="line">
@@ -14943,8 +14943,8 @@
         </p:nvSpPr>
         <p:spPr>
           <a:xfrm>
-            <a:off x="400050" y="2305050"/>
-            <a:ext cx="3676650" cy="4019550"/>
+            <a:off x="400050" y="2428875"/>
+            <a:ext cx="3676650" cy="3895725"/>
           </a:xfrm>
           <a:prstGeom prst="roundRect">
             <a:avLst>
@@ -14970,8 +14970,8 @@
         </p:nvSpPr>
         <p:spPr>
           <a:xfrm>
-            <a:off x="400050" y="2305050"/>
-            <a:ext cx="57150" cy="4019550"/>
+            <a:off x="400050" y="2428875"/>
+            <a:ext cx="57150" cy="3895725"/>
           </a:xfrm>
           <a:prstGeom prst="rect">
             <a:avLst/>
@@ -14995,7 +14995,7 @@
         </p:nvSpPr>
         <p:spPr>
           <a:xfrm>
-            <a:off x="571500" y="2457450"/>
+            <a:off x="571500" y="2543175"/>
             <a:ext cx="3333750" cy="171450"/>
           </a:xfrm>
           <a:prstGeom prst="rect">
@@ -15034,7 +15034,7 @@
         </p:nvSpPr>
         <p:spPr>
           <a:xfrm flipH="1">
-            <a:off x="6086475" y="1543050"/>
+            <a:off x="6086475" y="1666875"/>
             <a:ext cx="9525" cy="762000"/>
           </a:xfrm>
           <a:prstGeom prst="line">
@@ -15059,8 +15059,8 @@
         </p:nvSpPr>
         <p:spPr>
           <a:xfrm>
-            <a:off x="4248150" y="2305050"/>
-            <a:ext cx="3676650" cy="4019550"/>
+            <a:off x="4248150" y="2428875"/>
+            <a:ext cx="3676650" cy="3895725"/>
           </a:xfrm>
           <a:prstGeom prst="roundRect">
             <a:avLst>
@@ -15086,8 +15086,8 @@
         </p:nvSpPr>
         <p:spPr>
           <a:xfrm>
-            <a:off x="4248150" y="2305050"/>
-            <a:ext cx="57150" cy="4019550"/>
+            <a:off x="4248150" y="2428875"/>
+            <a:ext cx="57150" cy="3895725"/>
           </a:xfrm>
           <a:prstGeom prst="rect">
             <a:avLst/>
@@ -15111,7 +15111,7 @@
         </p:nvSpPr>
         <p:spPr>
           <a:xfrm>
-            <a:off x="4419600" y="2457450"/>
+            <a:off x="4419600" y="2543175"/>
             <a:ext cx="3333750" cy="171450"/>
           </a:xfrm>
           <a:prstGeom prst="rect">
@@ -15150,7 +15150,7 @@
         </p:nvSpPr>
         <p:spPr>
           <a:xfrm>
-            <a:off x="6096000" y="1543050"/>
+            <a:off x="6096000" y="1666875"/>
             <a:ext cx="3838575" cy="762000"/>
           </a:xfrm>
           <a:prstGeom prst="line">
@@ -15175,8 +15175,8 @@
         </p:nvSpPr>
         <p:spPr>
           <a:xfrm>
-            <a:off x="8096250" y="2305050"/>
-            <a:ext cx="3676650" cy="4019550"/>
+            <a:off x="8096250" y="2428875"/>
+            <a:ext cx="3676650" cy="3895725"/>
           </a:xfrm>
           <a:prstGeom prst="roundRect">
             <a:avLst>
@@ -15202,8 +15202,8 @@
         </p:nvSpPr>
         <p:spPr>
           <a:xfrm>
-            <a:off x="8096250" y="2305050"/>
-            <a:ext cx="57150" cy="4019550"/>
+            <a:off x="8096250" y="2428875"/>
+            <a:ext cx="57150" cy="3895725"/>
           </a:xfrm>
           <a:prstGeom prst="rect">
             <a:avLst/>
@@ -15227,7 +15227,7 @@
         </p:nvSpPr>
         <p:spPr>
           <a:xfrm>
-            <a:off x="8267700" y="2457450"/>
+            <a:off x="8267700" y="2543175"/>
             <a:ext cx="3333750" cy="171450"/>
           </a:xfrm>
           <a:prstGeom prst="rect">
@@ -15329,7 +15329,7 @@
         <p:spPr>
           <a:xfrm>
             <a:off x="400050" y="247650"/>
-            <a:ext cx="10839450" cy="381000"/>
+            <a:ext cx="10839450" cy="428625"/>
           </a:xfrm>
           <a:prstGeom prst="rect">
             <a:avLst/>
@@ -15345,7 +15345,7 @@
               <a:buNone/>
             </a:pPr>
             <a:r>
-              <a:rPr lang="en-US" sz="3000" b="1" dirty="0">
+              <a:rPr lang="en-US" sz="3200" b="1" dirty="0">
                 <a:solidFill>
                   <a:srgbClr val="EAEAEA"/>
                 </a:solidFill>
@@ -15355,7 +15355,7 @@
               </a:rPr>
               <a:t>From dashboard debt to decision system</a:t>
             </a:r>
-            <a:endParaRPr lang="en-US" sz="3000" dirty="0"/>
+            <a:endParaRPr lang="en-US" sz="3200" dirty="0"/>
           </a:p>
         </p:txBody>
       </p:sp>
@@ -15445,8 +15445,8 @@
         </p:nvSpPr>
         <p:spPr>
           <a:xfrm>
-            <a:off x="400050" y="781050"/>
-            <a:ext cx="3638550" cy="5543550"/>
+            <a:off x="400050" y="904875"/>
+            <a:ext cx="3638550" cy="5419725"/>
           </a:xfrm>
           <a:prstGeom prst="roundRect">
             <a:avLst>
@@ -15472,8 +15472,8 @@
         </p:nvSpPr>
         <p:spPr>
           <a:xfrm>
-            <a:off x="400050" y="781050"/>
-            <a:ext cx="57150" cy="5543550"/>
+            <a:off x="400050" y="904875"/>
+            <a:ext cx="57150" cy="5419725"/>
           </a:xfrm>
           <a:prstGeom prst="rect">
             <a:avLst/>
@@ -15497,7 +15497,7 @@
         </p:nvSpPr>
         <p:spPr>
           <a:xfrm>
-            <a:off x="571500" y="933450"/>
+            <a:off x="571500" y="1019175"/>
             <a:ext cx="3295650" cy="171450"/>
           </a:xfrm>
           <a:prstGeom prst="rect">
@@ -15536,7 +15536,7 @@
         </p:nvSpPr>
         <p:spPr>
           <a:xfrm>
-            <a:off x="4057650" y="3381375"/>
+            <a:off x="4057650" y="3443288"/>
             <a:ext cx="190500" cy="342900"/>
           </a:xfrm>
           <a:prstGeom prst="rect">
@@ -15575,8 +15575,8 @@
         </p:nvSpPr>
         <p:spPr>
           <a:xfrm>
-            <a:off x="4267200" y="781050"/>
-            <a:ext cx="3638550" cy="5543550"/>
+            <a:off x="4267200" y="904875"/>
+            <a:ext cx="3638550" cy="5419725"/>
           </a:xfrm>
           <a:prstGeom prst="roundRect">
             <a:avLst>
@@ -15602,8 +15602,8 @@
         </p:nvSpPr>
         <p:spPr>
           <a:xfrm>
-            <a:off x="4267200" y="781050"/>
-            <a:ext cx="57150" cy="5543550"/>
+            <a:off x="4267200" y="904875"/>
+            <a:ext cx="57150" cy="5419725"/>
           </a:xfrm>
           <a:prstGeom prst="rect">
             <a:avLst/>
@@ -15627,7 +15627,7 @@
         </p:nvSpPr>
         <p:spPr>
           <a:xfrm>
-            <a:off x="4438650" y="933450"/>
+            <a:off x="4438650" y="1019175"/>
             <a:ext cx="3295650" cy="171450"/>
           </a:xfrm>
           <a:prstGeom prst="rect">
@@ -15666,8 +15666,8 @@
         </p:nvSpPr>
         <p:spPr>
           <a:xfrm>
-            <a:off x="4438650" y="1200150"/>
-            <a:ext cx="3295650" cy="4972050"/>
+            <a:off x="4438650" y="1285875"/>
+            <a:ext cx="3295650" cy="4924425"/>
           </a:xfrm>
           <a:prstGeom prst="rect">
             <a:avLst/>
@@ -15773,7 +15773,7 @@
         </p:nvSpPr>
         <p:spPr>
           <a:xfrm>
-            <a:off x="7924800" y="3381375"/>
+            <a:off x="7924800" y="3443288"/>
             <a:ext cx="190500" cy="342900"/>
           </a:xfrm>
           <a:prstGeom prst="rect">
@@ -15812,8 +15812,8 @@
         </p:nvSpPr>
         <p:spPr>
           <a:xfrm>
-            <a:off x="8134350" y="781050"/>
-            <a:ext cx="3638550" cy="5543550"/>
+            <a:off x="8134350" y="904875"/>
+            <a:ext cx="3638550" cy="5419725"/>
           </a:xfrm>
           <a:prstGeom prst="roundRect">
             <a:avLst>
@@ -15839,8 +15839,8 @@
         </p:nvSpPr>
         <p:spPr>
           <a:xfrm>
-            <a:off x="8134350" y="781050"/>
-            <a:ext cx="57150" cy="5543550"/>
+            <a:off x="8134350" y="904875"/>
+            <a:ext cx="57150" cy="5419725"/>
           </a:xfrm>
           <a:prstGeom prst="rect">
             <a:avLst/>
@@ -15864,7 +15864,7 @@
         </p:nvSpPr>
         <p:spPr>
           <a:xfrm>
-            <a:off x="8305800" y="933450"/>
+            <a:off x="8305800" y="1019175"/>
             <a:ext cx="3295650" cy="171450"/>
           </a:xfrm>
           <a:prstGeom prst="rect">
@@ -15966,7 +15966,7 @@
         <p:spPr>
           <a:xfrm>
             <a:off x="400050" y="247650"/>
-            <a:ext cx="10839450" cy="381000"/>
+            <a:ext cx="10839450" cy="428625"/>
           </a:xfrm>
           <a:prstGeom prst="rect">
             <a:avLst/>
@@ -15982,7 +15982,7 @@
               <a:buNone/>
             </a:pPr>
             <a:r>
-              <a:rPr lang="en-US" sz="3000" b="1" dirty="0">
+              <a:rPr lang="en-US" sz="3200" b="1" dirty="0">
                 <a:solidFill>
                   <a:srgbClr val="EAEAEA"/>
                 </a:solidFill>
@@ -15992,7 +15992,7 @@
               </a:rPr>
               <a:t>Channel mix still under-indexes in-product</a:t>
             </a:r>
-            <a:endParaRPr lang="en-US" sz="3000" dirty="0"/>
+            <a:endParaRPr lang="en-US" sz="3200" dirty="0"/>
           </a:p>
         </p:txBody>
       </p:sp>
@@ -16082,12 +16082,12 @@
         </p:nvSpPr>
         <p:spPr>
           <a:xfrm>
-            <a:off x="400050" y="781050"/>
-            <a:ext cx="7058025" cy="5543550"/>
+            <a:off x="400050" y="904875"/>
+            <a:ext cx="7058025" cy="5419725"/>
           </a:xfrm>
           <a:prstGeom prst="roundRect">
             <a:avLst>
-              <a:gd name="adj" fmla="val 1649"/>
+              <a:gd name="adj" fmla="val 1687"/>
             </a:avLst>
           </a:prstGeom>
           <a:solidFill>
@@ -16117,7 +16117,7 @@
         </p:blipFill>
         <p:spPr>
           <a:xfrm>
-            <a:off x="552450" y="2019300"/>
+            <a:off x="552450" y="2085975"/>
             <a:ext cx="6753225" cy="3067050"/>
           </a:xfrm>
           <a:prstGeom prst="rect">
@@ -16133,7 +16133,7 @@
         </p:nvSpPr>
         <p:spPr>
           <a:xfrm>
-            <a:off x="7743825" y="781050"/>
+            <a:off x="7743825" y="904875"/>
             <a:ext cx="4048125" cy="171450"/>
           </a:xfrm>
           <a:prstGeom prst="rect">
@@ -16172,7 +16172,7 @@
         </p:nvSpPr>
         <p:spPr>
           <a:xfrm>
-            <a:off x="7743825" y="1209675"/>
+            <a:off x="7743825" y="1419225"/>
             <a:ext cx="66675" cy="66675"/>
           </a:xfrm>
           <a:prstGeom prst="roundRect">
@@ -16199,17 +16199,17 @@
         </p:nvSpPr>
         <p:spPr>
           <a:xfrm>
-            <a:off x="7934325" y="1123950"/>
-            <a:ext cx="3857625" cy="342900"/>
-          </a:xfrm>
-          <a:prstGeom prst="rect">
-            <a:avLst/>
-          </a:prstGeom>
-          <a:noFill/>
-          <a:ln/>
-        </p:spPr>
-        <p:txBody>
-          <a:bodyPr wrap="square" lIns="0" tIns="0" rIns="0" bIns="0" rtlCol="0" anchor="t"/>
+            <a:off x="7934325" y="1247775"/>
+            <a:ext cx="3857625" cy="419100"/>
+          </a:xfrm>
+          <a:prstGeom prst="rect">
+            <a:avLst/>
+          </a:prstGeom>
+          <a:noFill/>
+          <a:ln/>
+        </p:spPr>
+        <p:txBody>
+          <a:bodyPr wrap="square" lIns="0" tIns="0" rIns="0" bIns="0" rtlCol="0" anchor="ctr"/>
           <a:lstStyle/>
           <a:p>
             <a:pPr algn="l" indent="0" marL="0">
@@ -16238,7 +16238,7 @@
         </p:nvSpPr>
         <p:spPr>
           <a:xfrm>
-            <a:off x="7743825" y="1743075"/>
+            <a:off x="7743825" y="1876425"/>
             <a:ext cx="66675" cy="66675"/>
           </a:xfrm>
           <a:prstGeom prst="roundRect">
@@ -16265,17 +16265,17 @@
         </p:nvSpPr>
         <p:spPr>
           <a:xfrm>
-            <a:off x="7934325" y="1657350"/>
-            <a:ext cx="3857625" cy="342900"/>
-          </a:xfrm>
-          <a:prstGeom prst="rect">
-            <a:avLst/>
-          </a:prstGeom>
-          <a:noFill/>
-          <a:ln/>
-        </p:spPr>
-        <p:txBody>
-          <a:bodyPr wrap="square" lIns="0" tIns="0" rIns="0" bIns="0" rtlCol="0" anchor="t"/>
+            <a:off x="7934325" y="1704975"/>
+            <a:ext cx="3857625" cy="419100"/>
+          </a:xfrm>
+          <a:prstGeom prst="rect">
+            <a:avLst/>
+          </a:prstGeom>
+          <a:noFill/>
+          <a:ln/>
+        </p:spPr>
+        <p:txBody>
+          <a:bodyPr wrap="square" lIns="0" tIns="0" rIns="0" bIns="0" rtlCol="0" anchor="ctr"/>
           <a:lstStyle/>
           <a:p>
             <a:pPr algn="l" indent="0" marL="0">
@@ -16304,7 +16304,7 @@
         </p:nvSpPr>
         <p:spPr>
           <a:xfrm>
-            <a:off x="7743825" y="2276475"/>
+            <a:off x="7743825" y="2333625"/>
             <a:ext cx="66675" cy="66675"/>
           </a:xfrm>
           <a:prstGeom prst="roundRect">
@@ -16331,17 +16331,17 @@
         </p:nvSpPr>
         <p:spPr>
           <a:xfrm>
-            <a:off x="7934325" y="2190750"/>
-            <a:ext cx="3857625" cy="342900"/>
-          </a:xfrm>
-          <a:prstGeom prst="rect">
-            <a:avLst/>
-          </a:prstGeom>
-          <a:noFill/>
-          <a:ln/>
-        </p:spPr>
-        <p:txBody>
-          <a:bodyPr wrap="square" lIns="0" tIns="0" rIns="0" bIns="0" rtlCol="0" anchor="t"/>
+            <a:off x="7934325" y="2162175"/>
+            <a:ext cx="3857625" cy="419100"/>
+          </a:xfrm>
+          <a:prstGeom prst="rect">
+            <a:avLst/>
+          </a:prstGeom>
+          <a:noFill/>
+          <a:ln/>
+        </p:spPr>
+        <p:txBody>
+          <a:bodyPr wrap="square" lIns="0" tIns="0" rIns="0" bIns="0" rtlCol="0" anchor="ctr"/>
           <a:lstStyle/>
           <a:p>
             <a:pPr algn="l" indent="0" marL="0">
@@ -16433,7 +16433,7 @@
         <p:spPr>
           <a:xfrm>
             <a:off x="400050" y="247650"/>
-            <a:ext cx="10839450" cy="381000"/>
+            <a:ext cx="10839450" cy="428625"/>
           </a:xfrm>
           <a:prstGeom prst="rect">
             <a:avLst/>
@@ -16449,7 +16449,7 @@
               <a:buNone/>
             </a:pPr>
             <a:r>
-              <a:rPr lang="en-US" sz="3000" b="1" dirty="0">
+              <a:rPr lang="en-US" sz="3200" b="1" dirty="0">
                 <a:solidFill>
                   <a:srgbClr val="EAEAEA"/>
                 </a:solidFill>
@@ -16459,7 +16459,7 @@
               </a:rPr>
               <a:t>Operating model shift</a:t>
             </a:r>
-            <a:endParaRPr lang="en-US" sz="3000" dirty="0"/>
+            <a:endParaRPr lang="en-US" sz="3200" dirty="0"/>
           </a:p>
         </p:txBody>
       </p:sp>
@@ -16549,12 +16549,12 @@
         </p:nvSpPr>
         <p:spPr>
           <a:xfrm>
-            <a:off x="400050" y="781050"/>
-            <a:ext cx="5695950" cy="5543550"/>
+            <a:off x="400050" y="904875"/>
+            <a:ext cx="5695950" cy="5419725"/>
           </a:xfrm>
           <a:prstGeom prst="roundRect">
             <a:avLst>
-              <a:gd name="adj" fmla="val 1649"/>
+              <a:gd name="adj" fmla="val 1687"/>
             </a:avLst>
           </a:prstGeom>
           <a:solidFill>
@@ -16576,8 +16576,8 @@
         </p:nvSpPr>
         <p:spPr>
           <a:xfrm>
-            <a:off x="400050" y="781050"/>
-            <a:ext cx="57150" cy="5543550"/>
+            <a:off x="400050" y="904875"/>
+            <a:ext cx="57150" cy="5419725"/>
           </a:xfrm>
           <a:prstGeom prst="rect">
             <a:avLst/>
@@ -16601,7 +16601,7 @@
         </p:nvSpPr>
         <p:spPr>
           <a:xfrm>
-            <a:off x="571500" y="933450"/>
+            <a:off x="571500" y="1019175"/>
             <a:ext cx="5353050" cy="171450"/>
           </a:xfrm>
           <a:prstGeom prst="rect">
@@ -16640,8 +16640,8 @@
         </p:nvSpPr>
         <p:spPr>
           <a:xfrm>
-            <a:off x="571500" y="1200150"/>
-            <a:ext cx="5353050" cy="4972050"/>
+            <a:off x="571500" y="1285875"/>
+            <a:ext cx="5353050" cy="4924425"/>
           </a:xfrm>
           <a:prstGeom prst="rect">
             <a:avLst/>
@@ -16718,8 +16718,8 @@
         </p:nvSpPr>
         <p:spPr>
           <a:xfrm>
-            <a:off x="6953250" y="781050"/>
-            <a:ext cx="4838700" cy="5543550"/>
+            <a:off x="6953250" y="904875"/>
+            <a:ext cx="4838700" cy="5419725"/>
           </a:xfrm>
           <a:prstGeom prst="roundRect">
             <a:avLst>
@@ -16745,8 +16745,8 @@
         </p:nvSpPr>
         <p:spPr>
           <a:xfrm>
-            <a:off x="6953250" y="781050"/>
-            <a:ext cx="57150" cy="5543550"/>
+            <a:off x="6953250" y="904875"/>
+            <a:ext cx="57150" cy="5419725"/>
           </a:xfrm>
           <a:prstGeom prst="rect">
             <a:avLst/>
@@ -16770,7 +16770,7 @@
         </p:nvSpPr>
         <p:spPr>
           <a:xfrm>
-            <a:off x="7124700" y="933450"/>
+            <a:off x="7124700" y="1019175"/>
             <a:ext cx="4495800" cy="171450"/>
           </a:xfrm>
           <a:prstGeom prst="rect">
@@ -16809,8 +16809,8 @@
         </p:nvSpPr>
         <p:spPr>
           <a:xfrm>
-            <a:off x="7124700" y="1200150"/>
-            <a:ext cx="4495800" cy="4972050"/>
+            <a:off x="7124700" y="1285875"/>
+            <a:ext cx="4495800" cy="4924425"/>
           </a:xfrm>
           <a:prstGeom prst="rect">
             <a:avLst/>
@@ -16887,7 +16887,7 @@
         </p:nvSpPr>
         <p:spPr>
           <a:xfrm>
-            <a:off x="6334125" y="3324225"/>
+            <a:off x="6334125" y="3386138"/>
             <a:ext cx="381000" cy="457200"/>
           </a:xfrm>
           <a:prstGeom prst="rect">
@@ -16989,7 +16989,7 @@
         <p:spPr>
           <a:xfrm>
             <a:off x="400050" y="247650"/>
-            <a:ext cx="10839450" cy="381000"/>
+            <a:ext cx="10839450" cy="428625"/>
           </a:xfrm>
           <a:prstGeom prst="rect">
             <a:avLst/>
@@ -17005,7 +17005,7 @@
               <a:buNone/>
             </a:pPr>
             <a:r>
-              <a:rPr lang="en-US" sz="3000" b="1" dirty="0">
+              <a:rPr lang="en-US" sz="3200" b="1" dirty="0">
                 <a:solidFill>
                   <a:srgbClr val="EAEAEA"/>
                 </a:solidFill>
@@ -17015,7 +17015,7 @@
               </a:rPr>
               <a:t>Start with a 90-day launch team that can ship and learn</a:t>
             </a:r>
-            <a:endParaRPr lang="en-US" sz="3000" dirty="0"/>
+            <a:endParaRPr lang="en-US" sz="3200" dirty="0"/>
           </a:p>
         </p:txBody>
       </p:sp>
@@ -17027,8 +17027,8 @@
         </p:nvSpPr>
         <p:spPr>
           <a:xfrm>
-            <a:off x="400050" y="800100"/>
-            <a:ext cx="10648950" cy="266700"/>
+            <a:off x="400050" y="942975"/>
+            <a:ext cx="10648950" cy="285750"/>
           </a:xfrm>
           <a:prstGeom prst="rect">
             <a:avLst/>
@@ -17144,7 +17144,7 @@
         </p:nvSpPr>
         <p:spPr>
           <a:xfrm>
-            <a:off x="1905000" y="1219200"/>
+            <a:off x="1905000" y="1457325"/>
             <a:ext cx="3168650" cy="171450"/>
           </a:xfrm>
           <a:prstGeom prst="rect">
@@ -17183,7 +17183,7 @@
         </p:nvSpPr>
         <p:spPr>
           <a:xfrm>
-            <a:off x="5226050" y="1219200"/>
+            <a:off x="5226050" y="1457325"/>
             <a:ext cx="3168650" cy="171450"/>
           </a:xfrm>
           <a:prstGeom prst="rect">
@@ -17222,7 +17222,7 @@
         </p:nvSpPr>
         <p:spPr>
           <a:xfrm>
-            <a:off x="8547100" y="1219200"/>
+            <a:off x="8547100" y="1457325"/>
             <a:ext cx="3168650" cy="171450"/>
           </a:xfrm>
           <a:prstGeom prst="rect">
@@ -17261,8 +17261,8 @@
         </p:nvSpPr>
         <p:spPr>
           <a:xfrm>
-            <a:off x="400050" y="1562100"/>
-            <a:ext cx="1257300" cy="876300"/>
+            <a:off x="400050" y="1800225"/>
+            <a:ext cx="1257300" cy="828675"/>
           </a:xfrm>
           <a:prstGeom prst="rect">
             <a:avLst/>
@@ -17300,8 +17300,8 @@
         </p:nvSpPr>
         <p:spPr>
           <a:xfrm>
-            <a:off x="1828800" y="1562100"/>
-            <a:ext cx="9963150" cy="876300"/>
+            <a:off x="1828800" y="1800225"/>
+            <a:ext cx="9963150" cy="828675"/>
           </a:xfrm>
           <a:prstGeom prst="rect">
             <a:avLst/>
@@ -17325,8 +17325,8 @@
         </p:nvSpPr>
         <p:spPr>
           <a:xfrm>
-            <a:off x="400050" y="2514600"/>
-            <a:ext cx="1257300" cy="876300"/>
+            <a:off x="400050" y="2705100"/>
+            <a:ext cx="1257300" cy="828675"/>
           </a:xfrm>
           <a:prstGeom prst="rect">
             <a:avLst/>
@@ -17364,8 +17364,8 @@
         </p:nvSpPr>
         <p:spPr>
           <a:xfrm>
-            <a:off x="1828800" y="2514600"/>
-            <a:ext cx="9963150" cy="876300"/>
+            <a:off x="1828800" y="2705100"/>
+            <a:ext cx="9963150" cy="828675"/>
           </a:xfrm>
           <a:prstGeom prst="rect">
             <a:avLst/>
@@ -17389,8 +17389,8 @@
         </p:nvSpPr>
         <p:spPr>
           <a:xfrm>
-            <a:off x="400050" y="3467100"/>
-            <a:ext cx="1257300" cy="876300"/>
+            <a:off x="400050" y="3609975"/>
+            <a:ext cx="1257300" cy="828675"/>
           </a:xfrm>
           <a:prstGeom prst="rect">
             <a:avLst/>
@@ -17428,8 +17428,8 @@
         </p:nvSpPr>
         <p:spPr>
           <a:xfrm>
-            <a:off x="1828800" y="3467100"/>
-            <a:ext cx="9963150" cy="876300"/>
+            <a:off x="1828800" y="3609975"/>
+            <a:ext cx="9963150" cy="828675"/>
           </a:xfrm>
           <a:prstGeom prst="rect">
             <a:avLst/>
@@ -17453,8 +17453,8 @@
         </p:nvSpPr>
         <p:spPr>
           <a:xfrm>
-            <a:off x="400050" y="4419600"/>
-            <a:ext cx="1257300" cy="876300"/>
+            <a:off x="400050" y="4514850"/>
+            <a:ext cx="1257300" cy="828675"/>
           </a:xfrm>
           <a:prstGeom prst="rect">
             <a:avLst/>
@@ -17492,8 +17492,8 @@
         </p:nvSpPr>
         <p:spPr>
           <a:xfrm>
-            <a:off x="1828800" y="4419600"/>
-            <a:ext cx="9963150" cy="876300"/>
+            <a:off x="1828800" y="4514850"/>
+            <a:ext cx="9963150" cy="828675"/>
           </a:xfrm>
           <a:prstGeom prst="rect">
             <a:avLst/>
@@ -17517,8 +17517,8 @@
         </p:nvSpPr>
         <p:spPr>
           <a:xfrm>
-            <a:off x="400050" y="5372100"/>
-            <a:ext cx="1257300" cy="876300"/>
+            <a:off x="400050" y="5419725"/>
+            <a:ext cx="1257300" cy="828675"/>
           </a:xfrm>
           <a:prstGeom prst="rect">
             <a:avLst/>
@@ -17556,8 +17556,8 @@
         </p:nvSpPr>
         <p:spPr>
           <a:xfrm>
-            <a:off x="1828800" y="5372100"/>
-            <a:ext cx="9963150" cy="876300"/>
+            <a:off x="1828800" y="5419725"/>
+            <a:ext cx="9963150" cy="828675"/>
           </a:xfrm>
           <a:prstGeom prst="rect">
             <a:avLst/>
@@ -17581,7 +17581,7 @@
         </p:nvSpPr>
         <p:spPr>
           <a:xfrm>
-            <a:off x="1924050" y="1809750"/>
+            <a:off x="1924050" y="2024062"/>
             <a:ext cx="3130550" cy="381000"/>
           </a:xfrm>
           <a:prstGeom prst="roundRect">
@@ -17608,7 +17608,7 @@
         </p:nvSpPr>
         <p:spPr>
           <a:xfrm>
-            <a:off x="2000250" y="1809750"/>
+            <a:off x="2000250" y="2024062"/>
             <a:ext cx="2978150" cy="381000"/>
           </a:xfrm>
           <a:prstGeom prst="rect">
@@ -17647,7 +17647,7 @@
         </p:nvSpPr>
         <p:spPr>
           <a:xfrm>
-            <a:off x="1924050" y="2762250"/>
+            <a:off x="1924050" y="2928938"/>
             <a:ext cx="3130550" cy="381000"/>
           </a:xfrm>
           <a:prstGeom prst="roundRect">
@@ -17674,7 +17674,7 @@
         </p:nvSpPr>
         <p:spPr>
           <a:xfrm>
-            <a:off x="2000250" y="2762250"/>
+            <a:off x="2000250" y="2928938"/>
             <a:ext cx="2978150" cy="381000"/>
           </a:xfrm>
           <a:prstGeom prst="rect">
@@ -17713,7 +17713,7 @@
         </p:nvSpPr>
         <p:spPr>
           <a:xfrm>
-            <a:off x="5245100" y="3714750"/>
+            <a:off x="5245100" y="3833812"/>
             <a:ext cx="3130550" cy="381000"/>
           </a:xfrm>
           <a:prstGeom prst="roundRect">
@@ -17740,7 +17740,7 @@
         </p:nvSpPr>
         <p:spPr>
           <a:xfrm>
-            <a:off x="5321300" y="3714750"/>
+            <a:off x="5321300" y="3833812"/>
             <a:ext cx="2978150" cy="381000"/>
           </a:xfrm>
           <a:prstGeom prst="rect">
@@ -17779,7 +17779,7 @@
         </p:nvSpPr>
         <p:spPr>
           <a:xfrm>
-            <a:off x="5245100" y="4667250"/>
+            <a:off x="5245100" y="4738688"/>
             <a:ext cx="3130550" cy="381000"/>
           </a:xfrm>
           <a:prstGeom prst="roundRect">
@@ -17806,7 +17806,7 @@
         </p:nvSpPr>
         <p:spPr>
           <a:xfrm>
-            <a:off x="5321300" y="4667250"/>
+            <a:off x="5321300" y="4738688"/>
             <a:ext cx="2978150" cy="381000"/>
           </a:xfrm>
           <a:prstGeom prst="rect">
@@ -17845,7 +17845,7 @@
         </p:nvSpPr>
         <p:spPr>
           <a:xfrm>
-            <a:off x="8566150" y="5619750"/>
+            <a:off x="8566150" y="5643563"/>
             <a:ext cx="3130550" cy="381000"/>
           </a:xfrm>
           <a:prstGeom prst="roundRect">
@@ -17872,7 +17872,7 @@
         </p:nvSpPr>
         <p:spPr>
           <a:xfrm>
-            <a:off x="8642350" y="5619750"/>
+            <a:off x="8642350" y="5643563"/>
             <a:ext cx="2978150" cy="381000"/>
           </a:xfrm>
           <a:prstGeom prst="rect">
@@ -17974,7 +17974,7 @@
         <p:spPr>
           <a:xfrm>
             <a:off x="400050" y="247650"/>
-            <a:ext cx="10839450" cy="381000"/>
+            <a:ext cx="10839450" cy="428625"/>
           </a:xfrm>
           <a:prstGeom prst="rect">
             <a:avLst/>
@@ -17990,7 +17990,7 @@
               <a:buNone/>
             </a:pPr>
             <a:r>
-              <a:rPr lang="en-US" sz="3000" b="1" dirty="0">
+              <a:rPr lang="en-US" sz="3200" b="1" dirty="0">
                 <a:solidFill>
                   <a:srgbClr val="EAEAEA"/>
                 </a:solidFill>
@@ -18000,7 +18000,7 @@
               </a:rPr>
               <a:t>Regional breakdown</a:t>
             </a:r>
-            <a:endParaRPr lang="en-US" sz="3000" dirty="0"/>
+            <a:endParaRPr lang="en-US" sz="3200" dirty="0"/>
           </a:p>
         </p:txBody>
       </p:sp>
@@ -19279,8 +19279,8 @@
         </p:nvSpPr>
         <p:spPr>
           <a:xfrm>
-            <a:off x="400050" y="1238250"/>
-            <a:ext cx="9525000" cy="1333500"/>
+            <a:off x="400050" y="1143000"/>
+            <a:ext cx="9525000" cy="1371600"/>
           </a:xfrm>
           <a:prstGeom prst="rect">
             <a:avLst/>
@@ -19341,8 +19341,8 @@
         </p:nvSpPr>
         <p:spPr>
           <a:xfrm>
-            <a:off x="400050" y="2952750"/>
-            <a:ext cx="8572500" cy="571500"/>
+            <a:off x="400050" y="2781300"/>
+            <a:ext cx="8572500" cy="533400"/>
           </a:xfrm>
           <a:prstGeom prst="rect">
             <a:avLst/>
@@ -19432,7 +19432,7 @@
         </p:nvSpPr>
         <p:spPr>
           <a:xfrm>
-            <a:off x="571500" y="4152900"/>
+            <a:off x="571500" y="4114800"/>
             <a:ext cx="3105150" cy="171450"/>
           </a:xfrm>
           <a:prstGeom prst="rect">
@@ -19471,8 +19471,8 @@
         </p:nvSpPr>
         <p:spPr>
           <a:xfrm>
-            <a:off x="571500" y="4419600"/>
-            <a:ext cx="3105150" cy="571500"/>
+            <a:off x="571500" y="4362450"/>
+            <a:ext cx="3105150" cy="666750"/>
           </a:xfrm>
           <a:prstGeom prst="rect">
             <a:avLst/>
@@ -19562,7 +19562,7 @@
         </p:nvSpPr>
         <p:spPr>
           <a:xfrm>
-            <a:off x="4343400" y="4152900"/>
+            <a:off x="4343400" y="4114800"/>
             <a:ext cx="3105150" cy="171450"/>
           </a:xfrm>
           <a:prstGeom prst="rect">
@@ -19601,8 +19601,8 @@
         </p:nvSpPr>
         <p:spPr>
           <a:xfrm>
-            <a:off x="4343400" y="4419600"/>
-            <a:ext cx="3105150" cy="571500"/>
+            <a:off x="4343400" y="4362450"/>
+            <a:ext cx="3105150" cy="666750"/>
           </a:xfrm>
           <a:prstGeom prst="rect">
             <a:avLst/>
@@ -19692,7 +19692,7 @@
         </p:nvSpPr>
         <p:spPr>
           <a:xfrm>
-            <a:off x="8115300" y="4152900"/>
+            <a:off x="8115300" y="4114800"/>
             <a:ext cx="3105150" cy="171450"/>
           </a:xfrm>
           <a:prstGeom prst="rect">
@@ -19731,8 +19731,8 @@
         </p:nvSpPr>
         <p:spPr>
           <a:xfrm>
-            <a:off x="8115300" y="4419600"/>
-            <a:ext cx="3105150" cy="571500"/>
+            <a:off x="8115300" y="4362450"/>
+            <a:ext cx="3105150" cy="666750"/>
           </a:xfrm>
           <a:prstGeom prst="rect">
             <a:avLst/>
@@ -19950,7 +19950,7 @@
         <p:spPr>
           <a:xfrm>
             <a:off x="400050" y="247650"/>
-            <a:ext cx="10839450" cy="381000"/>
+            <a:ext cx="10839450" cy="428625"/>
           </a:xfrm>
           <a:prstGeom prst="rect">
             <a:avLst/>
@@ -19966,7 +19966,7 @@
               <a:buNone/>
             </a:pPr>
             <a:r>
-              <a:rPr lang="en-US" sz="3000" b="1" dirty="0">
+              <a:rPr lang="en-US" sz="3200" b="1" dirty="0">
                 <a:solidFill>
                   <a:srgbClr val="EAEAEA"/>
                 </a:solidFill>
@@ -19976,7 +19976,7 @@
               </a:rPr>
               <a:t>Revenue by region</a:t>
             </a:r>
-            <a:endParaRPr lang="en-US" sz="3000" dirty="0"/>
+            <a:endParaRPr lang="en-US" sz="3200" dirty="0"/>
           </a:p>
         </p:txBody>
       </p:sp>
@@ -20219,7 +20219,7 @@
         <p:spPr>
           <a:xfrm>
             <a:off x="400050" y="247650"/>
-            <a:ext cx="10839450" cy="381000"/>
+            <a:ext cx="10839450" cy="428625"/>
           </a:xfrm>
           <a:prstGeom prst="rect">
             <a:avLst/>
@@ -20235,7 +20235,7 @@
               <a:buNone/>
             </a:pPr>
             <a:r>
-              <a:rPr lang="en-US" sz="3000" b="1" dirty="0">
+              <a:rPr lang="en-US" sz="3200" b="1" dirty="0">
                 <a:solidFill>
                   <a:srgbClr val="EAEAEA"/>
                 </a:solidFill>
@@ -20245,7 +20245,7 @@
               </a:rPr>
               <a:t>Channel mix</a:t>
             </a:r>
-            <a:endParaRPr lang="en-US" sz="3000" dirty="0"/>
+            <a:endParaRPr lang="en-US" sz="3200" dirty="0"/>
           </a:p>
         </p:txBody>
       </p:sp>
@@ -21692,7 +21692,7 @@
         <p:spPr>
           <a:xfrm>
             <a:off x="400050" y="247650"/>
-            <a:ext cx="10839450" cy="381000"/>
+            <a:ext cx="10839450" cy="428625"/>
           </a:xfrm>
           <a:prstGeom prst="rect">
             <a:avLst/>
@@ -21708,7 +21708,7 @@
               <a:buNone/>
             </a:pPr>
             <a:r>
-              <a:rPr lang="en-US" sz="3000" b="1" dirty="0">
+              <a:rPr lang="en-US" sz="3200" b="1" dirty="0">
                 <a:solidFill>
                   <a:srgbClr val="EAEAEA"/>
                 </a:solidFill>
@@ -21718,7 +21718,7 @@
               </a:rPr>
               <a:t>Pipeline architecture</a:t>
             </a:r>
-            <a:endParaRPr lang="en-US" sz="3000" dirty="0"/>
+            <a:endParaRPr lang="en-US" sz="3200" dirty="0"/>
           </a:p>
         </p:txBody>
       </p:sp>
@@ -21922,7 +21922,7 @@
         <p:spPr>
           <a:xfrm>
             <a:off x="400050" y="247650"/>
-            <a:ext cx="10839450" cy="381000"/>
+            <a:ext cx="10839450" cy="428625"/>
           </a:xfrm>
           <a:prstGeom prst="rect">
             <a:avLst/>
@@ -21938,7 +21938,7 @@
               <a:buNone/>
             </a:pPr>
             <a:r>
-              <a:rPr lang="en-US" sz="3000" b="1" dirty="0">
+              <a:rPr lang="en-US" sz="3200" b="1" dirty="0">
                 <a:solidFill>
                   <a:srgbClr val="EAEAEA"/>
                 </a:solidFill>
@@ -21948,7 +21948,7 @@
               </a:rPr>
               <a:t>Learning rate</a:t>
             </a:r>
-            <a:endParaRPr lang="en-US" sz="3000" dirty="0"/>
+            <a:endParaRPr lang="en-US" sz="3200" dirty="0"/>
           </a:p>
         </p:txBody>
       </p:sp>
@@ -21960,8 +21960,8 @@
         </p:nvSpPr>
         <p:spPr>
           <a:xfrm>
-            <a:off x="400050" y="800100"/>
-            <a:ext cx="10648950" cy="266700"/>
+            <a:off x="400050" y="942975"/>
+            <a:ext cx="10648950" cy="285750"/>
           </a:xfrm>
           <a:prstGeom prst="rect">
             <a:avLst/>
@@ -22281,7 +22281,7 @@
         <p:spPr>
           <a:xfrm>
             <a:off x="400050" y="247650"/>
-            <a:ext cx="10839450" cy="381000"/>
+            <a:ext cx="10839450" cy="428625"/>
           </a:xfrm>
           <a:prstGeom prst="rect">
             <a:avLst/>
@@ -22297,7 +22297,7 @@
               <a:buNone/>
             </a:pPr>
             <a:r>
-              <a:rPr lang="en-US" sz="3000" b="1" dirty="0">
+              <a:rPr lang="en-US" sz="3200" b="1" dirty="0">
                 <a:solidFill>
                   <a:srgbClr val="EAEAEA"/>
                 </a:solidFill>
@@ -22307,7 +22307,7 @@
               </a:rPr>
               <a:t>Summary</a:t>
             </a:r>
-            <a:endParaRPr lang="en-US" sz="3000" dirty="0"/>
+            <a:endParaRPr lang="en-US" sz="3200" dirty="0"/>
           </a:p>
         </p:txBody>
       </p:sp>
@@ -22397,7 +22397,7 @@
         </p:nvSpPr>
         <p:spPr>
           <a:xfrm>
-            <a:off x="400050" y="1209675"/>
+            <a:off x="400050" y="1257300"/>
             <a:ext cx="66675" cy="66675"/>
           </a:xfrm>
           <a:prstGeom prst="roundRect">
@@ -22434,7 +22434,7 @@
           <a:ln/>
         </p:spPr>
         <p:txBody>
-          <a:bodyPr wrap="square" lIns="0" tIns="0" rIns="0" bIns="0" rtlCol="0" anchor="t"/>
+          <a:bodyPr wrap="square" lIns="0" tIns="0" rIns="0" bIns="0" rtlCol="0" anchor="ctr"/>
           <a:lstStyle/>
           <a:p>
             <a:pPr algn="l" indent="0" marL="0">
@@ -22463,7 +22463,7 @@
         </p:nvSpPr>
         <p:spPr>
           <a:xfrm>
-            <a:off x="400050" y="1590675"/>
+            <a:off x="400050" y="1638300"/>
             <a:ext cx="66675" cy="66675"/>
           </a:xfrm>
           <a:prstGeom prst="roundRect">
@@ -22500,7 +22500,7 @@
           <a:ln/>
         </p:spPr>
         <p:txBody>
-          <a:bodyPr wrap="square" lIns="0" tIns="0" rIns="0" bIns="0" rtlCol="0" anchor="t"/>
+          <a:bodyPr wrap="square" lIns="0" tIns="0" rIns="0" bIns="0" rtlCol="0" anchor="ctr"/>
           <a:lstStyle/>
           <a:p>
             <a:pPr algn="l" indent="0" marL="0">
@@ -22529,7 +22529,7 @@
         </p:nvSpPr>
         <p:spPr>
           <a:xfrm>
-            <a:off x="400050" y="1971675"/>
+            <a:off x="400050" y="2019300"/>
             <a:ext cx="66675" cy="66675"/>
           </a:xfrm>
           <a:prstGeom prst="roundRect">
@@ -22566,7 +22566,7 @@
           <a:ln/>
         </p:spPr>
         <p:txBody>
-          <a:bodyPr wrap="square" lIns="0" tIns="0" rIns="0" bIns="0" rtlCol="0" anchor="t"/>
+          <a:bodyPr wrap="square" lIns="0" tIns="0" rIns="0" bIns="0" rtlCol="0" anchor="ctr"/>
           <a:lstStyle/>
           <a:p>
             <a:pPr algn="l" indent="0" marL="0">
@@ -22697,7 +22697,7 @@
         <p:spPr>
           <a:xfrm>
             <a:off x="400050" y="838200"/>
-            <a:ext cx="7239000" cy="914400"/>
+            <a:ext cx="7239000" cy="933450"/>
           </a:xfrm>
           <a:prstGeom prst="rect">
             <a:avLst/>
@@ -22758,8 +22758,8 @@
         </p:nvSpPr>
         <p:spPr>
           <a:xfrm>
-            <a:off x="400050" y="1924050"/>
-            <a:ext cx="6858000" cy="609600"/>
+            <a:off x="400050" y="2038350"/>
+            <a:ext cx="6858000" cy="457200"/>
           </a:xfrm>
           <a:prstGeom prst="rect">
             <a:avLst/>
@@ -22797,7 +22797,7 @@
         </p:nvSpPr>
         <p:spPr>
           <a:xfrm>
-            <a:off x="400050" y="2609850"/>
+            <a:off x="400050" y="2686050"/>
             <a:ext cx="1238250" cy="285750"/>
           </a:xfrm>
           <a:prstGeom prst="roundRect">
@@ -22824,7 +22824,7 @@
         </p:nvSpPr>
         <p:spPr>
           <a:xfrm>
-            <a:off x="476250" y="2667000"/>
+            <a:off x="476250" y="2743200"/>
             <a:ext cx="1085850" cy="171450"/>
           </a:xfrm>
           <a:prstGeom prst="rect">
@@ -22863,7 +22863,7 @@
         </p:nvSpPr>
         <p:spPr>
           <a:xfrm>
-            <a:off x="400050" y="3028950"/>
+            <a:off x="400050" y="3105150"/>
             <a:ext cx="6667500" cy="342900"/>
           </a:xfrm>
           <a:prstGeom prst="rect">

--- a/examples/demo.pptx
+++ b/examples/demo.pptx
@@ -7764,7 +7764,7 @@
       </p:sp>
       <p:pic>
         <p:nvPicPr>
-          <p:cNvPr id="14" name="Image 1" descr="/Users/dpadmana/projects/ppt-gen/assets/plots/regions-85083c9a3d.png">    </p:cNvPr>
+          <p:cNvPr id="14" name="Image 1" descr="/Users/dpadmana/projects/ppt-gen/assets/plots/regions-fc949fbe1b.png">    </p:cNvPr>
           <p:cNvPicPr>
             <a:picLocks noChangeAspect="1"/>
           </p:cNvPicPr>
@@ -8321,7 +8321,7 @@
                       <a:tailEnd type="none" w="med" len="med"/>
                     </a:lnB>
                     <a:solidFill>
-                      <a:srgbClr val="EAEAEA"/>
+                      <a:srgbClr val="4E79A7"/>
                     </a:solidFill>
                   </a:tcPr>
                 </a:tc>
@@ -8389,7 +8389,7 @@
                       <a:tailEnd type="none" w="med" len="med"/>
                     </a:lnB>
                     <a:solidFill>
-                      <a:srgbClr val="EAEAEA"/>
+                      <a:srgbClr val="4E79A7"/>
                     </a:solidFill>
                   </a:tcPr>
                 </a:tc>
@@ -8457,7 +8457,7 @@
                       <a:tailEnd type="none" w="med" len="med"/>
                     </a:lnB>
                     <a:solidFill>
-                      <a:srgbClr val="EAEAEA"/>
+                      <a:srgbClr val="4E79A7"/>
                     </a:solidFill>
                   </a:tcPr>
                 </a:tc>
@@ -13101,7 +13101,7 @@
       </p:sp>
       <p:pic>
         <p:nvPicPr>
-          <p:cNvPr id="7" name="Image 1" descr="/Users/dpadmana/projects/ppt-gen/assets/plots/quarterly-a5d5f8a619.png">    </p:cNvPr>
+          <p:cNvPr id="7" name="Image 1" descr="/Users/dpadmana/projects/ppt-gen/assets/plots/quarterly-46e42b95c2.png">    </p:cNvPr>
           <p:cNvPicPr>
             <a:picLocks noChangeAspect="1"/>
           </p:cNvPicPr>
@@ -18186,7 +18186,7 @@
       </p:sp>
       <p:pic>
         <p:nvPicPr>
-          <p:cNvPr id="7" name="Image 1" descr="/Users/dpadmana/projects/ppt-gen/assets/plots/channels-99f91be3d7.png">    </p:cNvPr>
+          <p:cNvPr id="7" name="Image 1" descr="/Users/dpadmana/projects/ppt-gen/assets/plots/channels-753319639b.png">    </p:cNvPr>
           <p:cNvPicPr>
             <a:picLocks noChangeAspect="1"/>
           </p:cNvPicPr>
@@ -19189,11 +19189,11 @@
         <p:spPr>
           <a:xfrm>
             <a:off x="400050" y="1123950"/>
-            <a:ext cx="11010900" cy="2514600"/>
+            <a:ext cx="11010900" cy="2362200"/>
           </a:xfrm>
           <a:prstGeom prst="roundRect">
             <a:avLst>
-              <a:gd name="adj" fmla="val 3636"/>
+              <a:gd name="adj" fmla="val 3871"/>
             </a:avLst>
           </a:prstGeom>
           <a:solidFill>
@@ -19222,17 +19222,17 @@
           </p:nvPr>
         </p:nvGraphicFramePr>
         <p:xfrm>
-          <a:off x="476250" y="1162050"/>
-          <a:ext cx="10858500" cy="914400"/>
+          <a:off x="438150" y="1162050"/>
+          <a:ext cx="10934700" cy="914400"/>
         </p:xfrm>
         <a:graphic>
           <a:graphicData uri="http://schemas.openxmlformats.org/drawingml/2006/table">
             <a:tbl>
               <a:tblPr/>
               <a:tblGrid>
-                <a:gridCol w="4126230"/>
-                <a:gridCol w="3366135"/>
-                <a:gridCol w="3366135"/>
+                <a:gridCol w="3644900"/>
+                <a:gridCol w="3644900"/>
+                <a:gridCol w="3644900"/>
               </a:tblGrid>
               <a:tr h="457200">
                 <a:tc>
@@ -19244,7 +19244,7 @@
                         <a:buNone/>
                       </a:pPr>
                       <a:r>
-                        <a:rPr lang="en-US" sz="1600" b="1" dirty="0">
+                        <a:rPr lang="en-US" sz="1500" b="1" dirty="0">
                           <a:solidFill>
                             <a:srgbClr val="FFFFFF"/>
                           </a:solidFill>
@@ -19254,7 +19254,7 @@
                         </a:rPr>
                         <a:t>region</a:t>
                       </a:r>
-                      <a:endParaRPr lang="en-US" sz="1600" dirty="0">
+                      <a:endParaRPr lang="en-US" sz="1500" dirty="0">
                         <a:latin typeface="Helvetica Neue" charset="0"/>
                         <a:ea typeface="Helvetica Neue" charset="0"/>
                         <a:cs typeface="Helvetica Neue" charset="0"/>
@@ -19299,7 +19299,7 @@
                       <a:tailEnd type="none" w="med" len="med"/>
                     </a:lnB>
                     <a:solidFill>
-                      <a:srgbClr val="EAEAEA"/>
+                      <a:srgbClr val="4E79A7"/>
                     </a:solidFill>
                   </a:tcPr>
                 </a:tc>
@@ -19312,7 +19312,7 @@
                         <a:buNone/>
                       </a:pPr>
                       <a:r>
-                        <a:rPr lang="en-US" sz="1600" b="1" dirty="0">
+                        <a:rPr lang="en-US" sz="1500" b="1" dirty="0">
                           <a:solidFill>
                             <a:srgbClr val="FFFFFF"/>
                           </a:solidFill>
@@ -19322,7 +19322,7 @@
                         </a:rPr>
                         <a:t>revenue_m</a:t>
                       </a:r>
-                      <a:endParaRPr lang="en-US" sz="1600" dirty="0">
+                      <a:endParaRPr lang="en-US" sz="1500" dirty="0">
                         <a:latin typeface="Helvetica Neue" charset="0"/>
                         <a:ea typeface="Helvetica Neue" charset="0"/>
                         <a:cs typeface="Helvetica Neue" charset="0"/>
@@ -19367,7 +19367,7 @@
                       <a:tailEnd type="none" w="med" len="med"/>
                     </a:lnB>
                     <a:solidFill>
-                      <a:srgbClr val="EAEAEA"/>
+                      <a:srgbClr val="4E79A7"/>
                     </a:solidFill>
                   </a:tcPr>
                 </a:tc>
@@ -19380,7 +19380,7 @@
                         <a:buNone/>
                       </a:pPr>
                       <a:r>
-                        <a:rPr lang="en-US" sz="1600" b="1" dirty="0">
+                        <a:rPr lang="en-US" sz="1500" b="1" dirty="0">
                           <a:solidFill>
                             <a:srgbClr val="FFFFFF"/>
                           </a:solidFill>
@@ -19390,7 +19390,7 @@
                         </a:rPr>
                         <a:t>growth_pct</a:t>
                       </a:r>
-                      <a:endParaRPr lang="en-US" sz="1600" dirty="0">
+                      <a:endParaRPr lang="en-US" sz="1500" dirty="0">
                         <a:latin typeface="Helvetica Neue" charset="0"/>
                         <a:ea typeface="Helvetica Neue" charset="0"/>
                         <a:cs typeface="Helvetica Neue" charset="0"/>
@@ -19435,7 +19435,7 @@
                       <a:tailEnd type="none" w="med" len="med"/>
                     </a:lnB>
                     <a:solidFill>
-                      <a:srgbClr val="EAEAEA"/>
+                      <a:srgbClr val="4E79A7"/>
                     </a:solidFill>
                   </a:tcPr>
                 </a:tc>
@@ -19450,7 +19450,7 @@
                         <a:buNone/>
                       </a:pPr>
                       <a:r>
-                        <a:rPr lang="en-US" sz="1600" b="1" dirty="0">
+                        <a:rPr lang="en-US" sz="1500" b="1" dirty="0">
                           <a:solidFill>
                             <a:srgbClr val="EAEAEA"/>
                           </a:solidFill>
@@ -19460,7 +19460,7 @@
                         </a:rPr>
                         <a:t>North America</a:t>
                       </a:r>
-                      <a:endParaRPr lang="en-US" sz="1600" dirty="0">
+                      <a:endParaRPr lang="en-US" sz="1500" dirty="0">
                         <a:latin typeface="Helvetica Neue" charset="0"/>
                         <a:ea typeface="Helvetica Neue" charset="0"/>
                         <a:cs typeface="Helvetica Neue" charset="0"/>
@@ -19518,7 +19518,7 @@
                         <a:buNone/>
                       </a:pPr>
                       <a:r>
-                        <a:rPr lang="en-US" sz="1600" dirty="0">
+                        <a:rPr lang="en-US" sz="1500" dirty="0">
                           <a:solidFill>
                             <a:srgbClr val="EAEAEA"/>
                           </a:solidFill>
@@ -19528,7 +19528,7 @@
                         </a:rPr>
                         <a:t>12.4</a:t>
                       </a:r>
-                      <a:endParaRPr lang="en-US" sz="1600" dirty="0">
+                      <a:endParaRPr lang="en-US" sz="1500" dirty="0">
                         <a:latin typeface="Helvetica Neue" charset="0"/>
                         <a:ea typeface="Helvetica Neue" charset="0"/>
                         <a:cs typeface="Helvetica Neue" charset="0"/>
@@ -19586,7 +19586,7 @@
                         <a:buNone/>
                       </a:pPr>
                       <a:r>
-                        <a:rPr lang="en-US" sz="1600" dirty="0">
+                        <a:rPr lang="en-US" sz="1500" dirty="0">
                           <a:solidFill>
                             <a:srgbClr val="EAEAEA"/>
                           </a:solidFill>
@@ -19596,7 +19596,7 @@
                         </a:rPr>
                         <a:t>11.2</a:t>
                       </a:r>
-                      <a:endParaRPr lang="en-US" sz="1600" dirty="0">
+                      <a:endParaRPr lang="en-US" sz="1500" dirty="0">
                         <a:latin typeface="Helvetica Neue" charset="0"/>
                         <a:ea typeface="Helvetica Neue" charset="0"/>
                         <a:cs typeface="Helvetica Neue" charset="0"/>
@@ -19656,7 +19656,7 @@
                         <a:buNone/>
                       </a:pPr>
                       <a:r>
-                        <a:rPr lang="en-US" sz="1600" b="1" dirty="0">
+                        <a:rPr lang="en-US" sz="1500" b="1" dirty="0">
                           <a:solidFill>
                             <a:srgbClr val="EAEAEA"/>
                           </a:solidFill>
@@ -19666,7 +19666,7 @@
                         </a:rPr>
                         <a:t>Europe</a:t>
                       </a:r>
-                      <a:endParaRPr lang="en-US" sz="1600" dirty="0">
+                      <a:endParaRPr lang="en-US" sz="1500" dirty="0">
                         <a:latin typeface="Helvetica Neue" charset="0"/>
                         <a:ea typeface="Helvetica Neue" charset="0"/>
                         <a:cs typeface="Helvetica Neue" charset="0"/>
@@ -19724,7 +19724,7 @@
                         <a:buNone/>
                       </a:pPr>
                       <a:r>
-                        <a:rPr lang="en-US" sz="1600" dirty="0">
+                        <a:rPr lang="en-US" sz="1500" dirty="0">
                           <a:solidFill>
                             <a:srgbClr val="EAEAEA"/>
                           </a:solidFill>
@@ -19734,7 +19734,7 @@
                         </a:rPr>
                         <a:t>8.7</a:t>
                       </a:r>
-                      <a:endParaRPr lang="en-US" sz="1600" dirty="0">
+                      <a:endParaRPr lang="en-US" sz="1500" dirty="0">
                         <a:latin typeface="Helvetica Neue" charset="0"/>
                         <a:ea typeface="Helvetica Neue" charset="0"/>
                         <a:cs typeface="Helvetica Neue" charset="0"/>
@@ -19792,7 +19792,7 @@
                         <a:buNone/>
                       </a:pPr>
                       <a:r>
-                        <a:rPr lang="en-US" sz="1600" dirty="0">
+                        <a:rPr lang="en-US" sz="1500" dirty="0">
                           <a:solidFill>
                             <a:srgbClr val="EAEAEA"/>
                           </a:solidFill>
@@ -19802,7 +19802,7 @@
                         </a:rPr>
                         <a:t>9.5</a:t>
                       </a:r>
-                      <a:endParaRPr lang="en-US" sz="1600" dirty="0">
+                      <a:endParaRPr lang="en-US" sz="1500" dirty="0">
                         <a:latin typeface="Helvetica Neue" charset="0"/>
                         <a:ea typeface="Helvetica Neue" charset="0"/>
                         <a:cs typeface="Helvetica Neue" charset="0"/>
@@ -19862,7 +19862,7 @@
                         <a:buNone/>
                       </a:pPr>
                       <a:r>
-                        <a:rPr lang="en-US" sz="1600" b="1" dirty="0">
+                        <a:rPr lang="en-US" sz="1500" b="1" dirty="0">
                           <a:solidFill>
                             <a:srgbClr val="EAEAEA"/>
                           </a:solidFill>
@@ -19872,7 +19872,7 @@
                         </a:rPr>
                         <a:t>Asia Pacific</a:t>
                       </a:r>
-                      <a:endParaRPr lang="en-US" sz="1600" dirty="0">
+                      <a:endParaRPr lang="en-US" sz="1500" dirty="0">
                         <a:latin typeface="Helvetica Neue" charset="0"/>
                         <a:ea typeface="Helvetica Neue" charset="0"/>
                         <a:cs typeface="Helvetica Neue" charset="0"/>
@@ -19930,7 +19930,7 @@
                         <a:buNone/>
                       </a:pPr>
                       <a:r>
-                        <a:rPr lang="en-US" sz="1600" dirty="0">
+                        <a:rPr lang="en-US" sz="1500" dirty="0">
                           <a:solidFill>
                             <a:srgbClr val="EAEAEA"/>
                           </a:solidFill>
@@ -19940,7 +19940,7 @@
                         </a:rPr>
                         <a:t>6.1</a:t>
                       </a:r>
-                      <a:endParaRPr lang="en-US" sz="1600" dirty="0">
+                      <a:endParaRPr lang="en-US" sz="1500" dirty="0">
                         <a:latin typeface="Helvetica Neue" charset="0"/>
                         <a:ea typeface="Helvetica Neue" charset="0"/>
                         <a:cs typeface="Helvetica Neue" charset="0"/>
@@ -19998,7 +19998,7 @@
                         <a:buNone/>
                       </a:pPr>
                       <a:r>
-                        <a:rPr lang="en-US" sz="1600" dirty="0">
+                        <a:rPr lang="en-US" sz="1500" dirty="0">
                           <a:solidFill>
                             <a:srgbClr val="EAEAEA"/>
                           </a:solidFill>
@@ -20008,7 +20008,7 @@
                         </a:rPr>
                         <a:t>14.8</a:t>
                       </a:r>
-                      <a:endParaRPr lang="en-US" sz="1600" dirty="0">
+                      <a:endParaRPr lang="en-US" sz="1500" dirty="0">
                         <a:latin typeface="Helvetica Neue" charset="0"/>
                         <a:ea typeface="Helvetica Neue" charset="0"/>
                         <a:cs typeface="Helvetica Neue" charset="0"/>
@@ -20068,7 +20068,7 @@
                         <a:buNone/>
                       </a:pPr>
                       <a:r>
-                        <a:rPr lang="en-US" sz="1600" b="1" dirty="0">
+                        <a:rPr lang="en-US" sz="1500" b="1" dirty="0">
                           <a:solidFill>
                             <a:srgbClr val="EAEAEA"/>
                           </a:solidFill>
@@ -20078,7 +20078,7 @@
                         </a:rPr>
                         <a:t>Latin America</a:t>
                       </a:r>
-                      <a:endParaRPr lang="en-US" sz="1600" dirty="0">
+                      <a:endParaRPr lang="en-US" sz="1500" dirty="0">
                         <a:latin typeface="Helvetica Neue" charset="0"/>
                         <a:ea typeface="Helvetica Neue" charset="0"/>
                         <a:cs typeface="Helvetica Neue" charset="0"/>
@@ -20136,7 +20136,7 @@
                         <a:buNone/>
                       </a:pPr>
                       <a:r>
-                        <a:rPr lang="en-US" sz="1600" dirty="0">
+                        <a:rPr lang="en-US" sz="1500" dirty="0">
                           <a:solidFill>
                             <a:srgbClr val="EAEAEA"/>
                           </a:solidFill>
@@ -20146,7 +20146,7 @@
                         </a:rPr>
                         <a:t>2.3</a:t>
                       </a:r>
-                      <a:endParaRPr lang="en-US" sz="1600" dirty="0">
+                      <a:endParaRPr lang="en-US" sz="1500" dirty="0">
                         <a:latin typeface="Helvetica Neue" charset="0"/>
                         <a:ea typeface="Helvetica Neue" charset="0"/>
                         <a:cs typeface="Helvetica Neue" charset="0"/>
@@ -20204,7 +20204,7 @@
                         <a:buNone/>
                       </a:pPr>
                       <a:r>
-                        <a:rPr lang="en-US" sz="1600" dirty="0">
+                        <a:rPr lang="en-US" sz="1500" dirty="0">
                           <a:solidFill>
                             <a:srgbClr val="EAEAEA"/>
                           </a:solidFill>
@@ -20214,7 +20214,7 @@
                         </a:rPr>
                         <a:t>7.1</a:t>
                       </a:r>
-                      <a:endParaRPr lang="en-US" sz="1600" dirty="0">
+                      <a:endParaRPr lang="en-US" sz="1500" dirty="0">
                         <a:latin typeface="Helvetica Neue" charset="0"/>
                         <a:ea typeface="Helvetica Neue" charset="0"/>
                         <a:cs typeface="Helvetica Neue" charset="0"/>
@@ -22170,7 +22170,7 @@
       </p:sp>
       <p:pic>
         <p:nvPicPr>
-          <p:cNvPr id="7" name="Image 1" descr="/Users/dpadmana/projects/ppt-gen/assets/plots/regions-a1574b2a94.png">    </p:cNvPr>
+          <p:cNvPr id="7" name="Image 1" descr="/Users/dpadmana/projects/ppt-gen/assets/plots/regions-542e4be784.png">    </p:cNvPr>
           <p:cNvPicPr>
             <a:picLocks noChangeAspect="1"/>
           </p:cNvPicPr>
@@ -22419,11 +22419,11 @@
         <p:spPr>
           <a:xfrm>
             <a:off x="400050" y="1123950"/>
-            <a:ext cx="11010900" cy="3009900"/>
+            <a:ext cx="11010900" cy="2819400"/>
           </a:xfrm>
           <a:prstGeom prst="roundRect">
             <a:avLst>
-              <a:gd name="adj" fmla="val 3038"/>
+              <a:gd name="adj" fmla="val 3243"/>
             </a:avLst>
           </a:prstGeom>
           <a:solidFill>
@@ -22452,17 +22452,17 @@
           </p:nvPr>
         </p:nvGraphicFramePr>
         <p:xfrm>
-          <a:off x="476250" y="1162050"/>
-          <a:ext cx="10858500" cy="914400"/>
+          <a:off x="438150" y="1162050"/>
+          <a:ext cx="10934700" cy="914400"/>
         </p:xfrm>
         <a:graphic>
           <a:graphicData uri="http://schemas.openxmlformats.org/drawingml/2006/table">
             <a:tbl>
               <a:tblPr/>
               <a:tblGrid>
-                <a:gridCol w="4126230"/>
-                <a:gridCol w="3366135"/>
-                <a:gridCol w="3366135"/>
+                <a:gridCol w="3644900"/>
+                <a:gridCol w="3644900"/>
+                <a:gridCol w="3644900"/>
               </a:tblGrid>
               <a:tr h="457200">
                 <a:tc>
@@ -22474,7 +22474,7 @@
                         <a:buNone/>
                       </a:pPr>
                       <a:r>
-                        <a:rPr lang="en-US" sz="1600" b="1" dirty="0">
+                        <a:rPr lang="en-US" sz="1500" b="1" dirty="0">
                           <a:solidFill>
                             <a:srgbClr val="FFFFFF"/>
                           </a:solidFill>
@@ -22484,7 +22484,7 @@
                         </a:rPr>
                         <a:t>channel</a:t>
                       </a:r>
-                      <a:endParaRPr lang="en-US" sz="1600" dirty="0">
+                      <a:endParaRPr lang="en-US" sz="1500" dirty="0">
                         <a:latin typeface="Helvetica Neue" charset="0"/>
                         <a:ea typeface="Helvetica Neue" charset="0"/>
                         <a:cs typeface="Helvetica Neue" charset="0"/>
@@ -22529,7 +22529,7 @@
                       <a:tailEnd type="none" w="med" len="med"/>
                     </a:lnB>
                     <a:solidFill>
-                      <a:srgbClr val="EAEAEA"/>
+                      <a:srgbClr val="4E79A7"/>
                     </a:solidFill>
                   </a:tcPr>
                 </a:tc>
@@ -22542,7 +22542,7 @@
                         <a:buNone/>
                       </a:pPr>
                       <a:r>
-                        <a:rPr lang="en-US" sz="1600" b="1" dirty="0">
+                        <a:rPr lang="en-US" sz="1500" b="1" dirty="0">
                           <a:solidFill>
                             <a:srgbClr val="FFFFFF"/>
                           </a:solidFill>
@@ -22552,7 +22552,7 @@
                         </a:rPr>
                         <a:t>share_pct</a:t>
                       </a:r>
-                      <a:endParaRPr lang="en-US" sz="1600" dirty="0">
+                      <a:endParaRPr lang="en-US" sz="1500" dirty="0">
                         <a:latin typeface="Helvetica Neue" charset="0"/>
                         <a:ea typeface="Helvetica Neue" charset="0"/>
                         <a:cs typeface="Helvetica Neue" charset="0"/>
@@ -22597,7 +22597,7 @@
                       <a:tailEnd type="none" w="med" len="med"/>
                     </a:lnB>
                     <a:solidFill>
-                      <a:srgbClr val="EAEAEA"/>
+                      <a:srgbClr val="4E79A7"/>
                     </a:solidFill>
                   </a:tcPr>
                 </a:tc>
@@ -22610,7 +22610,7 @@
                         <a:buNone/>
                       </a:pPr>
                       <a:r>
-                        <a:rPr lang="en-US" sz="1600" b="1" dirty="0">
+                        <a:rPr lang="en-US" sz="1500" b="1" dirty="0">
                           <a:solidFill>
                             <a:srgbClr val="FFFFFF"/>
                           </a:solidFill>
@@ -22620,7 +22620,7 @@
                         </a:rPr>
                         <a:t>nps</a:t>
                       </a:r>
-                      <a:endParaRPr lang="en-US" sz="1600" dirty="0">
+                      <a:endParaRPr lang="en-US" sz="1500" dirty="0">
                         <a:latin typeface="Helvetica Neue" charset="0"/>
                         <a:ea typeface="Helvetica Neue" charset="0"/>
                         <a:cs typeface="Helvetica Neue" charset="0"/>
@@ -22665,7 +22665,7 @@
                       <a:tailEnd type="none" w="med" len="med"/>
                     </a:lnB>
                     <a:solidFill>
-                      <a:srgbClr val="EAEAEA"/>
+                      <a:srgbClr val="4E79A7"/>
                     </a:solidFill>
                   </a:tcPr>
                 </a:tc>
@@ -22680,7 +22680,7 @@
                         <a:buNone/>
                       </a:pPr>
                       <a:r>
-                        <a:rPr lang="en-US" sz="1600" b="1" dirty="0">
+                        <a:rPr lang="en-US" sz="1500" b="1" dirty="0">
                           <a:solidFill>
                             <a:srgbClr val="EAEAEA"/>
                           </a:solidFill>
@@ -22690,7 +22690,7 @@
                         </a:rPr>
                         <a:t>Web</a:t>
                       </a:r>
-                      <a:endParaRPr lang="en-US" sz="1600" dirty="0">
+                      <a:endParaRPr lang="en-US" sz="1500" dirty="0">
                         <a:latin typeface="Helvetica Neue" charset="0"/>
                         <a:ea typeface="Helvetica Neue" charset="0"/>
                         <a:cs typeface="Helvetica Neue" charset="0"/>
@@ -22748,7 +22748,7 @@
                         <a:buNone/>
                       </a:pPr>
                       <a:r>
-                        <a:rPr lang="en-US" sz="1600" dirty="0">
+                        <a:rPr lang="en-US" sz="1500" dirty="0">
                           <a:solidFill>
                             <a:srgbClr val="EAEAEA"/>
                           </a:solidFill>
@@ -22758,7 +22758,7 @@
                         </a:rPr>
                         <a:t>34</a:t>
                       </a:r>
-                      <a:endParaRPr lang="en-US" sz="1600" dirty="0">
+                      <a:endParaRPr lang="en-US" sz="1500" dirty="0">
                         <a:latin typeface="Helvetica Neue" charset="0"/>
                         <a:ea typeface="Helvetica Neue" charset="0"/>
                         <a:cs typeface="Helvetica Neue" charset="0"/>
@@ -22816,7 +22816,7 @@
                         <a:buNone/>
                       </a:pPr>
                       <a:r>
-                        <a:rPr lang="en-US" sz="1600" dirty="0">
+                        <a:rPr lang="en-US" sz="1500" dirty="0">
                           <a:solidFill>
                             <a:srgbClr val="EAEAEA"/>
                           </a:solidFill>
@@ -22826,7 +22826,7 @@
                         </a:rPr>
                         <a:t>42</a:t>
                       </a:r>
-                      <a:endParaRPr lang="en-US" sz="1600" dirty="0">
+                      <a:endParaRPr lang="en-US" sz="1500" dirty="0">
                         <a:latin typeface="Helvetica Neue" charset="0"/>
                         <a:ea typeface="Helvetica Neue" charset="0"/>
                         <a:cs typeface="Helvetica Neue" charset="0"/>
@@ -22886,7 +22886,7 @@
                         <a:buNone/>
                       </a:pPr>
                       <a:r>
-                        <a:rPr lang="en-US" sz="1600" b="1" dirty="0">
+                        <a:rPr lang="en-US" sz="1500" b="1" dirty="0">
                           <a:solidFill>
                             <a:srgbClr val="EAEAEA"/>
                           </a:solidFill>
@@ -22896,7 +22896,7 @@
                         </a:rPr>
                         <a:t>Mobile app</a:t>
                       </a:r>
-                      <a:endParaRPr lang="en-US" sz="1600" dirty="0">
+                      <a:endParaRPr lang="en-US" sz="1500" dirty="0">
                         <a:latin typeface="Helvetica Neue" charset="0"/>
                         <a:ea typeface="Helvetica Neue" charset="0"/>
                         <a:cs typeface="Helvetica Neue" charset="0"/>
@@ -22954,7 +22954,7 @@
                         <a:buNone/>
                       </a:pPr>
                       <a:r>
-                        <a:rPr lang="en-US" sz="1600" dirty="0">
+                        <a:rPr lang="en-US" sz="1500" dirty="0">
                           <a:solidFill>
                             <a:srgbClr val="EAEAEA"/>
                           </a:solidFill>
@@ -22964,7 +22964,7 @@
                         </a:rPr>
                         <a:t>28</a:t>
                       </a:r>
-                      <a:endParaRPr lang="en-US" sz="1600" dirty="0">
+                      <a:endParaRPr lang="en-US" sz="1500" dirty="0">
                         <a:latin typeface="Helvetica Neue" charset="0"/>
                         <a:ea typeface="Helvetica Neue" charset="0"/>
                         <a:cs typeface="Helvetica Neue" charset="0"/>
@@ -23022,7 +23022,7 @@
                         <a:buNone/>
                       </a:pPr>
                       <a:r>
-                        <a:rPr lang="en-US" sz="1600" dirty="0">
+                        <a:rPr lang="en-US" sz="1500" dirty="0">
                           <a:solidFill>
                             <a:srgbClr val="EAEAEA"/>
                           </a:solidFill>
@@ -23032,7 +23032,7 @@
                         </a:rPr>
                         <a:t>51</a:t>
                       </a:r>
-                      <a:endParaRPr lang="en-US" sz="1600" dirty="0">
+                      <a:endParaRPr lang="en-US" sz="1500" dirty="0">
                         <a:latin typeface="Helvetica Neue" charset="0"/>
                         <a:ea typeface="Helvetica Neue" charset="0"/>
                         <a:cs typeface="Helvetica Neue" charset="0"/>
@@ -23092,7 +23092,7 @@
                         <a:buNone/>
                       </a:pPr>
                       <a:r>
-                        <a:rPr lang="en-US" sz="1600" b="1" dirty="0">
+                        <a:rPr lang="en-US" sz="1500" b="1" dirty="0">
                           <a:solidFill>
                             <a:srgbClr val="EAEAEA"/>
                           </a:solidFill>
@@ -23102,7 +23102,7 @@
                         </a:rPr>
                         <a:t>Email / CRM</a:t>
                       </a:r>
-                      <a:endParaRPr lang="en-US" sz="1600" dirty="0">
+                      <a:endParaRPr lang="en-US" sz="1500" dirty="0">
                         <a:latin typeface="Helvetica Neue" charset="0"/>
                         <a:ea typeface="Helvetica Neue" charset="0"/>
                         <a:cs typeface="Helvetica Neue" charset="0"/>
@@ -23160,7 +23160,7 @@
                         <a:buNone/>
                       </a:pPr>
                       <a:r>
-                        <a:rPr lang="en-US" sz="1600" dirty="0">
+                        <a:rPr lang="en-US" sz="1500" dirty="0">
                           <a:solidFill>
                             <a:srgbClr val="EAEAEA"/>
                           </a:solidFill>
@@ -23170,7 +23170,7 @@
                         </a:rPr>
                         <a:t>18</a:t>
                       </a:r>
-                      <a:endParaRPr lang="en-US" sz="1600" dirty="0">
+                      <a:endParaRPr lang="en-US" sz="1500" dirty="0">
                         <a:latin typeface="Helvetica Neue" charset="0"/>
                         <a:ea typeface="Helvetica Neue" charset="0"/>
                         <a:cs typeface="Helvetica Neue" charset="0"/>
@@ -23228,7 +23228,7 @@
                         <a:buNone/>
                       </a:pPr>
                       <a:r>
-                        <a:rPr lang="en-US" sz="1600" dirty="0">
+                        <a:rPr lang="en-US" sz="1500" dirty="0">
                           <a:solidFill>
                             <a:srgbClr val="EAEAEA"/>
                           </a:solidFill>
@@ -23238,7 +23238,7 @@
                         </a:rPr>
                         <a:t>38</a:t>
                       </a:r>
-                      <a:endParaRPr lang="en-US" sz="1600" dirty="0">
+                      <a:endParaRPr lang="en-US" sz="1500" dirty="0">
                         <a:latin typeface="Helvetica Neue" charset="0"/>
                         <a:ea typeface="Helvetica Neue" charset="0"/>
                         <a:cs typeface="Helvetica Neue" charset="0"/>
@@ -23298,7 +23298,7 @@
                         <a:buNone/>
                       </a:pPr>
                       <a:r>
-                        <a:rPr lang="en-US" sz="1600" b="1" dirty="0">
+                        <a:rPr lang="en-US" sz="1500" b="1" dirty="0">
                           <a:solidFill>
                             <a:srgbClr val="EAEAEA"/>
                           </a:solidFill>
@@ -23308,7 +23308,7 @@
                         </a:rPr>
                         <a:t>Partners</a:t>
                       </a:r>
-                      <a:endParaRPr lang="en-US" sz="1600" dirty="0">
+                      <a:endParaRPr lang="en-US" sz="1500" dirty="0">
                         <a:latin typeface="Helvetica Neue" charset="0"/>
                         <a:ea typeface="Helvetica Neue" charset="0"/>
                         <a:cs typeface="Helvetica Neue" charset="0"/>
@@ -23366,7 +23366,7 @@
                         <a:buNone/>
                       </a:pPr>
                       <a:r>
-                        <a:rPr lang="en-US" sz="1600" dirty="0">
+                        <a:rPr lang="en-US" sz="1500" dirty="0">
                           <a:solidFill>
                             <a:srgbClr val="EAEAEA"/>
                           </a:solidFill>
@@ -23376,7 +23376,7 @@
                         </a:rPr>
                         <a:t>12</a:t>
                       </a:r>
-                      <a:endParaRPr lang="en-US" sz="1600" dirty="0">
+                      <a:endParaRPr lang="en-US" sz="1500" dirty="0">
                         <a:latin typeface="Helvetica Neue" charset="0"/>
                         <a:ea typeface="Helvetica Neue" charset="0"/>
                         <a:cs typeface="Helvetica Neue" charset="0"/>
@@ -23434,7 +23434,7 @@
                         <a:buNone/>
                       </a:pPr>
                       <a:r>
-                        <a:rPr lang="en-US" sz="1600" dirty="0">
+                        <a:rPr lang="en-US" sz="1500" dirty="0">
                           <a:solidFill>
                             <a:srgbClr val="EAEAEA"/>
                           </a:solidFill>
@@ -23444,7 +23444,7 @@
                         </a:rPr>
                         <a:t>29</a:t>
                       </a:r>
-                      <a:endParaRPr lang="en-US" sz="1600" dirty="0">
+                      <a:endParaRPr lang="en-US" sz="1500" dirty="0">
                         <a:latin typeface="Helvetica Neue" charset="0"/>
                         <a:ea typeface="Helvetica Neue" charset="0"/>
                         <a:cs typeface="Helvetica Neue" charset="0"/>
@@ -23504,7 +23504,7 @@
                         <a:buNone/>
                       </a:pPr>
                       <a:r>
-                        <a:rPr lang="en-US" sz="1600" b="1" dirty="0">
+                        <a:rPr lang="en-US" sz="1500" b="1" dirty="0">
                           <a:solidFill>
                             <a:srgbClr val="EAEAEA"/>
                           </a:solidFill>
@@ -23514,7 +23514,7 @@
                         </a:rPr>
                         <a:t>In-product</a:t>
                       </a:r>
-                      <a:endParaRPr lang="en-US" sz="1600" dirty="0">
+                      <a:endParaRPr lang="en-US" sz="1500" dirty="0">
                         <a:latin typeface="Helvetica Neue" charset="0"/>
                         <a:ea typeface="Helvetica Neue" charset="0"/>
                         <a:cs typeface="Helvetica Neue" charset="0"/>
@@ -23572,7 +23572,7 @@
                         <a:buNone/>
                       </a:pPr>
                       <a:r>
-                        <a:rPr lang="en-US" sz="1600" dirty="0">
+                        <a:rPr lang="en-US" sz="1500" dirty="0">
                           <a:solidFill>
                             <a:srgbClr val="EAEAEA"/>
                           </a:solidFill>
@@ -23582,7 +23582,7 @@
                         </a:rPr>
                         <a:t>8</a:t>
                       </a:r>
-                      <a:endParaRPr lang="en-US" sz="1600" dirty="0">
+                      <a:endParaRPr lang="en-US" sz="1500" dirty="0">
                         <a:latin typeface="Helvetica Neue" charset="0"/>
                         <a:ea typeface="Helvetica Neue" charset="0"/>
                         <a:cs typeface="Helvetica Neue" charset="0"/>
@@ -23640,7 +23640,7 @@
                         <a:buNone/>
                       </a:pPr>
                       <a:r>
-                        <a:rPr lang="en-US" sz="1600" dirty="0">
+                        <a:rPr lang="en-US" sz="1500" dirty="0">
                           <a:solidFill>
                             <a:srgbClr val="EAEAEA"/>
                           </a:solidFill>
@@ -23650,7 +23650,7 @@
                         </a:rPr>
                         <a:t>55</a:t>
                       </a:r>
-                      <a:endParaRPr lang="en-US" sz="1600" dirty="0">
+                      <a:endParaRPr lang="en-US" sz="1500" dirty="0">
                         <a:latin typeface="Helvetica Neue" charset="0"/>
                         <a:ea typeface="Helvetica Neue" charset="0"/>
                         <a:cs typeface="Helvetica Neue" charset="0"/>
